--- a/docs/lectures/7/Hardware Security.pptx
+++ b/docs/lectures/7/Hardware Security.pptx
@@ -206,30 +206,6 @@
           <pc:docMk/>
           <pc:sldMk cId="3038245579" sldId="257"/>
         </pc:sldMkLst>
-        <pc:spChg chg="add mod">
-          <ac:chgData name="Sana Belguith" userId="edaa0afb-4621-4165-af1d-05ed505f7999" providerId="ADAL" clId="{06919C33-FD09-4C75-9807-013446205127}" dt="2022-10-24T11:47:51.336" v="29" actId="1076"/>
-          <ac:spMkLst>
-            <pc:docMk/>
-            <pc:sldMk cId="3038245579" sldId="257"/>
-            <ac:spMk id="2" creationId="{9C54B558-1DBF-AD15-A03F-05853D42EF59}"/>
-          </ac:spMkLst>
-        </pc:spChg>
-        <pc:spChg chg="del">
-          <ac:chgData name="Sana Belguith" userId="edaa0afb-4621-4165-af1d-05ed505f7999" providerId="ADAL" clId="{06919C33-FD09-4C75-9807-013446205127}" dt="2022-10-24T11:47:27.019" v="3" actId="478"/>
-          <ac:spMkLst>
-            <pc:docMk/>
-            <pc:sldMk cId="3038245579" sldId="257"/>
-            <ac:spMk id="3" creationId="{4FADE76B-C679-4CBD-998D-4409DA13C9D9}"/>
-          </ac:spMkLst>
-        </pc:spChg>
-        <pc:spChg chg="mod">
-          <ac:chgData name="Sana Belguith" userId="edaa0afb-4621-4165-af1d-05ed505f7999" providerId="ADAL" clId="{06919C33-FD09-4C75-9807-013446205127}" dt="2022-10-24T11:47:37.092" v="7" actId="14100"/>
-          <ac:spMkLst>
-            <pc:docMk/>
-            <pc:sldMk cId="3038245579" sldId="257"/>
-            <ac:spMk id="4" creationId="{0C313715-B182-4B4F-9C42-DF3B4243B3ED}"/>
-          </ac:spMkLst>
-        </pc:spChg>
       </pc:sldChg>
       <pc:sldChg chg="del">
         <pc:chgData name="Sana Belguith" userId="edaa0afb-4621-4165-af1d-05ed505f7999" providerId="ADAL" clId="{06919C33-FD09-4C75-9807-013446205127}" dt="2022-10-24T11:48:08.898" v="31" actId="47"/>
@@ -251,22 +227,6 @@
           <pc:docMk/>
           <pc:sldMk cId="1838873178" sldId="436"/>
         </pc:sldMkLst>
-        <pc:spChg chg="mod">
-          <ac:chgData name="Sana Belguith" userId="edaa0afb-4621-4165-af1d-05ed505f7999" providerId="ADAL" clId="{06919C33-FD09-4C75-9807-013446205127}" dt="2022-10-25T15:16:51.304" v="453" actId="108"/>
-          <ac:spMkLst>
-            <pc:docMk/>
-            <pc:sldMk cId="1838873178" sldId="436"/>
-            <ac:spMk id="2" creationId="{00000000-0000-0000-0000-000000000000}"/>
-          </ac:spMkLst>
-        </pc:spChg>
-        <pc:spChg chg="mod">
-          <ac:chgData name="Sana Belguith" userId="edaa0afb-4621-4165-af1d-05ed505f7999" providerId="ADAL" clId="{06919C33-FD09-4C75-9807-013446205127}" dt="2022-10-25T15:17:47.899" v="470" actId="27636"/>
-          <ac:spMkLst>
-            <pc:docMk/>
-            <pc:sldMk cId="1838873178" sldId="436"/>
-            <ac:spMk id="5" creationId="{00000000-0000-0000-0000-000000000000}"/>
-          </ac:spMkLst>
-        </pc:spChg>
       </pc:sldChg>
       <pc:sldChg chg="addSp delSp modSp del mod">
         <pc:chgData name="Sana Belguith" userId="edaa0afb-4621-4165-af1d-05ed505f7999" providerId="ADAL" clId="{06919C33-FD09-4C75-9807-013446205127}" dt="2022-10-24T11:47:21.224" v="2" actId="47"/>
@@ -274,22 +234,6 @@
           <pc:docMk/>
           <pc:sldMk cId="1105306674" sldId="446"/>
         </pc:sldMkLst>
-        <pc:spChg chg="del">
-          <ac:chgData name="Sana Belguith" userId="edaa0afb-4621-4165-af1d-05ed505f7999" providerId="ADAL" clId="{06919C33-FD09-4C75-9807-013446205127}" dt="2022-10-24T11:46:28.648" v="0" actId="478"/>
-          <ac:spMkLst>
-            <pc:docMk/>
-            <pc:sldMk cId="1105306674" sldId="446"/>
-            <ac:spMk id="2" creationId="{00000000-0000-0000-0000-000000000000}"/>
-          </ac:spMkLst>
-        </pc:spChg>
-        <pc:spChg chg="add mod">
-          <ac:chgData name="Sana Belguith" userId="edaa0afb-4621-4165-af1d-05ed505f7999" providerId="ADAL" clId="{06919C33-FD09-4C75-9807-013446205127}" dt="2022-10-24T11:46:28.648" v="0" actId="478"/>
-          <ac:spMkLst>
-            <pc:docMk/>
-            <pc:sldMk cId="1105306674" sldId="446"/>
-            <ac:spMk id="5" creationId="{76290843-3A60-0B83-0310-FA1FA9E0294E}"/>
-          </ac:spMkLst>
-        </pc:spChg>
       </pc:sldChg>
       <pc:sldChg chg="modSp mod modNotesTx">
         <pc:chgData name="Sana Belguith" userId="edaa0afb-4621-4165-af1d-05ed505f7999" providerId="ADAL" clId="{06919C33-FD09-4C75-9807-013446205127}" dt="2022-10-25T15:18:20.705" v="473" actId="2711"/>
@@ -297,22 +241,6 @@
           <pc:docMk/>
           <pc:sldMk cId="896114321" sldId="448"/>
         </pc:sldMkLst>
-        <pc:spChg chg="mod">
-          <ac:chgData name="Sana Belguith" userId="edaa0afb-4621-4165-af1d-05ed505f7999" providerId="ADAL" clId="{06919C33-FD09-4C75-9807-013446205127}" dt="2022-10-25T15:18:12.015" v="472" actId="108"/>
-          <ac:spMkLst>
-            <pc:docMk/>
-            <pc:sldMk cId="896114321" sldId="448"/>
-            <ac:spMk id="2" creationId="{00000000-0000-0000-0000-000000000000}"/>
-          </ac:spMkLst>
-        </pc:spChg>
-        <pc:spChg chg="mod">
-          <ac:chgData name="Sana Belguith" userId="edaa0afb-4621-4165-af1d-05ed505f7999" providerId="ADAL" clId="{06919C33-FD09-4C75-9807-013446205127}" dt="2022-10-25T15:18:20.705" v="473" actId="2711"/>
-          <ac:spMkLst>
-            <pc:docMk/>
-            <pc:sldMk cId="896114321" sldId="448"/>
-            <ac:spMk id="5" creationId="{00000000-0000-0000-0000-000000000000}"/>
-          </ac:spMkLst>
-        </pc:spChg>
       </pc:sldChg>
       <pc:sldChg chg="modSp mod">
         <pc:chgData name="Sana Belguith" userId="edaa0afb-4621-4165-af1d-05ed505f7999" providerId="ADAL" clId="{06919C33-FD09-4C75-9807-013446205127}" dt="2022-10-25T15:16:42.476" v="452" actId="2711"/>
@@ -320,14 +248,6 @@
           <pc:docMk/>
           <pc:sldMk cId="600677380" sldId="476"/>
         </pc:sldMkLst>
-        <pc:spChg chg="mod">
-          <ac:chgData name="Sana Belguith" userId="edaa0afb-4621-4165-af1d-05ed505f7999" providerId="ADAL" clId="{06919C33-FD09-4C75-9807-013446205127}" dt="2022-10-25T15:16:42.476" v="452" actId="2711"/>
-          <ac:spMkLst>
-            <pc:docMk/>
-            <pc:sldMk cId="600677380" sldId="476"/>
-            <ac:spMk id="4" creationId="{E78CBA6C-BCA2-4E4C-A070-A74EF58EDABF}"/>
-          </ac:spMkLst>
-        </pc:spChg>
       </pc:sldChg>
       <pc:sldChg chg="modSp mod ord">
         <pc:chgData name="Sana Belguith" userId="edaa0afb-4621-4165-af1d-05ed505f7999" providerId="ADAL" clId="{06919C33-FD09-4C75-9807-013446205127}" dt="2022-10-26T11:59:35.294" v="1111"/>
@@ -335,14 +255,6 @@
           <pc:docMk/>
           <pc:sldMk cId="1519712589" sldId="479"/>
         </pc:sldMkLst>
-        <pc:spChg chg="mod">
-          <ac:chgData name="Sana Belguith" userId="edaa0afb-4621-4165-af1d-05ed505f7999" providerId="ADAL" clId="{06919C33-FD09-4C75-9807-013446205127}" dt="2022-10-25T15:18:28.209" v="474" actId="2711"/>
-          <ac:spMkLst>
-            <pc:docMk/>
-            <pc:sldMk cId="1519712589" sldId="479"/>
-            <ac:spMk id="4" creationId="{E78CBA6C-BCA2-4E4C-A070-A74EF58EDABF}"/>
-          </ac:spMkLst>
-        </pc:spChg>
       </pc:sldChg>
       <pc:sldChg chg="modSp mod">
         <pc:chgData name="Sana Belguith" userId="edaa0afb-4621-4165-af1d-05ed505f7999" providerId="ADAL" clId="{06919C33-FD09-4C75-9807-013446205127}" dt="2022-10-25T15:22:39.735" v="552" actId="2711"/>
@@ -350,14 +262,6 @@
           <pc:docMk/>
           <pc:sldMk cId="2874797485" sldId="480"/>
         </pc:sldMkLst>
-        <pc:spChg chg="mod">
-          <ac:chgData name="Sana Belguith" userId="edaa0afb-4621-4165-af1d-05ed505f7999" providerId="ADAL" clId="{06919C33-FD09-4C75-9807-013446205127}" dt="2022-10-25T15:22:39.735" v="552" actId="2711"/>
-          <ac:spMkLst>
-            <pc:docMk/>
-            <pc:sldMk cId="2874797485" sldId="480"/>
-            <ac:spMk id="4" creationId="{52F57C61-B4AC-4DBE-94FD-F03E2B8479F7}"/>
-          </ac:spMkLst>
-        </pc:spChg>
       </pc:sldChg>
       <pc:sldChg chg="del">
         <pc:chgData name="Sana Belguith" userId="edaa0afb-4621-4165-af1d-05ed505f7999" providerId="ADAL" clId="{06919C33-FD09-4C75-9807-013446205127}" dt="2022-10-24T11:48:25.990" v="32" actId="47"/>
@@ -372,14 +276,6 @@
           <pc:docMk/>
           <pc:sldMk cId="1672020598" sldId="797"/>
         </pc:sldMkLst>
-        <pc:spChg chg="mod">
-          <ac:chgData name="Sana Belguith" userId="edaa0afb-4621-4165-af1d-05ed505f7999" providerId="ADAL" clId="{06919C33-FD09-4C75-9807-013446205127}" dt="2022-10-26T15:26:45.231" v="3522" actId="113"/>
-          <ac:spMkLst>
-            <pc:docMk/>
-            <pc:sldMk cId="1672020598" sldId="797"/>
-            <ac:spMk id="5" creationId="{00000000-0000-0000-0000-000000000000}"/>
-          </ac:spMkLst>
-        </pc:spChg>
       </pc:sldChg>
       <pc:sldChg chg="addSp delSp modSp new mod ord chgLayout">
         <pc:chgData name="Sana Belguith" userId="edaa0afb-4621-4165-af1d-05ed505f7999" providerId="ADAL" clId="{06919C33-FD09-4C75-9807-013446205127}" dt="2022-10-26T14:30:37.796" v="2631" actId="5793"/>
@@ -387,62 +283,6 @@
           <pc:docMk/>
           <pc:sldMk cId="905303464" sldId="798"/>
         </pc:sldMkLst>
-        <pc:spChg chg="mod ord">
-          <ac:chgData name="Sana Belguith" userId="edaa0afb-4621-4165-af1d-05ed505f7999" providerId="ADAL" clId="{06919C33-FD09-4C75-9807-013446205127}" dt="2022-10-26T13:24:08.112" v="1140" actId="1076"/>
-          <ac:spMkLst>
-            <pc:docMk/>
-            <pc:sldMk cId="905303464" sldId="798"/>
-            <ac:spMk id="2" creationId="{E8BAAAB4-5DE0-D0AE-38F1-A6954D279F30}"/>
-          </ac:spMkLst>
-        </pc:spChg>
-        <pc:spChg chg="del">
-          <ac:chgData name="Sana Belguith" userId="edaa0afb-4621-4165-af1d-05ed505f7999" providerId="ADAL" clId="{06919C33-FD09-4C75-9807-013446205127}" dt="2022-10-24T11:50:05.621" v="35" actId="3680"/>
-          <ac:spMkLst>
-            <pc:docMk/>
-            <pc:sldMk cId="905303464" sldId="798"/>
-            <ac:spMk id="3" creationId="{529B2DB5-1924-5DB3-60F5-7657256AF638}"/>
-          </ac:spMkLst>
-        </pc:spChg>
-        <pc:spChg chg="add mod">
-          <ac:chgData name="Sana Belguith" userId="edaa0afb-4621-4165-af1d-05ed505f7999" providerId="ADAL" clId="{06919C33-FD09-4C75-9807-013446205127}" dt="2022-10-26T13:48:23.381" v="2196" actId="1076"/>
-          <ac:spMkLst>
-            <pc:docMk/>
-            <pc:sldMk cId="905303464" sldId="798"/>
-            <ac:spMk id="6" creationId="{1F85734F-124C-9C8D-E1E1-FF04C909B08D}"/>
-          </ac:spMkLst>
-        </pc:spChg>
-        <pc:spChg chg="add del mod">
-          <ac:chgData name="Sana Belguith" userId="edaa0afb-4621-4165-af1d-05ed505f7999" providerId="ADAL" clId="{06919C33-FD09-4C75-9807-013446205127}" dt="2022-10-26T13:23:50.175" v="1135"/>
-          <ac:spMkLst>
-            <pc:docMk/>
-            <pc:sldMk cId="905303464" sldId="798"/>
-            <ac:spMk id="7" creationId="{15384D47-7938-8F6C-49AC-4C746D42D5D0}"/>
-          </ac:spMkLst>
-        </pc:spChg>
-        <pc:spChg chg="add del mod">
-          <ac:chgData name="Sana Belguith" userId="edaa0afb-4621-4165-af1d-05ed505f7999" providerId="ADAL" clId="{06919C33-FD09-4C75-9807-013446205127}" dt="2022-10-26T13:48:23.713" v="2198"/>
-          <ac:spMkLst>
-            <pc:docMk/>
-            <pc:sldMk cId="905303464" sldId="798"/>
-            <ac:spMk id="8" creationId="{124BCE85-12EF-56F9-F39E-91FD5E9252E1}"/>
-          </ac:spMkLst>
-        </pc:spChg>
-        <pc:spChg chg="add mod">
-          <ac:chgData name="Sana Belguith" userId="edaa0afb-4621-4165-af1d-05ed505f7999" providerId="ADAL" clId="{06919C33-FD09-4C75-9807-013446205127}" dt="2022-10-26T14:30:37.796" v="2631" actId="5793"/>
-          <ac:spMkLst>
-            <pc:docMk/>
-            <pc:sldMk cId="905303464" sldId="798"/>
-            <ac:spMk id="10" creationId="{1DA27E43-A53F-1B2B-6FA7-B008A899ABA6}"/>
-          </ac:spMkLst>
-        </pc:spChg>
-        <pc:graphicFrameChg chg="add del mod ord modGraphic">
-          <ac:chgData name="Sana Belguith" userId="edaa0afb-4621-4165-af1d-05ed505f7999" providerId="ADAL" clId="{06919C33-FD09-4C75-9807-013446205127}" dt="2022-10-26T13:47:40.128" v="2180" actId="21"/>
-          <ac:graphicFrameMkLst>
-            <pc:docMk/>
-            <pc:sldMk cId="905303464" sldId="798"/>
-            <ac:graphicFrameMk id="4" creationId="{93FF51F6-D480-6E08-9B09-55A742334957}"/>
-          </ac:graphicFrameMkLst>
-        </pc:graphicFrameChg>
       </pc:sldChg>
       <pc:sldChg chg="modSp new mod">
         <pc:chgData name="Sana Belguith" userId="edaa0afb-4621-4165-af1d-05ed505f7999" providerId="ADAL" clId="{06919C33-FD09-4C75-9807-013446205127}" dt="2022-10-26T11:21:19.560" v="862" actId="404"/>
@@ -450,22 +290,6 @@
           <pc:docMk/>
           <pc:sldMk cId="3522719768" sldId="799"/>
         </pc:sldMkLst>
-        <pc:spChg chg="mod">
-          <ac:chgData name="Sana Belguith" userId="edaa0afb-4621-4165-af1d-05ed505f7999" providerId="ADAL" clId="{06919C33-FD09-4C75-9807-013446205127}" dt="2022-10-26T11:21:00.700" v="860" actId="1076"/>
-          <ac:spMkLst>
-            <pc:docMk/>
-            <pc:sldMk cId="3522719768" sldId="799"/>
-            <ac:spMk id="2" creationId="{713CC63B-EAE6-A242-93B6-97B3C3E68714}"/>
-          </ac:spMkLst>
-        </pc:spChg>
-        <pc:spChg chg="mod">
-          <ac:chgData name="Sana Belguith" userId="edaa0afb-4621-4165-af1d-05ed505f7999" providerId="ADAL" clId="{06919C33-FD09-4C75-9807-013446205127}" dt="2022-10-26T11:21:19.560" v="862" actId="404"/>
-          <ac:spMkLst>
-            <pc:docMk/>
-            <pc:sldMk cId="3522719768" sldId="799"/>
-            <ac:spMk id="3" creationId="{491465E4-22D4-029F-418A-808C00BAC01F}"/>
-          </ac:spMkLst>
-        </pc:spChg>
       </pc:sldChg>
       <pc:sldChg chg="addSp modSp new mod modAnim">
         <pc:chgData name="Sana Belguith" userId="edaa0afb-4621-4165-af1d-05ed505f7999" providerId="ADAL" clId="{06919C33-FD09-4C75-9807-013446205127}" dt="2022-10-27T13:16:37.940" v="3626" actId="20577"/>
@@ -473,30 +297,6 @@
           <pc:docMk/>
           <pc:sldMk cId="2594508609" sldId="800"/>
         </pc:sldMkLst>
-        <pc:spChg chg="mod">
-          <ac:chgData name="Sana Belguith" userId="edaa0afb-4621-4165-af1d-05ed505f7999" providerId="ADAL" clId="{06919C33-FD09-4C75-9807-013446205127}" dt="2022-10-25T15:47:32.933" v="729" actId="1076"/>
-          <ac:spMkLst>
-            <pc:docMk/>
-            <pc:sldMk cId="2594508609" sldId="800"/>
-            <ac:spMk id="2" creationId="{1DC6CD09-D4EB-7920-93E7-059C7F2ED04F}"/>
-          </ac:spMkLst>
-        </pc:spChg>
-        <pc:spChg chg="mod">
-          <ac:chgData name="Sana Belguith" userId="edaa0afb-4621-4165-af1d-05ed505f7999" providerId="ADAL" clId="{06919C33-FD09-4C75-9807-013446205127}" dt="2022-10-27T13:16:37.940" v="3626" actId="20577"/>
-          <ac:spMkLst>
-            <pc:docMk/>
-            <pc:sldMk cId="2594508609" sldId="800"/>
-            <ac:spMk id="3" creationId="{80A18498-82DE-B59D-9888-A5078C9AE9B5}"/>
-          </ac:spMkLst>
-        </pc:spChg>
-        <pc:graphicFrameChg chg="add mod">
-          <ac:chgData name="Sana Belguith" userId="edaa0afb-4621-4165-af1d-05ed505f7999" providerId="ADAL" clId="{06919C33-FD09-4C75-9807-013446205127}" dt="2022-10-27T13:10:48.625" v="3606" actId="1076"/>
-          <ac:graphicFrameMkLst>
-            <pc:docMk/>
-            <pc:sldMk cId="2594508609" sldId="800"/>
-            <ac:graphicFrameMk id="4" creationId="{56F55EF1-AD30-FAD0-2D47-88A20928636A}"/>
-          </ac:graphicFrameMkLst>
-        </pc:graphicFrameChg>
       </pc:sldChg>
       <pc:sldChg chg="addSp modSp new mod ord modAnim">
         <pc:chgData name="Sana Belguith" userId="edaa0afb-4621-4165-af1d-05ed505f7999" providerId="ADAL" clId="{06919C33-FD09-4C75-9807-013446205127}" dt="2022-10-26T11:21:25.589" v="864" actId="1076"/>
@@ -504,38 +304,6 @@
           <pc:docMk/>
           <pc:sldMk cId="424211009" sldId="801"/>
         </pc:sldMkLst>
-        <pc:spChg chg="mod">
-          <ac:chgData name="Sana Belguith" userId="edaa0afb-4621-4165-af1d-05ed505f7999" providerId="ADAL" clId="{06919C33-FD09-4C75-9807-013446205127}" dt="2022-10-25T15:44:23.037" v="685" actId="1076"/>
-          <ac:spMkLst>
-            <pc:docMk/>
-            <pc:sldMk cId="424211009" sldId="801"/>
-            <ac:spMk id="2" creationId="{AF5436F4-85A3-3827-AD77-9FD0C16EEC30}"/>
-          </ac:spMkLst>
-        </pc:spChg>
-        <pc:spChg chg="mod">
-          <ac:chgData name="Sana Belguith" userId="edaa0afb-4621-4165-af1d-05ed505f7999" providerId="ADAL" clId="{06919C33-FD09-4C75-9807-013446205127}" dt="2022-10-25T15:46:31.677" v="713" actId="5793"/>
-          <ac:spMkLst>
-            <pc:docMk/>
-            <pc:sldMk cId="424211009" sldId="801"/>
-            <ac:spMk id="3" creationId="{168B1244-2E4A-CE47-C2F0-223F40A87109}"/>
-          </ac:spMkLst>
-        </pc:spChg>
-        <pc:graphicFrameChg chg="add mod modGraphic">
-          <ac:chgData name="Sana Belguith" userId="edaa0afb-4621-4165-af1d-05ed505f7999" providerId="ADAL" clId="{06919C33-FD09-4C75-9807-013446205127}" dt="2022-10-24T12:14:55.374" v="150" actId="1076"/>
-          <ac:graphicFrameMkLst>
-            <pc:docMk/>
-            <pc:sldMk cId="424211009" sldId="801"/>
-            <ac:graphicFrameMk id="4" creationId="{93EA3879-C842-B0B3-0646-B34318F72747}"/>
-          </ac:graphicFrameMkLst>
-        </pc:graphicFrameChg>
-        <pc:graphicFrameChg chg="add mod modGraphic">
-          <ac:chgData name="Sana Belguith" userId="edaa0afb-4621-4165-af1d-05ed505f7999" providerId="ADAL" clId="{06919C33-FD09-4C75-9807-013446205127}" dt="2022-10-26T11:21:25.589" v="864" actId="1076"/>
-          <ac:graphicFrameMkLst>
-            <pc:docMk/>
-            <pc:sldMk cId="424211009" sldId="801"/>
-            <ac:graphicFrameMk id="5" creationId="{8FF67351-6907-2E42-6D77-0A97DD2AE01E}"/>
-          </ac:graphicFrameMkLst>
-        </pc:graphicFrameChg>
       </pc:sldChg>
       <pc:sldChg chg="modSp new add del mod ord">
         <pc:chgData name="Sana Belguith" userId="edaa0afb-4621-4165-af1d-05ed505f7999" providerId="ADAL" clId="{06919C33-FD09-4C75-9807-013446205127}" dt="2022-10-26T11:42:52.489" v="895" actId="403"/>
@@ -543,22 +311,6 @@
           <pc:docMk/>
           <pc:sldMk cId="1714808608" sldId="802"/>
         </pc:sldMkLst>
-        <pc:spChg chg="mod">
-          <ac:chgData name="Sana Belguith" userId="edaa0afb-4621-4165-af1d-05ed505f7999" providerId="ADAL" clId="{06919C33-FD09-4C75-9807-013446205127}" dt="2022-10-25T16:42:26.207" v="794" actId="1076"/>
-          <ac:spMkLst>
-            <pc:docMk/>
-            <pc:sldMk cId="1714808608" sldId="802"/>
-            <ac:spMk id="2" creationId="{C9C06766-3424-6544-2ACC-2B20B15DC61A}"/>
-          </ac:spMkLst>
-        </pc:spChg>
-        <pc:spChg chg="mod">
-          <ac:chgData name="Sana Belguith" userId="edaa0afb-4621-4165-af1d-05ed505f7999" providerId="ADAL" clId="{06919C33-FD09-4C75-9807-013446205127}" dt="2022-10-26T11:42:52.489" v="895" actId="403"/>
-          <ac:spMkLst>
-            <pc:docMk/>
-            <pc:sldMk cId="1714808608" sldId="802"/>
-            <ac:spMk id="3" creationId="{D102418F-B119-DF92-8AC4-7DB0699B14FE}"/>
-          </ac:spMkLst>
-        </pc:spChg>
       </pc:sldChg>
       <pc:sldChg chg="modSp new del mod">
         <pc:chgData name="Sana Belguith" userId="edaa0afb-4621-4165-af1d-05ed505f7999" providerId="ADAL" clId="{06919C33-FD09-4C75-9807-013446205127}" dt="2022-10-26T14:58:04.721" v="3195" actId="47"/>
@@ -566,22 +318,6 @@
           <pc:docMk/>
           <pc:sldMk cId="1705336307" sldId="803"/>
         </pc:sldMkLst>
-        <pc:spChg chg="mod">
-          <ac:chgData name="Sana Belguith" userId="edaa0afb-4621-4165-af1d-05ed505f7999" providerId="ADAL" clId="{06919C33-FD09-4C75-9807-013446205127}" dt="2022-10-25T16:58:42.606" v="824" actId="1076"/>
-          <ac:spMkLst>
-            <pc:docMk/>
-            <pc:sldMk cId="1705336307" sldId="803"/>
-            <ac:spMk id="2" creationId="{F92CAF45-A60B-4618-1892-65DFAA9C3537}"/>
-          </ac:spMkLst>
-        </pc:spChg>
-        <pc:spChg chg="mod">
-          <ac:chgData name="Sana Belguith" userId="edaa0afb-4621-4165-af1d-05ed505f7999" providerId="ADAL" clId="{06919C33-FD09-4C75-9807-013446205127}" dt="2022-10-24T12:24:31.715" v="167" actId="27636"/>
-          <ac:spMkLst>
-            <pc:docMk/>
-            <pc:sldMk cId="1705336307" sldId="803"/>
-            <ac:spMk id="3" creationId="{C1103722-D528-B073-0711-BE751CB38EA9}"/>
-          </ac:spMkLst>
-        </pc:spChg>
       </pc:sldChg>
       <pc:sldChg chg="addSp modSp new del mod">
         <pc:chgData name="Sana Belguith" userId="edaa0afb-4621-4165-af1d-05ed505f7999" providerId="ADAL" clId="{06919C33-FD09-4C75-9807-013446205127}" dt="2022-10-26T14:58:04.721" v="3195" actId="47"/>
@@ -589,30 +325,6 @@
           <pc:docMk/>
           <pc:sldMk cId="2355208625" sldId="804"/>
         </pc:sldMkLst>
-        <pc:spChg chg="mod">
-          <ac:chgData name="Sana Belguith" userId="edaa0afb-4621-4165-af1d-05ed505f7999" providerId="ADAL" clId="{06919C33-FD09-4C75-9807-013446205127}" dt="2022-10-26T11:18:26.862" v="848" actId="108"/>
-          <ac:spMkLst>
-            <pc:docMk/>
-            <pc:sldMk cId="2355208625" sldId="804"/>
-            <ac:spMk id="2" creationId="{5D2F9DEC-6258-4BC0-AA95-A0352C3C3864}"/>
-          </ac:spMkLst>
-        </pc:spChg>
-        <pc:spChg chg="mod">
-          <ac:chgData name="Sana Belguith" userId="edaa0afb-4621-4165-af1d-05ed505f7999" providerId="ADAL" clId="{06919C33-FD09-4C75-9807-013446205127}" dt="2022-10-24T12:24:43.858" v="171" actId="27636"/>
-          <ac:spMkLst>
-            <pc:docMk/>
-            <pc:sldMk cId="2355208625" sldId="804"/>
-            <ac:spMk id="3" creationId="{0AC1B88C-6F02-509F-3693-B6674DC7A8A8}"/>
-          </ac:spMkLst>
-        </pc:spChg>
-        <pc:picChg chg="add mod">
-          <ac:chgData name="Sana Belguith" userId="edaa0afb-4621-4165-af1d-05ed505f7999" providerId="ADAL" clId="{06919C33-FD09-4C75-9807-013446205127}" dt="2022-10-24T12:24:54.484" v="176" actId="1076"/>
-          <ac:picMkLst>
-            <pc:docMk/>
-            <pc:sldMk cId="2355208625" sldId="804"/>
-            <ac:picMk id="5" creationId="{0DBC9434-B685-865F-6532-00250061FE02}"/>
-          </ac:picMkLst>
-        </pc:picChg>
       </pc:sldChg>
       <pc:sldChg chg="modSp new mod ord">
         <pc:chgData name="Sana Belguith" userId="edaa0afb-4621-4165-af1d-05ed505f7999" providerId="ADAL" clId="{06919C33-FD09-4C75-9807-013446205127}" dt="2022-10-26T14:54:16.739" v="3084" actId="2711"/>
@@ -620,22 +332,6 @@
           <pc:docMk/>
           <pc:sldMk cId="729257781" sldId="805"/>
         </pc:sldMkLst>
-        <pc:spChg chg="mod">
-          <ac:chgData name="Sana Belguith" userId="edaa0afb-4621-4165-af1d-05ed505f7999" providerId="ADAL" clId="{06919C33-FD09-4C75-9807-013446205127}" dt="2022-10-25T16:59:19.678" v="834" actId="1076"/>
-          <ac:spMkLst>
-            <pc:docMk/>
-            <pc:sldMk cId="729257781" sldId="805"/>
-            <ac:spMk id="2" creationId="{6E389340-40CD-1936-9415-E10B281394FF}"/>
-          </ac:spMkLst>
-        </pc:spChg>
-        <pc:spChg chg="mod">
-          <ac:chgData name="Sana Belguith" userId="edaa0afb-4621-4165-af1d-05ed505f7999" providerId="ADAL" clId="{06919C33-FD09-4C75-9807-013446205127}" dt="2022-10-26T14:54:16.739" v="3084" actId="2711"/>
-          <ac:spMkLst>
-            <pc:docMk/>
-            <pc:sldMk cId="729257781" sldId="805"/>
-            <ac:spMk id="3" creationId="{F4138218-D14A-74E6-D08E-E0D54AC5CEA8}"/>
-          </ac:spMkLst>
-        </pc:spChg>
       </pc:sldChg>
       <pc:sldChg chg="modSp new mod ord">
         <pc:chgData name="Sana Belguith" userId="edaa0afb-4621-4165-af1d-05ed505f7999" providerId="ADAL" clId="{06919C33-FD09-4C75-9807-013446205127}" dt="2022-10-26T14:57:42.791" v="3193" actId="20577"/>
@@ -643,22 +339,6 @@
           <pc:docMk/>
           <pc:sldMk cId="2740352987" sldId="806"/>
         </pc:sldMkLst>
-        <pc:spChg chg="mod">
-          <ac:chgData name="Sana Belguith" userId="edaa0afb-4621-4165-af1d-05ed505f7999" providerId="ADAL" clId="{06919C33-FD09-4C75-9807-013446205127}" dt="2022-10-26T14:55:20.007" v="3089" actId="1076"/>
-          <ac:spMkLst>
-            <pc:docMk/>
-            <pc:sldMk cId="2740352987" sldId="806"/>
-            <ac:spMk id="2" creationId="{52D72C26-54B5-234A-9B93-357EE3E2613C}"/>
-          </ac:spMkLst>
-        </pc:spChg>
-        <pc:spChg chg="mod">
-          <ac:chgData name="Sana Belguith" userId="edaa0afb-4621-4165-af1d-05ed505f7999" providerId="ADAL" clId="{06919C33-FD09-4C75-9807-013446205127}" dt="2022-10-26T14:57:42.791" v="3193" actId="20577"/>
-          <ac:spMkLst>
-            <pc:docMk/>
-            <pc:sldMk cId="2740352987" sldId="806"/>
-            <ac:spMk id="3" creationId="{8BBF7C7E-B5BC-E396-D601-E7C666F9A232}"/>
-          </ac:spMkLst>
-        </pc:spChg>
       </pc:sldChg>
       <pc:sldChg chg="modSp new mod">
         <pc:chgData name="Sana Belguith" userId="edaa0afb-4621-4165-af1d-05ed505f7999" providerId="ADAL" clId="{06919C33-FD09-4C75-9807-013446205127}" dt="2022-10-25T15:17:53.840" v="471" actId="108"/>
@@ -666,22 +346,6 @@
           <pc:docMk/>
           <pc:sldMk cId="3126616692" sldId="807"/>
         </pc:sldMkLst>
-        <pc:spChg chg="mod">
-          <ac:chgData name="Sana Belguith" userId="edaa0afb-4621-4165-af1d-05ed505f7999" providerId="ADAL" clId="{06919C33-FD09-4C75-9807-013446205127}" dt="2022-10-25T15:17:24.831" v="458" actId="1076"/>
-          <ac:spMkLst>
-            <pc:docMk/>
-            <pc:sldMk cId="3126616692" sldId="807"/>
-            <ac:spMk id="2" creationId="{CF4F8C1D-6228-79E2-8986-9A3E0CD45D91}"/>
-          </ac:spMkLst>
-        </pc:spChg>
-        <pc:spChg chg="mod">
-          <ac:chgData name="Sana Belguith" userId="edaa0afb-4621-4165-af1d-05ed505f7999" providerId="ADAL" clId="{06919C33-FD09-4C75-9807-013446205127}" dt="2022-10-25T15:17:53.840" v="471" actId="108"/>
-          <ac:spMkLst>
-            <pc:docMk/>
-            <pc:sldMk cId="3126616692" sldId="807"/>
-            <ac:spMk id="3" creationId="{A8271E54-59F9-BCC7-3B62-DB00B758CE06}"/>
-          </ac:spMkLst>
-        </pc:spChg>
       </pc:sldChg>
       <pc:sldChg chg="addSp modSp new mod modAnim">
         <pc:chgData name="Sana Belguith" userId="edaa0afb-4621-4165-af1d-05ed505f7999" providerId="ADAL" clId="{06919C33-FD09-4C75-9807-013446205127}" dt="2022-10-26T15:00:33.242" v="3225"/>
@@ -689,30 +353,6 @@
           <pc:docMk/>
           <pc:sldMk cId="3924706928" sldId="808"/>
         </pc:sldMkLst>
-        <pc:spChg chg="mod">
-          <ac:chgData name="Sana Belguith" userId="edaa0afb-4621-4165-af1d-05ed505f7999" providerId="ADAL" clId="{06919C33-FD09-4C75-9807-013446205127}" dt="2022-10-25T15:46:51.541" v="716" actId="1076"/>
-          <ac:spMkLst>
-            <pc:docMk/>
-            <pc:sldMk cId="3924706928" sldId="808"/>
-            <ac:spMk id="2" creationId="{A53BEC5F-656E-90F1-306F-08159CD3036E}"/>
-          </ac:spMkLst>
-        </pc:spChg>
-        <pc:spChg chg="mod">
-          <ac:chgData name="Sana Belguith" userId="edaa0afb-4621-4165-af1d-05ed505f7999" providerId="ADAL" clId="{06919C33-FD09-4C75-9807-013446205127}" dt="2022-10-26T15:00:09.160" v="3218" actId="20577"/>
-          <ac:spMkLst>
-            <pc:docMk/>
-            <pc:sldMk cId="3924706928" sldId="808"/>
-            <ac:spMk id="3" creationId="{D6BE28DF-9A78-3E04-ACD1-418ADF5AD5CD}"/>
-          </ac:spMkLst>
-        </pc:spChg>
-        <pc:graphicFrameChg chg="add mod modGraphic">
-          <ac:chgData name="Sana Belguith" userId="edaa0afb-4621-4165-af1d-05ed505f7999" providerId="ADAL" clId="{06919C33-FD09-4C75-9807-013446205127}" dt="2022-10-26T15:00:21.722" v="3222" actId="207"/>
-          <ac:graphicFrameMkLst>
-            <pc:docMk/>
-            <pc:sldMk cId="3924706928" sldId="808"/>
-            <ac:graphicFrameMk id="4" creationId="{9BA3E951-A502-D6E0-A045-090E513DB5B0}"/>
-          </ac:graphicFrameMkLst>
-        </pc:graphicFrameChg>
       </pc:sldChg>
       <pc:sldChg chg="modSp new mod">
         <pc:chgData name="Sana Belguith" userId="edaa0afb-4621-4165-af1d-05ed505f7999" providerId="ADAL" clId="{06919C33-FD09-4C75-9807-013446205127}" dt="2022-10-26T14:04:24.692" v="2577"/>
@@ -720,22 +360,6 @@
           <pc:docMk/>
           <pc:sldMk cId="1943685686" sldId="809"/>
         </pc:sldMkLst>
-        <pc:spChg chg="mod">
-          <ac:chgData name="Sana Belguith" userId="edaa0afb-4621-4165-af1d-05ed505f7999" providerId="ADAL" clId="{06919C33-FD09-4C75-9807-013446205127}" dt="2022-10-25T16:43:00.974" v="803" actId="1076"/>
-          <ac:spMkLst>
-            <pc:docMk/>
-            <pc:sldMk cId="1943685686" sldId="809"/>
-            <ac:spMk id="2" creationId="{55C6717F-C860-B24C-E3C8-94984C42DB85}"/>
-          </ac:spMkLst>
-        </pc:spChg>
-        <pc:spChg chg="mod">
-          <ac:chgData name="Sana Belguith" userId="edaa0afb-4621-4165-af1d-05ed505f7999" providerId="ADAL" clId="{06919C33-FD09-4C75-9807-013446205127}" dt="2022-10-26T14:04:24.692" v="2577"/>
-          <ac:spMkLst>
-            <pc:docMk/>
-            <pc:sldMk cId="1943685686" sldId="809"/>
-            <ac:spMk id="3" creationId="{47F5169D-F3BF-748F-AE7E-DB87613F077F}"/>
-          </ac:spMkLst>
-        </pc:spChg>
       </pc:sldChg>
       <pc:sldChg chg="addSp modSp new del mod">
         <pc:chgData name="Sana Belguith" userId="edaa0afb-4621-4165-af1d-05ed505f7999" providerId="ADAL" clId="{06919C33-FD09-4C75-9807-013446205127}" dt="2022-10-26T14:06:13.848" v="2611" actId="47"/>
@@ -743,30 +367,6 @@
           <pc:docMk/>
           <pc:sldMk cId="3444304479" sldId="810"/>
         </pc:sldMkLst>
-        <pc:spChg chg="mod">
-          <ac:chgData name="Sana Belguith" userId="edaa0afb-4621-4165-af1d-05ed505f7999" providerId="ADAL" clId="{06919C33-FD09-4C75-9807-013446205127}" dt="2022-10-25T16:58:25.682" v="818" actId="1076"/>
-          <ac:spMkLst>
-            <pc:docMk/>
-            <pc:sldMk cId="3444304479" sldId="810"/>
-            <ac:spMk id="2" creationId="{0F9A3680-31FA-D222-314F-66F681A211A1}"/>
-          </ac:spMkLst>
-        </pc:spChg>
-        <pc:spChg chg="mod">
-          <ac:chgData name="Sana Belguith" userId="edaa0afb-4621-4165-af1d-05ed505f7999" providerId="ADAL" clId="{06919C33-FD09-4C75-9807-013446205127}" dt="2022-10-25T12:48:10.117" v="346"/>
-          <ac:spMkLst>
-            <pc:docMk/>
-            <pc:sldMk cId="3444304479" sldId="810"/>
-            <ac:spMk id="3" creationId="{9E5B0BD0-9D1E-D4EF-D8B6-575C733EC738}"/>
-          </ac:spMkLst>
-        </pc:spChg>
-        <pc:picChg chg="add mod">
-          <ac:chgData name="Sana Belguith" userId="edaa0afb-4621-4165-af1d-05ed505f7999" providerId="ADAL" clId="{06919C33-FD09-4C75-9807-013446205127}" dt="2022-10-25T12:48:27.262" v="350" actId="1076"/>
-          <ac:picMkLst>
-            <pc:docMk/>
-            <pc:sldMk cId="3444304479" sldId="810"/>
-            <ac:picMk id="5" creationId="{8E5497F1-DD8A-624B-5107-26FC0849D33D}"/>
-          </ac:picMkLst>
-        </pc:picChg>
       </pc:sldChg>
       <pc:sldChg chg="new del">
         <pc:chgData name="Sana Belguith" userId="edaa0afb-4621-4165-af1d-05ed505f7999" providerId="ADAL" clId="{06919C33-FD09-4C75-9807-013446205127}" dt="2022-10-25T13:03:29.135" v="400" actId="47"/>
@@ -781,22 +381,6 @@
           <pc:docMk/>
           <pc:sldMk cId="1933025833" sldId="812"/>
         </pc:sldMkLst>
-        <pc:spChg chg="mod">
-          <ac:chgData name="Sana Belguith" userId="edaa0afb-4621-4165-af1d-05ed505f7999" providerId="ADAL" clId="{06919C33-FD09-4C75-9807-013446205127}" dt="2022-10-25T12:57:07.762" v="354"/>
-          <ac:spMkLst>
-            <pc:docMk/>
-            <pc:sldMk cId="1933025833" sldId="812"/>
-            <ac:spMk id="2" creationId="{71219792-2055-062F-3549-56D85AD3D6F3}"/>
-          </ac:spMkLst>
-        </pc:spChg>
-        <pc:spChg chg="mod">
-          <ac:chgData name="Sana Belguith" userId="edaa0afb-4621-4165-af1d-05ed505f7999" providerId="ADAL" clId="{06919C33-FD09-4C75-9807-013446205127}" dt="2022-10-25T15:18:50.876" v="480" actId="20577"/>
-          <ac:spMkLst>
-            <pc:docMk/>
-            <pc:sldMk cId="1933025833" sldId="812"/>
-            <ac:spMk id="3" creationId="{C0FB5B1E-4F53-3AA5-0A1D-9CCBEE2E7CF4}"/>
-          </ac:spMkLst>
-        </pc:spChg>
       </pc:sldChg>
       <pc:sldChg chg="modSp new mod">
         <pc:chgData name="Sana Belguith" userId="edaa0afb-4621-4165-af1d-05ed505f7999" providerId="ADAL" clId="{06919C33-FD09-4C75-9807-013446205127}" dt="2022-10-26T13:55:58.503" v="2449" actId="20577"/>
@@ -804,22 +388,6 @@
           <pc:docMk/>
           <pc:sldMk cId="327538580" sldId="813"/>
         </pc:sldMkLst>
-        <pc:spChg chg="mod">
-          <ac:chgData name="Sana Belguith" userId="edaa0afb-4621-4165-af1d-05ed505f7999" providerId="ADAL" clId="{06919C33-FD09-4C75-9807-013446205127}" dt="2022-10-25T16:42:48.998" v="799" actId="14100"/>
-          <ac:spMkLst>
-            <pc:docMk/>
-            <pc:sldMk cId="327538580" sldId="813"/>
-            <ac:spMk id="2" creationId="{72F76ED7-794C-411E-C95E-FF10FA319EC2}"/>
-          </ac:spMkLst>
-        </pc:spChg>
-        <pc:spChg chg="mod">
-          <ac:chgData name="Sana Belguith" userId="edaa0afb-4621-4165-af1d-05ed505f7999" providerId="ADAL" clId="{06919C33-FD09-4C75-9807-013446205127}" dt="2022-10-26T13:55:58.503" v="2449" actId="20577"/>
-          <ac:spMkLst>
-            <pc:docMk/>
-            <pc:sldMk cId="327538580" sldId="813"/>
-            <ac:spMk id="3" creationId="{3F099DBC-93E9-33CF-A665-DA4A26FC10E9}"/>
-          </ac:spMkLst>
-        </pc:spChg>
       </pc:sldChg>
       <pc:sldChg chg="modSp new mod">
         <pc:chgData name="Sana Belguith" userId="edaa0afb-4621-4165-af1d-05ed505f7999" providerId="ADAL" clId="{06919C33-FD09-4C75-9807-013446205127}" dt="2022-10-26T14:06:53.213" v="2626" actId="20577"/>
@@ -827,22 +395,6 @@
           <pc:docMk/>
           <pc:sldMk cId="1792218591" sldId="814"/>
         </pc:sldMkLst>
-        <pc:spChg chg="mod">
-          <ac:chgData name="Sana Belguith" userId="edaa0afb-4621-4165-af1d-05ed505f7999" providerId="ADAL" clId="{06919C33-FD09-4C75-9807-013446205127}" dt="2022-10-25T16:58:33.453" v="821" actId="14100"/>
-          <ac:spMkLst>
-            <pc:docMk/>
-            <pc:sldMk cId="1792218591" sldId="814"/>
-            <ac:spMk id="2" creationId="{422C25FB-E10D-D745-C0E8-88B7F46B3739}"/>
-          </ac:spMkLst>
-        </pc:spChg>
-        <pc:spChg chg="mod">
-          <ac:chgData name="Sana Belguith" userId="edaa0afb-4621-4165-af1d-05ed505f7999" providerId="ADAL" clId="{06919C33-FD09-4C75-9807-013446205127}" dt="2022-10-26T14:06:53.213" v="2626" actId="20577"/>
-          <ac:spMkLst>
-            <pc:docMk/>
-            <pc:sldMk cId="1792218591" sldId="814"/>
-            <ac:spMk id="3" creationId="{18A903C1-0E51-3CAE-A9AA-DEA5321A32EC}"/>
-          </ac:spMkLst>
-        </pc:spChg>
       </pc:sldChg>
       <pc:sldChg chg="new del">
         <pc:chgData name="Sana Belguith" userId="edaa0afb-4621-4165-af1d-05ed505f7999" providerId="ADAL" clId="{06919C33-FD09-4C75-9807-013446205127}" dt="2022-10-25T13:03:29.135" v="400" actId="47"/>
@@ -857,38 +409,6 @@
           <pc:docMk/>
           <pc:sldMk cId="1402090319" sldId="816"/>
         </pc:sldMkLst>
-        <pc:spChg chg="mod">
-          <ac:chgData name="Sana Belguith" userId="edaa0afb-4621-4165-af1d-05ed505f7999" providerId="ADAL" clId="{06919C33-FD09-4C75-9807-013446205127}" dt="2022-10-25T15:21:58.616" v="544" actId="1076"/>
-          <ac:spMkLst>
-            <pc:docMk/>
-            <pc:sldMk cId="1402090319" sldId="816"/>
-            <ac:spMk id="2" creationId="{34EF3BFC-7FF5-B728-F4DB-C20DC69968B0}"/>
-          </ac:spMkLst>
-        </pc:spChg>
-        <pc:spChg chg="mod">
-          <ac:chgData name="Sana Belguith" userId="edaa0afb-4621-4165-af1d-05ed505f7999" providerId="ADAL" clId="{06919C33-FD09-4C75-9807-013446205127}" dt="2022-10-25T15:22:25.423" v="551" actId="1076"/>
-          <ac:spMkLst>
-            <pc:docMk/>
-            <pc:sldMk cId="1402090319" sldId="816"/>
-            <ac:spMk id="3" creationId="{D7C04841-8CE7-943A-4634-54ED13CFBBF0}"/>
-          </ac:spMkLst>
-        </pc:spChg>
-        <pc:picChg chg="add del mod">
-          <ac:chgData name="Sana Belguith" userId="edaa0afb-4621-4165-af1d-05ed505f7999" providerId="ADAL" clId="{06919C33-FD09-4C75-9807-013446205127}" dt="2022-10-25T15:20:26.322" v="516" actId="478"/>
-          <ac:picMkLst>
-            <pc:docMk/>
-            <pc:sldMk cId="1402090319" sldId="816"/>
-            <ac:picMk id="5" creationId="{D5F90811-E40A-45AF-FCCE-429C1C8BF9E9}"/>
-          </ac:picMkLst>
-        </pc:picChg>
-        <pc:picChg chg="add mod">
-          <ac:chgData name="Sana Belguith" userId="edaa0afb-4621-4165-af1d-05ed505f7999" providerId="ADAL" clId="{06919C33-FD09-4C75-9807-013446205127}" dt="2022-10-25T15:22:09.958" v="546" actId="1076"/>
-          <ac:picMkLst>
-            <pc:docMk/>
-            <pc:sldMk cId="1402090319" sldId="816"/>
-            <ac:picMk id="7" creationId="{CEF17DA4-44C9-AE8A-C8AC-CB65738141BB}"/>
-          </ac:picMkLst>
-        </pc:picChg>
       </pc:sldChg>
       <pc:sldChg chg="modSp new del mod ord">
         <pc:chgData name="Sana Belguith" userId="edaa0afb-4621-4165-af1d-05ed505f7999" providerId="ADAL" clId="{06919C33-FD09-4C75-9807-013446205127}" dt="2022-10-26T14:50:46.566" v="3055" actId="47"/>
@@ -896,22 +416,6 @@
           <pc:docMk/>
           <pc:sldMk cId="229354131" sldId="817"/>
         </pc:sldMkLst>
-        <pc:spChg chg="mod">
-          <ac:chgData name="Sana Belguith" userId="edaa0afb-4621-4165-af1d-05ed505f7999" providerId="ADAL" clId="{06919C33-FD09-4C75-9807-013446205127}" dt="2022-10-25T15:49:04.684" v="740" actId="1076"/>
-          <ac:spMkLst>
-            <pc:docMk/>
-            <pc:sldMk cId="229354131" sldId="817"/>
-            <ac:spMk id="2" creationId="{9CFF6A1F-54B6-3554-E4CF-5843FE32C45F}"/>
-          </ac:spMkLst>
-        </pc:spChg>
-        <pc:spChg chg="mod">
-          <ac:chgData name="Sana Belguith" userId="edaa0afb-4621-4165-af1d-05ed505f7999" providerId="ADAL" clId="{06919C33-FD09-4C75-9807-013446205127}" dt="2022-10-26T11:40:08.231" v="875" actId="114"/>
-          <ac:spMkLst>
-            <pc:docMk/>
-            <pc:sldMk cId="229354131" sldId="817"/>
-            <ac:spMk id="3" creationId="{466706E4-44CF-81E9-E506-E2813D2DADD0}"/>
-          </ac:spMkLst>
-        </pc:spChg>
       </pc:sldChg>
       <pc:sldChg chg="modSp new mod">
         <pc:chgData name="Sana Belguith" userId="edaa0afb-4621-4165-af1d-05ed505f7999" providerId="ADAL" clId="{06919C33-FD09-4C75-9807-013446205127}" dt="2022-10-27T13:28:33.824" v="3627" actId="20577"/>
@@ -919,22 +423,6 @@
           <pc:docMk/>
           <pc:sldMk cId="3171944744" sldId="818"/>
         </pc:sldMkLst>
-        <pc:spChg chg="mod">
-          <ac:chgData name="Sana Belguith" userId="edaa0afb-4621-4165-af1d-05ed505f7999" providerId="ADAL" clId="{06919C33-FD09-4C75-9807-013446205127}" dt="2022-10-26T15:37:55.148" v="3597" actId="20577"/>
-          <ac:spMkLst>
-            <pc:docMk/>
-            <pc:sldMk cId="3171944744" sldId="818"/>
-            <ac:spMk id="2" creationId="{82190FC1-6472-D09B-F38E-47AF80C2DE74}"/>
-          </ac:spMkLst>
-        </pc:spChg>
-        <pc:spChg chg="mod">
-          <ac:chgData name="Sana Belguith" userId="edaa0afb-4621-4165-af1d-05ed505f7999" providerId="ADAL" clId="{06919C33-FD09-4C75-9807-013446205127}" dt="2022-10-27T13:28:33.824" v="3627" actId="20577"/>
-          <ac:spMkLst>
-            <pc:docMk/>
-            <pc:sldMk cId="3171944744" sldId="818"/>
-            <ac:spMk id="3" creationId="{220553CC-E915-1A06-A754-EB696AB67C77}"/>
-          </ac:spMkLst>
-        </pc:spChg>
       </pc:sldChg>
       <pc:sldChg chg="addSp modSp new mod ord">
         <pc:chgData name="Sana Belguith" userId="edaa0afb-4621-4165-af1d-05ed505f7999" providerId="ADAL" clId="{06919C33-FD09-4C75-9807-013446205127}" dt="2022-10-26T14:54:50.978" v="3085" actId="6549"/>
@@ -942,30 +430,6 @@
           <pc:docMk/>
           <pc:sldMk cId="895508821" sldId="819"/>
         </pc:sldMkLst>
-        <pc:spChg chg="mod">
-          <ac:chgData name="Sana Belguith" userId="edaa0afb-4621-4165-af1d-05ed505f7999" providerId="ADAL" clId="{06919C33-FD09-4C75-9807-013446205127}" dt="2022-10-26T14:33:18.849" v="2638" actId="1076"/>
-          <ac:spMkLst>
-            <pc:docMk/>
-            <pc:sldMk cId="895508821" sldId="819"/>
-            <ac:spMk id="2" creationId="{012C2336-A3C5-A658-5A9E-4B509EDF2394}"/>
-          </ac:spMkLst>
-        </pc:spChg>
-        <pc:spChg chg="mod">
-          <ac:chgData name="Sana Belguith" userId="edaa0afb-4621-4165-af1d-05ed505f7999" providerId="ADAL" clId="{06919C33-FD09-4C75-9807-013446205127}" dt="2022-10-26T14:54:50.978" v="3085" actId="6549"/>
-          <ac:spMkLst>
-            <pc:docMk/>
-            <pc:sldMk cId="895508821" sldId="819"/>
-            <ac:spMk id="3" creationId="{FC7D4FFB-6397-957F-BF4D-A57CDC65B9FD}"/>
-          </ac:spMkLst>
-        </pc:spChg>
-        <pc:picChg chg="add mod">
-          <ac:chgData name="Sana Belguith" userId="edaa0afb-4621-4165-af1d-05ed505f7999" providerId="ADAL" clId="{06919C33-FD09-4C75-9807-013446205127}" dt="2022-10-26T14:35:15.720" v="2655" actId="1076"/>
-          <ac:picMkLst>
-            <pc:docMk/>
-            <pc:sldMk cId="895508821" sldId="819"/>
-            <ac:picMk id="5" creationId="{B52D45EC-9CC5-8D27-E7A4-0EC01F35D208}"/>
-          </ac:picMkLst>
-        </pc:picChg>
       </pc:sldChg>
       <pc:sldChg chg="addSp delSp modSp new mod ord">
         <pc:chgData name="Sana Belguith" userId="edaa0afb-4621-4165-af1d-05ed505f7999" providerId="ADAL" clId="{06919C33-FD09-4C75-9807-013446205127}" dt="2022-10-26T14:40:53.711" v="2833" actId="14100"/>
@@ -973,198 +437,6 @@
           <pc:docMk/>
           <pc:sldMk cId="1941979563" sldId="820"/>
         </pc:sldMkLst>
-        <pc:spChg chg="mod">
-          <ac:chgData name="Sana Belguith" userId="edaa0afb-4621-4165-af1d-05ed505f7999" providerId="ADAL" clId="{06919C33-FD09-4C75-9807-013446205127}" dt="2022-10-26T14:35:40.009" v="2659" actId="1076"/>
-          <ac:spMkLst>
-            <pc:docMk/>
-            <pc:sldMk cId="1941979563" sldId="820"/>
-            <ac:spMk id="2" creationId="{17C45D09-62BC-D9B2-6891-3E85F501D13D}"/>
-          </ac:spMkLst>
-        </pc:spChg>
-        <pc:spChg chg="del">
-          <ac:chgData name="Sana Belguith" userId="edaa0afb-4621-4165-af1d-05ed505f7999" providerId="ADAL" clId="{06919C33-FD09-4C75-9807-013446205127}" dt="2022-10-26T14:36:19.929" v="2667" actId="478"/>
-          <ac:spMkLst>
-            <pc:docMk/>
-            <pc:sldMk cId="1941979563" sldId="820"/>
-            <ac:spMk id="3" creationId="{1FFBBA50-28EA-31D7-FEA2-99733E44A7B9}"/>
-          </ac:spMkLst>
-        </pc:spChg>
-        <pc:spChg chg="add mod">
-          <ac:chgData name="Sana Belguith" userId="edaa0afb-4621-4165-af1d-05ed505f7999" providerId="ADAL" clId="{06919C33-FD09-4C75-9807-013446205127}" dt="2022-10-26T14:36:36.717" v="2677" actId="207"/>
-          <ac:spMkLst>
-            <pc:docMk/>
-            <pc:sldMk cId="1941979563" sldId="820"/>
-            <ac:spMk id="4" creationId="{CBAC0567-A5F6-407F-C4BE-B5C8D7A64786}"/>
-          </ac:spMkLst>
-        </pc:spChg>
-        <pc:spChg chg="add mod">
-          <ac:chgData name="Sana Belguith" userId="edaa0afb-4621-4165-af1d-05ed505f7999" providerId="ADAL" clId="{06919C33-FD09-4C75-9807-013446205127}" dt="2022-10-26T14:36:46.392" v="2681" actId="14100"/>
-          <ac:spMkLst>
-            <pc:docMk/>
-            <pc:sldMk cId="1941979563" sldId="820"/>
-            <ac:spMk id="5" creationId="{E166FEC3-AEAC-2025-A323-0673A9101FE4}"/>
-          </ac:spMkLst>
-        </pc:spChg>
-        <pc:spChg chg="add mod">
-          <ac:chgData name="Sana Belguith" userId="edaa0afb-4621-4165-af1d-05ed505f7999" providerId="ADAL" clId="{06919C33-FD09-4C75-9807-013446205127}" dt="2022-10-26T14:37:02.417" v="2687" actId="14100"/>
-          <ac:spMkLst>
-            <pc:docMk/>
-            <pc:sldMk cId="1941979563" sldId="820"/>
-            <ac:spMk id="6" creationId="{E41C5DA7-F92D-35D1-1120-E544C42E937F}"/>
-          </ac:spMkLst>
-        </pc:spChg>
-        <pc:spChg chg="add mod">
-          <ac:chgData name="Sana Belguith" userId="edaa0afb-4621-4165-af1d-05ed505f7999" providerId="ADAL" clId="{06919C33-FD09-4C75-9807-013446205127}" dt="2022-10-26T14:37:09.223" v="2694" actId="20577"/>
-          <ac:spMkLst>
-            <pc:docMk/>
-            <pc:sldMk cId="1941979563" sldId="820"/>
-            <ac:spMk id="7" creationId="{AC76D220-DFFA-7F54-D7D5-FAD6BEA0EF49}"/>
-          </ac:spMkLst>
-        </pc:spChg>
-        <pc:spChg chg="add mod">
-          <ac:chgData name="Sana Belguith" userId="edaa0afb-4621-4165-af1d-05ed505f7999" providerId="ADAL" clId="{06919C33-FD09-4C75-9807-013446205127}" dt="2022-10-26T14:37:24.327" v="2698" actId="14100"/>
-          <ac:spMkLst>
-            <pc:docMk/>
-            <pc:sldMk cId="1941979563" sldId="820"/>
-            <ac:spMk id="8" creationId="{2AE539E9-E0E7-04EA-BDA6-BB814AEA41F9}"/>
-          </ac:spMkLst>
-        </pc:spChg>
-        <pc:spChg chg="add mod">
-          <ac:chgData name="Sana Belguith" userId="edaa0afb-4621-4165-af1d-05ed505f7999" providerId="ADAL" clId="{06919C33-FD09-4C75-9807-013446205127}" dt="2022-10-26T14:37:47.601" v="2712" actId="14100"/>
-          <ac:spMkLst>
-            <pc:docMk/>
-            <pc:sldMk cId="1941979563" sldId="820"/>
-            <ac:spMk id="9" creationId="{5E251C22-4BF8-89F2-9103-09EA3B4DF378}"/>
-          </ac:spMkLst>
-        </pc:spChg>
-        <pc:spChg chg="add mod">
-          <ac:chgData name="Sana Belguith" userId="edaa0afb-4621-4165-af1d-05ed505f7999" providerId="ADAL" clId="{06919C33-FD09-4C75-9807-013446205127}" dt="2022-10-26T14:37:55.075" v="2723" actId="20577"/>
-          <ac:spMkLst>
-            <pc:docMk/>
-            <pc:sldMk cId="1941979563" sldId="820"/>
-            <ac:spMk id="10" creationId="{B70D7EC8-2530-AA64-EDB6-0F31B8BC8F48}"/>
-          </ac:spMkLst>
-        </pc:spChg>
-        <pc:spChg chg="add mod">
-          <ac:chgData name="Sana Belguith" userId="edaa0afb-4621-4165-af1d-05ed505f7999" providerId="ADAL" clId="{06919C33-FD09-4C75-9807-013446205127}" dt="2022-10-26T14:38:20.400" v="2745" actId="1076"/>
-          <ac:spMkLst>
-            <pc:docMk/>
-            <pc:sldMk cId="1941979563" sldId="820"/>
-            <ac:spMk id="11" creationId="{CC304112-9EFB-6152-F2D9-0FE12D5CE5E6}"/>
-          </ac:spMkLst>
-        </pc:spChg>
-        <pc:spChg chg="add mod">
-          <ac:chgData name="Sana Belguith" userId="edaa0afb-4621-4165-af1d-05ed505f7999" providerId="ADAL" clId="{06919C33-FD09-4C75-9807-013446205127}" dt="2022-10-26T14:40:08.856" v="2812" actId="1076"/>
-          <ac:spMkLst>
-            <pc:docMk/>
-            <pc:sldMk cId="1941979563" sldId="820"/>
-            <ac:spMk id="12" creationId="{B8E0D138-B067-909C-63E6-E83339FD6C41}"/>
-          </ac:spMkLst>
-        </pc:spChg>
-        <pc:spChg chg="add mod">
-          <ac:chgData name="Sana Belguith" userId="edaa0afb-4621-4165-af1d-05ed505f7999" providerId="ADAL" clId="{06919C33-FD09-4C75-9807-013446205127}" dt="2022-10-26T14:39:17.385" v="2785" actId="1076"/>
-          <ac:spMkLst>
-            <pc:docMk/>
-            <pc:sldMk cId="1941979563" sldId="820"/>
-            <ac:spMk id="13" creationId="{194DA1FB-C341-751A-77C2-45D9DC5530A3}"/>
-          </ac:spMkLst>
-        </pc:spChg>
-        <pc:spChg chg="add mod">
-          <ac:chgData name="Sana Belguith" userId="edaa0afb-4621-4165-af1d-05ed505f7999" providerId="ADAL" clId="{06919C33-FD09-4C75-9807-013446205127}" dt="2022-10-26T14:39:19.231" v="2786" actId="1076"/>
-          <ac:spMkLst>
-            <pc:docMk/>
-            <pc:sldMk cId="1941979563" sldId="820"/>
-            <ac:spMk id="14" creationId="{D1F052BA-A120-85D6-482A-29F4653F7A7A}"/>
-          </ac:spMkLst>
-        </pc:spChg>
-        <pc:spChg chg="add mod">
-          <ac:chgData name="Sana Belguith" userId="edaa0afb-4621-4165-af1d-05ed505f7999" providerId="ADAL" clId="{06919C33-FD09-4C75-9807-013446205127}" dt="2022-10-26T14:39:30.824" v="2793" actId="14100"/>
-          <ac:spMkLst>
-            <pc:docMk/>
-            <pc:sldMk cId="1941979563" sldId="820"/>
-            <ac:spMk id="15" creationId="{B9755958-5DDD-3D28-8C62-E33B35E2071B}"/>
-          </ac:spMkLst>
-        </pc:spChg>
-        <pc:spChg chg="add mod">
-          <ac:chgData name="Sana Belguith" userId="edaa0afb-4621-4165-af1d-05ed505f7999" providerId="ADAL" clId="{06919C33-FD09-4C75-9807-013446205127}" dt="2022-10-26T14:39:44.960" v="2799" actId="20577"/>
-          <ac:spMkLst>
-            <pc:docMk/>
-            <pc:sldMk cId="1941979563" sldId="820"/>
-            <ac:spMk id="16" creationId="{87240B9A-70E9-85D3-FCF1-C76132B1CF21}"/>
-          </ac:spMkLst>
-        </pc:spChg>
-        <pc:spChg chg="add mod">
-          <ac:chgData name="Sana Belguith" userId="edaa0afb-4621-4165-af1d-05ed505f7999" providerId="ADAL" clId="{06919C33-FD09-4C75-9807-013446205127}" dt="2022-10-26T14:39:56.456" v="2810" actId="20577"/>
-          <ac:spMkLst>
-            <pc:docMk/>
-            <pc:sldMk cId="1941979563" sldId="820"/>
-            <ac:spMk id="17" creationId="{F3245236-96BB-8721-A5F8-540E04CD904A}"/>
-          </ac:spMkLst>
-        </pc:spChg>
-        <pc:spChg chg="add del mod">
-          <ac:chgData name="Sana Belguith" userId="edaa0afb-4621-4165-af1d-05ed505f7999" providerId="ADAL" clId="{06919C33-FD09-4C75-9807-013446205127}" dt="2022-10-26T14:40:14.147" v="2815"/>
-          <ac:spMkLst>
-            <pc:docMk/>
-            <pc:sldMk cId="1941979563" sldId="820"/>
-            <ac:spMk id="20" creationId="{314AF6DD-0D81-F843-5D55-752A741F8CA4}"/>
-          </ac:spMkLst>
-        </pc:spChg>
-        <pc:cxnChg chg="add mod">
-          <ac:chgData name="Sana Belguith" userId="edaa0afb-4621-4165-af1d-05ed505f7999" providerId="ADAL" clId="{06919C33-FD09-4C75-9807-013446205127}" dt="2022-10-26T14:40:10.820" v="2813" actId="13822"/>
-          <ac:cxnSpMkLst>
-            <pc:docMk/>
-            <pc:sldMk cId="1941979563" sldId="820"/>
-            <ac:cxnSpMk id="19" creationId="{8F5443A6-5430-B07D-E030-435EC91BC769}"/>
-          </ac:cxnSpMkLst>
-        </pc:cxnChg>
-        <pc:cxnChg chg="add mod">
-          <ac:chgData name="Sana Belguith" userId="edaa0afb-4621-4165-af1d-05ed505f7999" providerId="ADAL" clId="{06919C33-FD09-4C75-9807-013446205127}" dt="2022-10-26T14:40:19.867" v="2818" actId="14100"/>
-          <ac:cxnSpMkLst>
-            <pc:docMk/>
-            <pc:sldMk cId="1941979563" sldId="820"/>
-            <ac:cxnSpMk id="21" creationId="{C8BC62B3-AD17-8C80-E039-92C7B9584F49}"/>
-          </ac:cxnSpMkLst>
-        </pc:cxnChg>
-        <pc:cxnChg chg="add mod">
-          <ac:chgData name="Sana Belguith" userId="edaa0afb-4621-4165-af1d-05ed505f7999" providerId="ADAL" clId="{06919C33-FD09-4C75-9807-013446205127}" dt="2022-10-26T14:40:24.049" v="2820" actId="1076"/>
-          <ac:cxnSpMkLst>
-            <pc:docMk/>
-            <pc:sldMk cId="1941979563" sldId="820"/>
-            <ac:cxnSpMk id="23" creationId="{14BC88DC-03AB-E647-E0A1-E01DC25262F4}"/>
-          </ac:cxnSpMkLst>
-        </pc:cxnChg>
-        <pc:cxnChg chg="add mod">
-          <ac:chgData name="Sana Belguith" userId="edaa0afb-4621-4165-af1d-05ed505f7999" providerId="ADAL" clId="{06919C33-FD09-4C75-9807-013446205127}" dt="2022-10-26T14:40:33.321" v="2823" actId="14100"/>
-          <ac:cxnSpMkLst>
-            <pc:docMk/>
-            <pc:sldMk cId="1941979563" sldId="820"/>
-            <ac:cxnSpMk id="24" creationId="{C7C6A318-737D-0761-BC8D-411A343792A7}"/>
-          </ac:cxnSpMkLst>
-        </pc:cxnChg>
-        <pc:cxnChg chg="add mod">
-          <ac:chgData name="Sana Belguith" userId="edaa0afb-4621-4165-af1d-05ed505f7999" providerId="ADAL" clId="{06919C33-FD09-4C75-9807-013446205127}" dt="2022-10-26T14:40:41.224" v="2827" actId="14100"/>
-          <ac:cxnSpMkLst>
-            <pc:docMk/>
-            <pc:sldMk cId="1941979563" sldId="820"/>
-            <ac:cxnSpMk id="26" creationId="{BEC6043E-02A1-DA0F-AFD0-A10A1E27165E}"/>
-          </ac:cxnSpMkLst>
-        </pc:cxnChg>
-        <pc:cxnChg chg="add mod">
-          <ac:chgData name="Sana Belguith" userId="edaa0afb-4621-4165-af1d-05ed505f7999" providerId="ADAL" clId="{06919C33-FD09-4C75-9807-013446205127}" dt="2022-10-26T14:40:47.913" v="2830" actId="14100"/>
-          <ac:cxnSpMkLst>
-            <pc:docMk/>
-            <pc:sldMk cId="1941979563" sldId="820"/>
-            <ac:cxnSpMk id="29" creationId="{DCFA3B5C-C396-5DA3-FA1F-A0DEC08D856D}"/>
-          </ac:cxnSpMkLst>
-        </pc:cxnChg>
-        <pc:cxnChg chg="add mod">
-          <ac:chgData name="Sana Belguith" userId="edaa0afb-4621-4165-af1d-05ed505f7999" providerId="ADAL" clId="{06919C33-FD09-4C75-9807-013446205127}" dt="2022-10-26T14:40:53.711" v="2833" actId="14100"/>
-          <ac:cxnSpMkLst>
-            <pc:docMk/>
-            <pc:sldMk cId="1941979563" sldId="820"/>
-            <ac:cxnSpMk id="31" creationId="{4F7E49C6-3DC0-2BF0-9451-65D03C835C2A}"/>
-          </ac:cxnSpMkLst>
-        </pc:cxnChg>
       </pc:sldChg>
       <pc:sldChg chg="addSp delSp modSp new mod ord">
         <pc:chgData name="Sana Belguith" userId="edaa0afb-4621-4165-af1d-05ed505f7999" providerId="ADAL" clId="{06919C33-FD09-4C75-9807-013446205127}" dt="2022-10-26T14:44:56.999" v="2960" actId="1076"/>
@@ -1172,134 +444,6 @@
           <pc:docMk/>
           <pc:sldMk cId="1907418861" sldId="821"/>
         </pc:sldMkLst>
-        <pc:spChg chg="mod">
-          <ac:chgData name="Sana Belguith" userId="edaa0afb-4621-4165-af1d-05ed505f7999" providerId="ADAL" clId="{06919C33-FD09-4C75-9807-013446205127}" dt="2022-10-26T14:44:56.999" v="2960" actId="1076"/>
-          <ac:spMkLst>
-            <pc:docMk/>
-            <pc:sldMk cId="1907418861" sldId="821"/>
-            <ac:spMk id="2" creationId="{B1223369-682F-D513-8E0C-2251EBCA5E58}"/>
-          </ac:spMkLst>
-        </pc:spChg>
-        <pc:spChg chg="mod">
-          <ac:chgData name="Sana Belguith" userId="edaa0afb-4621-4165-af1d-05ed505f7999" providerId="ADAL" clId="{06919C33-FD09-4C75-9807-013446205127}" dt="2022-10-26T14:42:15.353" v="2854" actId="403"/>
-          <ac:spMkLst>
-            <pc:docMk/>
-            <pc:sldMk cId="1907418861" sldId="821"/>
-            <ac:spMk id="3" creationId="{DEDB7778-BBC7-5EFB-CF1D-2F46B352D17F}"/>
-          </ac:spMkLst>
-        </pc:spChg>
-        <pc:spChg chg="add mod">
-          <ac:chgData name="Sana Belguith" userId="edaa0afb-4621-4165-af1d-05ed505f7999" providerId="ADAL" clId="{06919C33-FD09-4C75-9807-013446205127}" dt="2022-10-26T14:43:08.103" v="2871" actId="1038"/>
-          <ac:spMkLst>
-            <pc:docMk/>
-            <pc:sldMk cId="1907418861" sldId="821"/>
-            <ac:spMk id="4" creationId="{AA6D8119-7170-683D-896F-3F27EDF8EB6F}"/>
-          </ac:spMkLst>
-        </pc:spChg>
-        <pc:spChg chg="add del mod">
-          <ac:chgData name="Sana Belguith" userId="edaa0afb-4621-4165-af1d-05ed505f7999" providerId="ADAL" clId="{06919C33-FD09-4C75-9807-013446205127}" dt="2022-10-26T14:42:53.002" v="2862" actId="478"/>
-          <ac:spMkLst>
-            <pc:docMk/>
-            <pc:sldMk cId="1907418861" sldId="821"/>
-            <ac:spMk id="5" creationId="{FACE7D1C-3752-58B4-9D14-451DE9D67352}"/>
-          </ac:spMkLst>
-        </pc:spChg>
-        <pc:spChg chg="add del mod">
-          <ac:chgData name="Sana Belguith" userId="edaa0afb-4621-4165-af1d-05ed505f7999" providerId="ADAL" clId="{06919C33-FD09-4C75-9807-013446205127}" dt="2022-10-26T14:42:53.002" v="2862" actId="478"/>
-          <ac:spMkLst>
-            <pc:docMk/>
-            <pc:sldMk cId="1907418861" sldId="821"/>
-            <ac:spMk id="6" creationId="{33CB21F0-350B-BCBD-B35F-7DF6F2EFDE4B}"/>
-          </ac:spMkLst>
-        </pc:spChg>
-        <pc:spChg chg="add mod">
-          <ac:chgData name="Sana Belguith" userId="edaa0afb-4621-4165-af1d-05ed505f7999" providerId="ADAL" clId="{06919C33-FD09-4C75-9807-013446205127}" dt="2022-10-26T14:42:37.435" v="2858" actId="20577"/>
-          <ac:spMkLst>
-            <pc:docMk/>
-            <pc:sldMk cId="1907418861" sldId="821"/>
-            <ac:spMk id="7" creationId="{F2DF11C6-A136-3C8A-E263-69DA40BB280E}"/>
-          </ac:spMkLst>
-        </pc:spChg>
-        <pc:spChg chg="add mod">
-          <ac:chgData name="Sana Belguith" userId="edaa0afb-4621-4165-af1d-05ed505f7999" providerId="ADAL" clId="{06919C33-FD09-4C75-9807-013446205127}" dt="2022-10-26T14:43:11.937" v="2874" actId="1037"/>
-          <ac:spMkLst>
-            <pc:docMk/>
-            <pc:sldMk cId="1907418861" sldId="821"/>
-            <ac:spMk id="8" creationId="{F4D1C4FD-6CEB-B21D-D6B0-E68BB4E3F3BC}"/>
-          </ac:spMkLst>
-        </pc:spChg>
-        <pc:spChg chg="add mod">
-          <ac:chgData name="Sana Belguith" userId="edaa0afb-4621-4165-af1d-05ed505f7999" providerId="ADAL" clId="{06919C33-FD09-4C75-9807-013446205127}" dt="2022-10-26T14:43:19.903" v="2897" actId="1037"/>
-          <ac:spMkLst>
-            <pc:docMk/>
-            <pc:sldMk cId="1907418861" sldId="821"/>
-            <ac:spMk id="9" creationId="{904ABEE8-B0F1-F233-A34D-B42B38D6F5C1}"/>
-          </ac:spMkLst>
-        </pc:spChg>
-        <pc:spChg chg="add mod">
-          <ac:chgData name="Sana Belguith" userId="edaa0afb-4621-4165-af1d-05ed505f7999" providerId="ADAL" clId="{06919C33-FD09-4C75-9807-013446205127}" dt="2022-10-26T14:43:43.799" v="2917" actId="14100"/>
-          <ac:spMkLst>
-            <pc:docMk/>
-            <pc:sldMk cId="1907418861" sldId="821"/>
-            <ac:spMk id="10" creationId="{ECAC9090-CA4F-872F-511C-C95EDC814BDE}"/>
-          </ac:spMkLst>
-        </pc:spChg>
-        <pc:spChg chg="add mod">
-          <ac:chgData name="Sana Belguith" userId="edaa0afb-4621-4165-af1d-05ed505f7999" providerId="ADAL" clId="{06919C33-FD09-4C75-9807-013446205127}" dt="2022-10-26T14:44:00.064" v="2928" actId="1076"/>
-          <ac:spMkLst>
-            <pc:docMk/>
-            <pc:sldMk cId="1907418861" sldId="821"/>
-            <ac:spMk id="12" creationId="{44614E1F-FD4F-DB94-1DCE-B180AFA6FBD8}"/>
-          </ac:spMkLst>
-        </pc:spChg>
-        <pc:spChg chg="add mod">
-          <ac:chgData name="Sana Belguith" userId="edaa0afb-4621-4165-af1d-05ed505f7999" providerId="ADAL" clId="{06919C33-FD09-4C75-9807-013446205127}" dt="2022-10-26T14:44:14.992" v="2945" actId="1076"/>
-          <ac:spMkLst>
-            <pc:docMk/>
-            <pc:sldMk cId="1907418861" sldId="821"/>
-            <ac:spMk id="17" creationId="{25D0FCFA-D1F3-82D2-10C0-7BE16B5DCFCD}"/>
-          </ac:spMkLst>
-        </pc:spChg>
-        <pc:spChg chg="add mod">
-          <ac:chgData name="Sana Belguith" userId="edaa0afb-4621-4165-af1d-05ed505f7999" providerId="ADAL" clId="{06919C33-FD09-4C75-9807-013446205127}" dt="2022-10-26T14:44:35.808" v="2958" actId="20577"/>
-          <ac:spMkLst>
-            <pc:docMk/>
-            <pc:sldMk cId="1907418861" sldId="821"/>
-            <ac:spMk id="20" creationId="{A29D5251-5D6F-324B-12D1-49215D90E996}"/>
-          </ac:spMkLst>
-        </pc:spChg>
-        <pc:cxnChg chg="add mod">
-          <ac:chgData name="Sana Belguith" userId="edaa0afb-4621-4165-af1d-05ed505f7999" providerId="ADAL" clId="{06919C33-FD09-4C75-9807-013446205127}" dt="2022-10-26T14:43:29.571" v="2899" actId="1076"/>
-          <ac:cxnSpMkLst>
-            <pc:docMk/>
-            <pc:sldMk cId="1907418861" sldId="821"/>
-            <ac:cxnSpMk id="11" creationId="{B4BF95BE-01D1-012F-D4CC-2138B3A20CE0}"/>
-          </ac:cxnSpMkLst>
-        </pc:cxnChg>
-        <pc:cxnChg chg="add mod">
-          <ac:chgData name="Sana Belguith" userId="edaa0afb-4621-4165-af1d-05ed505f7999" providerId="ADAL" clId="{06919C33-FD09-4C75-9807-013446205127}" dt="2022-10-26T14:44:00.064" v="2928" actId="1076"/>
-          <ac:cxnSpMkLst>
-            <pc:docMk/>
-            <pc:sldMk cId="1907418861" sldId="821"/>
-            <ac:cxnSpMk id="13" creationId="{2A394954-D211-AB89-6E6B-BA97E21BCB36}"/>
-          </ac:cxnSpMkLst>
-        </pc:cxnChg>
-        <pc:cxnChg chg="add mod">
-          <ac:chgData name="Sana Belguith" userId="edaa0afb-4621-4165-af1d-05ed505f7999" providerId="ADAL" clId="{06919C33-FD09-4C75-9807-013446205127}" dt="2022-10-26T14:44:21.744" v="2948" actId="14100"/>
-          <ac:cxnSpMkLst>
-            <pc:docMk/>
-            <pc:sldMk cId="1907418861" sldId="821"/>
-            <ac:cxnSpMk id="18" creationId="{33A4A944-F571-6CFA-1F35-693A89FF3549}"/>
-          </ac:cxnSpMkLst>
-        </pc:cxnChg>
-        <pc:cxnChg chg="add mod">
-          <ac:chgData name="Sana Belguith" userId="edaa0afb-4621-4165-af1d-05ed505f7999" providerId="ADAL" clId="{06919C33-FD09-4C75-9807-013446205127}" dt="2022-10-26T14:44:32.583" v="2951" actId="14100"/>
-          <ac:cxnSpMkLst>
-            <pc:docMk/>
-            <pc:sldMk cId="1907418861" sldId="821"/>
-            <ac:cxnSpMk id="21" creationId="{CCDDFE58-0A79-64C0-5DE7-F9ED9C321992}"/>
-          </ac:cxnSpMkLst>
-        </pc:cxnChg>
       </pc:sldChg>
       <pc:sldChg chg="modSp new del mod">
         <pc:chgData name="Sana Belguith" userId="edaa0afb-4621-4165-af1d-05ed505f7999" providerId="ADAL" clId="{06919C33-FD09-4C75-9807-013446205127}" dt="2022-10-26T14:50:46.566" v="3055" actId="47"/>
@@ -1307,22 +451,6 @@
           <pc:docMk/>
           <pc:sldMk cId="2161273237" sldId="822"/>
         </pc:sldMkLst>
-        <pc:spChg chg="mod">
-          <ac:chgData name="Sana Belguith" userId="edaa0afb-4621-4165-af1d-05ed505f7999" providerId="ADAL" clId="{06919C33-FD09-4C75-9807-013446205127}" dt="2022-10-26T11:18:54.750" v="852" actId="108"/>
-          <ac:spMkLst>
-            <pc:docMk/>
-            <pc:sldMk cId="2161273237" sldId="822"/>
-            <ac:spMk id="2" creationId="{CDFB3D64-819C-50F7-2B20-E25A287DF69E}"/>
-          </ac:spMkLst>
-        </pc:spChg>
-        <pc:spChg chg="mod">
-          <ac:chgData name="Sana Belguith" userId="edaa0afb-4621-4165-af1d-05ed505f7999" providerId="ADAL" clId="{06919C33-FD09-4C75-9807-013446205127}" dt="2022-10-25T13:04:34.113" v="416"/>
-          <ac:spMkLst>
-            <pc:docMk/>
-            <pc:sldMk cId="2161273237" sldId="822"/>
-            <ac:spMk id="3" creationId="{7B5D4D0C-2509-138E-FE8F-DE3D5C520B7E}"/>
-          </ac:spMkLst>
-        </pc:spChg>
       </pc:sldChg>
       <pc:sldChg chg="addSp modSp new mod ord">
         <pc:chgData name="Sana Belguith" userId="edaa0afb-4621-4165-af1d-05ed505f7999" providerId="ADAL" clId="{06919C33-FD09-4C75-9807-013446205127}" dt="2022-10-26T14:50:02.320" v="3054" actId="20577"/>
@@ -1330,78 +458,6 @@
           <pc:docMk/>
           <pc:sldMk cId="69291357" sldId="823"/>
         </pc:sldMkLst>
-        <pc:spChg chg="mod">
-          <ac:chgData name="Sana Belguith" userId="edaa0afb-4621-4165-af1d-05ed505f7999" providerId="ADAL" clId="{06919C33-FD09-4C75-9807-013446205127}" dt="2022-10-26T14:47:16.720" v="2991" actId="1076"/>
-          <ac:spMkLst>
-            <pc:docMk/>
-            <pc:sldMk cId="69291357" sldId="823"/>
-            <ac:spMk id="2" creationId="{EC6CC669-B6EF-9BE5-35B2-E578B756999D}"/>
-          </ac:spMkLst>
-        </pc:spChg>
-        <pc:spChg chg="mod">
-          <ac:chgData name="Sana Belguith" userId="edaa0afb-4621-4165-af1d-05ed505f7999" providerId="ADAL" clId="{06919C33-FD09-4C75-9807-013446205127}" dt="2022-10-26T14:50:02.320" v="3054" actId="20577"/>
-          <ac:spMkLst>
-            <pc:docMk/>
-            <pc:sldMk cId="69291357" sldId="823"/>
-            <ac:spMk id="3" creationId="{89F51D3D-0695-B1F3-2952-3A0FFAA27774}"/>
-          </ac:spMkLst>
-        </pc:spChg>
-        <pc:spChg chg="add mod">
-          <ac:chgData name="Sana Belguith" userId="edaa0afb-4621-4165-af1d-05ed505f7999" providerId="ADAL" clId="{06919C33-FD09-4C75-9807-013446205127}" dt="2022-10-26T14:48:18.392" v="3021" actId="1037"/>
-          <ac:spMkLst>
-            <pc:docMk/>
-            <pc:sldMk cId="69291357" sldId="823"/>
-            <ac:spMk id="4" creationId="{843F4CD9-03A1-5912-F9D7-C4F0326D4E9E}"/>
-          </ac:spMkLst>
-        </pc:spChg>
-        <pc:spChg chg="add mod">
-          <ac:chgData name="Sana Belguith" userId="edaa0afb-4621-4165-af1d-05ed505f7999" providerId="ADAL" clId="{06919C33-FD09-4C75-9807-013446205127}" dt="2022-10-26T14:48:18.392" v="3021" actId="1037"/>
-          <ac:spMkLst>
-            <pc:docMk/>
-            <pc:sldMk cId="69291357" sldId="823"/>
-            <ac:spMk id="5" creationId="{30116E96-A19F-18D2-84E8-C25A6A2E577D}"/>
-          </ac:spMkLst>
-        </pc:spChg>
-        <pc:spChg chg="add mod">
-          <ac:chgData name="Sana Belguith" userId="edaa0afb-4621-4165-af1d-05ed505f7999" providerId="ADAL" clId="{06919C33-FD09-4C75-9807-013446205127}" dt="2022-10-26T14:48:18.392" v="3021" actId="1037"/>
-          <ac:spMkLst>
-            <pc:docMk/>
-            <pc:sldMk cId="69291357" sldId="823"/>
-            <ac:spMk id="6" creationId="{4B1A70A9-8D6E-DBBD-566A-EE9CFE16337F}"/>
-          </ac:spMkLst>
-        </pc:spChg>
-        <pc:spChg chg="add mod">
-          <ac:chgData name="Sana Belguith" userId="edaa0afb-4621-4165-af1d-05ed505f7999" providerId="ADAL" clId="{06919C33-FD09-4C75-9807-013446205127}" dt="2022-10-26T14:48:21.287" v="3022" actId="14100"/>
-          <ac:spMkLst>
-            <pc:docMk/>
-            <pc:sldMk cId="69291357" sldId="823"/>
-            <ac:spMk id="7" creationId="{939D2680-8620-3A50-1F82-EBB3EC5503E0}"/>
-          </ac:spMkLst>
-        </pc:spChg>
-        <pc:spChg chg="add mod">
-          <ac:chgData name="Sana Belguith" userId="edaa0afb-4621-4165-af1d-05ed505f7999" providerId="ADAL" clId="{06919C33-FD09-4C75-9807-013446205127}" dt="2022-10-26T14:48:29.526" v="3023" actId="20577"/>
-          <ac:spMkLst>
-            <pc:docMk/>
-            <pc:sldMk cId="69291357" sldId="823"/>
-            <ac:spMk id="8" creationId="{88132D6B-CA1E-1B19-8982-AE5E610704D6}"/>
-          </ac:spMkLst>
-        </pc:spChg>
-        <pc:spChg chg="add mod">
-          <ac:chgData name="Sana Belguith" userId="edaa0afb-4621-4165-af1d-05ed505f7999" providerId="ADAL" clId="{06919C33-FD09-4C75-9807-013446205127}" dt="2022-10-26T14:48:39.207" v="3031" actId="20577"/>
-          <ac:spMkLst>
-            <pc:docMk/>
-            <pc:sldMk cId="69291357" sldId="823"/>
-            <ac:spMk id="9" creationId="{22E787D7-4A7F-1C18-5D0B-53108EB204ED}"/>
-          </ac:spMkLst>
-        </pc:spChg>
-        <pc:spChg chg="add mod">
-          <ac:chgData name="Sana Belguith" userId="edaa0afb-4621-4165-af1d-05ed505f7999" providerId="ADAL" clId="{06919C33-FD09-4C75-9807-013446205127}" dt="2022-10-26T14:49:02.447" v="3049" actId="20577"/>
-          <ac:spMkLst>
-            <pc:docMk/>
-            <pc:sldMk cId="69291357" sldId="823"/>
-            <ac:spMk id="10" creationId="{8151DB53-15DE-B35A-F23B-52DD5FB21E2D}"/>
-          </ac:spMkLst>
-        </pc:spChg>
       </pc:sldChg>
       <pc:sldChg chg="modSp new mod">
         <pc:chgData name="Sana Belguith" userId="edaa0afb-4621-4165-af1d-05ed505f7999" providerId="ADAL" clId="{06919C33-FD09-4C75-9807-013446205127}" dt="2022-10-26T15:26:59.461" v="3523" actId="20577"/>
@@ -1409,22 +465,6 @@
           <pc:docMk/>
           <pc:sldMk cId="1460595892" sldId="824"/>
         </pc:sldMkLst>
-        <pc:spChg chg="mod">
-          <ac:chgData name="Sana Belguith" userId="edaa0afb-4621-4165-af1d-05ed505f7999" providerId="ADAL" clId="{06919C33-FD09-4C75-9807-013446205127}" dt="2022-10-26T15:01:18.156" v="3234" actId="1076"/>
-          <ac:spMkLst>
-            <pc:docMk/>
-            <pc:sldMk cId="1460595892" sldId="824"/>
-            <ac:spMk id="2" creationId="{9DF9D6F4-3F48-53C9-881D-522AAF526C60}"/>
-          </ac:spMkLst>
-        </pc:spChg>
-        <pc:spChg chg="mod">
-          <ac:chgData name="Sana Belguith" userId="edaa0afb-4621-4165-af1d-05ed505f7999" providerId="ADAL" clId="{06919C33-FD09-4C75-9807-013446205127}" dt="2022-10-26T15:26:59.461" v="3523" actId="20577"/>
-          <ac:spMkLst>
-            <pc:docMk/>
-            <pc:sldMk cId="1460595892" sldId="824"/>
-            <ac:spMk id="3" creationId="{BEE51F54-4E99-2A5C-5EED-319F58048505}"/>
-          </ac:spMkLst>
-        </pc:spChg>
       </pc:sldChg>
       <pc:sldChg chg="modSp new mod">
         <pc:chgData name="Sana Belguith" userId="edaa0afb-4621-4165-af1d-05ed505f7999" providerId="ADAL" clId="{06919C33-FD09-4C75-9807-013446205127}" dt="2022-10-26T15:06:28.169" v="3347"/>
@@ -1432,22 +472,6 @@
           <pc:docMk/>
           <pc:sldMk cId="765026997" sldId="825"/>
         </pc:sldMkLst>
-        <pc:spChg chg="mod">
-          <ac:chgData name="Sana Belguith" userId="edaa0afb-4621-4165-af1d-05ed505f7999" providerId="ADAL" clId="{06919C33-FD09-4C75-9807-013446205127}" dt="2022-10-26T15:06:28.169" v="3347"/>
-          <ac:spMkLst>
-            <pc:docMk/>
-            <pc:sldMk cId="765026997" sldId="825"/>
-            <ac:spMk id="2" creationId="{3FDDE31F-1FCF-F8E5-B791-2F273ED586DD}"/>
-          </ac:spMkLst>
-        </pc:spChg>
-        <pc:spChg chg="mod">
-          <ac:chgData name="Sana Belguith" userId="edaa0afb-4621-4165-af1d-05ed505f7999" providerId="ADAL" clId="{06919C33-FD09-4C75-9807-013446205127}" dt="2022-10-26T15:03:04.889" v="3271" actId="20577"/>
-          <ac:spMkLst>
-            <pc:docMk/>
-            <pc:sldMk cId="765026997" sldId="825"/>
-            <ac:spMk id="3" creationId="{9F1277D6-7667-E17A-B65F-BDA1DE1ECD74}"/>
-          </ac:spMkLst>
-        </pc:spChg>
       </pc:sldChg>
       <pc:sldChg chg="modSp new mod">
         <pc:chgData name="Sana Belguith" userId="edaa0afb-4621-4165-af1d-05ed505f7999" providerId="ADAL" clId="{06919C33-FD09-4C75-9807-013446205127}" dt="2022-10-27T13:39:54.891" v="3628" actId="5793"/>
@@ -1455,22 +479,6 @@
           <pc:docMk/>
           <pc:sldMk cId="1724159026" sldId="826"/>
         </pc:sldMkLst>
-        <pc:spChg chg="mod">
-          <ac:chgData name="Sana Belguith" userId="edaa0afb-4621-4165-af1d-05ed505f7999" providerId="ADAL" clId="{06919C33-FD09-4C75-9807-013446205127}" dt="2022-10-26T15:06:32.957" v="3348" actId="108"/>
-          <ac:spMkLst>
-            <pc:docMk/>
-            <pc:sldMk cId="1724159026" sldId="826"/>
-            <ac:spMk id="2" creationId="{E5439CCF-9873-287C-A793-4F583ABE094D}"/>
-          </ac:spMkLst>
-        </pc:spChg>
-        <pc:spChg chg="mod">
-          <ac:chgData name="Sana Belguith" userId="edaa0afb-4621-4165-af1d-05ed505f7999" providerId="ADAL" clId="{06919C33-FD09-4C75-9807-013446205127}" dt="2022-10-27T13:39:54.891" v="3628" actId="5793"/>
-          <ac:spMkLst>
-            <pc:docMk/>
-            <pc:sldMk cId="1724159026" sldId="826"/>
-            <ac:spMk id="3" creationId="{E3E7F843-C8F7-E6A2-F421-C3E4B995F676}"/>
-          </ac:spMkLst>
-        </pc:spChg>
       </pc:sldChg>
       <pc:sldChg chg="modSp new mod">
         <pc:chgData name="Sana Belguith" userId="edaa0afb-4621-4165-af1d-05ed505f7999" providerId="ADAL" clId="{06919C33-FD09-4C75-9807-013446205127}" dt="2022-10-26T15:07:00.646" v="3367" actId="20577"/>
@@ -1478,22 +486,6 @@
           <pc:docMk/>
           <pc:sldMk cId="2657274983" sldId="827"/>
         </pc:sldMkLst>
-        <pc:spChg chg="mod">
-          <ac:chgData name="Sana Belguith" userId="edaa0afb-4621-4165-af1d-05ed505f7999" providerId="ADAL" clId="{06919C33-FD09-4C75-9807-013446205127}" dt="2022-10-26T15:06:54.286" v="3364" actId="14100"/>
-          <ac:spMkLst>
-            <pc:docMk/>
-            <pc:sldMk cId="2657274983" sldId="827"/>
-            <ac:spMk id="2" creationId="{82C6D1E6-CE5D-BD84-A25F-E77C7F2E35E2}"/>
-          </ac:spMkLst>
-        </pc:spChg>
-        <pc:spChg chg="mod">
-          <ac:chgData name="Sana Belguith" userId="edaa0afb-4621-4165-af1d-05ed505f7999" providerId="ADAL" clId="{06919C33-FD09-4C75-9807-013446205127}" dt="2022-10-26T15:07:00.646" v="3367" actId="20577"/>
-          <ac:spMkLst>
-            <pc:docMk/>
-            <pc:sldMk cId="2657274983" sldId="827"/>
-            <ac:spMk id="3" creationId="{F1D51E3F-48A2-AB1D-98A5-8312F09CC113}"/>
-          </ac:spMkLst>
-        </pc:spChg>
       </pc:sldChg>
       <pc:sldChg chg="modSp new del mod">
         <pc:chgData name="Sana Belguith" userId="edaa0afb-4621-4165-af1d-05ed505f7999" providerId="ADAL" clId="{06919C33-FD09-4C75-9807-013446205127}" dt="2022-10-27T13:44:10.342" v="3633" actId="47"/>
@@ -1501,22 +493,6 @@
           <pc:docMk/>
           <pc:sldMk cId="3227726747" sldId="828"/>
         </pc:sldMkLst>
-        <pc:spChg chg="mod">
-          <ac:chgData name="Sana Belguith" userId="edaa0afb-4621-4165-af1d-05ed505f7999" providerId="ADAL" clId="{06919C33-FD09-4C75-9807-013446205127}" dt="2022-10-26T15:14:20.563" v="3389"/>
-          <ac:spMkLst>
-            <pc:docMk/>
-            <pc:sldMk cId="3227726747" sldId="828"/>
-            <ac:spMk id="2" creationId="{BAB9D848-E952-6417-2388-5D98DA465C1F}"/>
-          </ac:spMkLst>
-        </pc:spChg>
-        <pc:spChg chg="mod">
-          <ac:chgData name="Sana Belguith" userId="edaa0afb-4621-4165-af1d-05ed505f7999" providerId="ADAL" clId="{06919C33-FD09-4C75-9807-013446205127}" dt="2022-10-27T13:43:45.938" v="3632" actId="20577"/>
-          <ac:spMkLst>
-            <pc:docMk/>
-            <pc:sldMk cId="3227726747" sldId="828"/>
-            <ac:spMk id="3" creationId="{08E808B4-0C7E-3AEC-53EB-DE49380F65EC}"/>
-          </ac:spMkLst>
-        </pc:spChg>
       </pc:sldChg>
       <pc:sldChg chg="modSp new mod">
         <pc:chgData name="Sana Belguith" userId="edaa0afb-4621-4165-af1d-05ed505f7999" providerId="ADAL" clId="{06919C33-FD09-4C75-9807-013446205127}" dt="2022-10-26T15:24:44.676" v="3493" actId="108"/>
@@ -1524,22 +500,6 @@
           <pc:docMk/>
           <pc:sldMk cId="919585205" sldId="829"/>
         </pc:sldMkLst>
-        <pc:spChg chg="mod">
-          <ac:chgData name="Sana Belguith" userId="edaa0afb-4621-4165-af1d-05ed505f7999" providerId="ADAL" clId="{06919C33-FD09-4C75-9807-013446205127}" dt="2022-10-26T15:24:44.676" v="3493" actId="108"/>
-          <ac:spMkLst>
-            <pc:docMk/>
-            <pc:sldMk cId="919585205" sldId="829"/>
-            <ac:spMk id="2" creationId="{398EB0F0-A34A-FD1B-59AD-39631246E3CA}"/>
-          </ac:spMkLst>
-        </pc:spChg>
-        <pc:spChg chg="mod">
-          <ac:chgData name="Sana Belguith" userId="edaa0afb-4621-4165-af1d-05ed505f7999" providerId="ADAL" clId="{06919C33-FD09-4C75-9807-013446205127}" dt="2022-10-26T15:16:37.855" v="3418" actId="20577"/>
-          <ac:spMkLst>
-            <pc:docMk/>
-            <pc:sldMk cId="919585205" sldId="829"/>
-            <ac:spMk id="3" creationId="{1DF5902B-48D4-3093-B654-C45866FDB78C}"/>
-          </ac:spMkLst>
-        </pc:spChg>
       </pc:sldChg>
       <pc:sldChg chg="modSp new del mod">
         <pc:chgData name="Sana Belguith" userId="edaa0afb-4621-4165-af1d-05ed505f7999" providerId="ADAL" clId="{06919C33-FD09-4C75-9807-013446205127}" dt="2022-10-26T15:13:35.962" v="3380" actId="47"/>
@@ -1547,14 +507,6 @@
           <pc:docMk/>
           <pc:sldMk cId="2343173450" sldId="830"/>
         </pc:sldMkLst>
-        <pc:spChg chg="mod">
-          <ac:chgData name="Sana Belguith" userId="edaa0afb-4621-4165-af1d-05ed505f7999" providerId="ADAL" clId="{06919C33-FD09-4C75-9807-013446205127}" dt="2022-10-25T13:14:29.440" v="443"/>
-          <ac:spMkLst>
-            <pc:docMk/>
-            <pc:sldMk cId="2343173450" sldId="830"/>
-            <ac:spMk id="3" creationId="{5254D377-251A-7EC4-7D57-36ACC352381E}"/>
-          </ac:spMkLst>
-        </pc:spChg>
       </pc:sldChg>
       <pc:sldChg chg="modSp new mod">
         <pc:chgData name="Sana Belguith" userId="edaa0afb-4621-4165-af1d-05ed505f7999" providerId="ADAL" clId="{06919C33-FD09-4C75-9807-013446205127}" dt="2022-10-26T15:25:14.147" v="3498" actId="108"/>
@@ -1562,22 +514,6 @@
           <pc:docMk/>
           <pc:sldMk cId="1881144341" sldId="831"/>
         </pc:sldMkLst>
-        <pc:spChg chg="mod">
-          <ac:chgData name="Sana Belguith" userId="edaa0afb-4621-4165-af1d-05ed505f7999" providerId="ADAL" clId="{06919C33-FD09-4C75-9807-013446205127}" dt="2022-10-26T15:25:14.147" v="3498" actId="108"/>
-          <ac:spMkLst>
-            <pc:docMk/>
-            <pc:sldMk cId="1881144341" sldId="831"/>
-            <ac:spMk id="2" creationId="{7AB951F6-EE64-25E4-D683-E5BD4E050AE1}"/>
-          </ac:spMkLst>
-        </pc:spChg>
-        <pc:spChg chg="mod">
-          <ac:chgData name="Sana Belguith" userId="edaa0afb-4621-4165-af1d-05ed505f7999" providerId="ADAL" clId="{06919C33-FD09-4C75-9807-013446205127}" dt="2022-10-26T15:22:42.629" v="3447" actId="20577"/>
-          <ac:spMkLst>
-            <pc:docMk/>
-            <pc:sldMk cId="1881144341" sldId="831"/>
-            <ac:spMk id="3" creationId="{3AC6DF8F-6FF7-959D-6412-3632242B7FEC}"/>
-          </ac:spMkLst>
-        </pc:spChg>
       </pc:sldChg>
       <pc:sldChg chg="modSp new del mod">
         <pc:chgData name="Sana Belguith" userId="edaa0afb-4621-4165-af1d-05ed505f7999" providerId="ADAL" clId="{06919C33-FD09-4C75-9807-013446205127}" dt="2022-10-26T15:22:23.231" v="3435" actId="47"/>
@@ -1585,14 +521,6 @@
           <pc:docMk/>
           <pc:sldMk cId="3079151849" sldId="832"/>
         </pc:sldMkLst>
-        <pc:spChg chg="mod">
-          <ac:chgData name="Sana Belguith" userId="edaa0afb-4621-4165-af1d-05ed505f7999" providerId="ADAL" clId="{06919C33-FD09-4C75-9807-013446205127}" dt="2022-10-25T13:15:18.330" v="451"/>
-          <ac:spMkLst>
-            <pc:docMk/>
-            <pc:sldMk cId="3079151849" sldId="832"/>
-            <ac:spMk id="3" creationId="{5D9DD00D-FC6A-BD76-9683-F8688ED921D0}"/>
-          </ac:spMkLst>
-        </pc:spChg>
       </pc:sldChg>
       <pc:sldChg chg="addSp delSp modSp new mod ord">
         <pc:chgData name="Sana Belguith" userId="edaa0afb-4621-4165-af1d-05ed505f7999" providerId="ADAL" clId="{06919C33-FD09-4C75-9807-013446205127}" dt="2022-10-27T11:09:07.544" v="3601" actId="20577"/>
@@ -1600,118 +528,6 @@
           <pc:docMk/>
           <pc:sldMk cId="476464163" sldId="833"/>
         </pc:sldMkLst>
-        <pc:spChg chg="mod">
-          <ac:chgData name="Sana Belguith" userId="edaa0afb-4621-4165-af1d-05ed505f7999" providerId="ADAL" clId="{06919C33-FD09-4C75-9807-013446205127}" dt="2022-10-26T11:50:06.760" v="932" actId="1076"/>
-          <ac:spMkLst>
-            <pc:docMk/>
-            <pc:sldMk cId="476464163" sldId="833"/>
-            <ac:spMk id="2" creationId="{E16ABF75-3663-DAD1-B873-C86A179B696D}"/>
-          </ac:spMkLst>
-        </pc:spChg>
-        <pc:spChg chg="del">
-          <ac:chgData name="Sana Belguith" userId="edaa0afb-4621-4165-af1d-05ed505f7999" providerId="ADAL" clId="{06919C33-FD09-4C75-9807-013446205127}" dt="2022-10-26T11:50:40.586" v="933" actId="1032"/>
-          <ac:spMkLst>
-            <pc:docMk/>
-            <pc:sldMk cId="476464163" sldId="833"/>
-            <ac:spMk id="3" creationId="{17BB14A7-74B1-8CE1-E3DE-B0BBE4CC198B}"/>
-          </ac:spMkLst>
-        </pc:spChg>
-        <pc:spChg chg="add mod ord">
-          <ac:chgData name="Sana Belguith" userId="edaa0afb-4621-4165-af1d-05ed505f7999" providerId="ADAL" clId="{06919C33-FD09-4C75-9807-013446205127}" dt="2022-10-27T11:09:07.544" v="3601" actId="20577"/>
-          <ac:spMkLst>
-            <pc:docMk/>
-            <pc:sldMk cId="476464163" sldId="833"/>
-            <ac:spMk id="5" creationId="{1AC4864A-23E0-2708-A961-8BFA26C5419C}"/>
-          </ac:spMkLst>
-        </pc:spChg>
-        <pc:spChg chg="add mod ord">
-          <ac:chgData name="Sana Belguith" userId="edaa0afb-4621-4165-af1d-05ed505f7999" providerId="ADAL" clId="{06919C33-FD09-4C75-9807-013446205127}" dt="2022-10-26T11:57:58.585" v="1109" actId="167"/>
-          <ac:spMkLst>
-            <pc:docMk/>
-            <pc:sldMk cId="476464163" sldId="833"/>
-            <ac:spMk id="6" creationId="{88AC0DA2-C055-2AB0-743C-4AD3FBDD5AE4}"/>
-          </ac:spMkLst>
-        </pc:spChg>
-        <pc:spChg chg="add mod ord">
-          <ac:chgData name="Sana Belguith" userId="edaa0afb-4621-4165-af1d-05ed505f7999" providerId="ADAL" clId="{06919C33-FD09-4C75-9807-013446205127}" dt="2022-10-26T11:57:55.454" v="1108" actId="167"/>
-          <ac:spMkLst>
-            <pc:docMk/>
-            <pc:sldMk cId="476464163" sldId="833"/>
-            <ac:spMk id="7" creationId="{0C0BAC75-8B10-5A63-0023-B723C1D0C54A}"/>
-          </ac:spMkLst>
-        </pc:spChg>
-        <pc:spChg chg="mod">
-          <ac:chgData name="Sana Belguith" userId="edaa0afb-4621-4165-af1d-05ed505f7999" providerId="ADAL" clId="{06919C33-FD09-4C75-9807-013446205127}" dt="2022-10-26T11:56:04.005" v="1052" actId="18245"/>
-          <ac:spMkLst>
-            <pc:docMk/>
-            <pc:sldMk cId="476464163" sldId="833"/>
-            <ac:spMk id="9" creationId="{D50C7E84-C3ED-5C2F-B74B-57CE9CF16001}"/>
-          </ac:spMkLst>
-        </pc:spChg>
-        <pc:spChg chg="mod">
-          <ac:chgData name="Sana Belguith" userId="edaa0afb-4621-4165-af1d-05ed505f7999" providerId="ADAL" clId="{06919C33-FD09-4C75-9807-013446205127}" dt="2022-10-26T11:56:04.005" v="1052" actId="18245"/>
-          <ac:spMkLst>
-            <pc:docMk/>
-            <pc:sldMk cId="476464163" sldId="833"/>
-            <ac:spMk id="10" creationId="{97609113-63E7-5950-0611-56B8900AE799}"/>
-          </ac:spMkLst>
-        </pc:spChg>
-        <pc:spChg chg="mod">
-          <ac:chgData name="Sana Belguith" userId="edaa0afb-4621-4165-af1d-05ed505f7999" providerId="ADAL" clId="{06919C33-FD09-4C75-9807-013446205127}" dt="2022-10-26T11:56:04.005" v="1052" actId="18245"/>
-          <ac:spMkLst>
-            <pc:docMk/>
-            <pc:sldMk cId="476464163" sldId="833"/>
-            <ac:spMk id="11" creationId="{1E677F4E-1D9D-860C-B6E8-4F2E466C6685}"/>
-          </ac:spMkLst>
-        </pc:spChg>
-        <pc:spChg chg="mod">
-          <ac:chgData name="Sana Belguith" userId="edaa0afb-4621-4165-af1d-05ed505f7999" providerId="ADAL" clId="{06919C33-FD09-4C75-9807-013446205127}" dt="2022-10-26T11:56:04.005" v="1052" actId="18245"/>
-          <ac:spMkLst>
-            <pc:docMk/>
-            <pc:sldMk cId="476464163" sldId="833"/>
-            <ac:spMk id="12" creationId="{11BB8C36-1E5D-FB3B-4BD2-7821E7FEA73F}"/>
-          </ac:spMkLst>
-        </pc:spChg>
-        <pc:spChg chg="mod">
-          <ac:chgData name="Sana Belguith" userId="edaa0afb-4621-4165-af1d-05ed505f7999" providerId="ADAL" clId="{06919C33-FD09-4C75-9807-013446205127}" dt="2022-10-26T11:56:04.005" v="1052" actId="18245"/>
-          <ac:spMkLst>
-            <pc:docMk/>
-            <pc:sldMk cId="476464163" sldId="833"/>
-            <ac:spMk id="13" creationId="{AD2E165D-FD2C-CDBC-4644-0AD62CD11E3E}"/>
-          </ac:spMkLst>
-        </pc:spChg>
-        <pc:spChg chg="mod">
-          <ac:chgData name="Sana Belguith" userId="edaa0afb-4621-4165-af1d-05ed505f7999" providerId="ADAL" clId="{06919C33-FD09-4C75-9807-013446205127}" dt="2022-10-26T11:56:04.005" v="1052" actId="18245"/>
-          <ac:spMkLst>
-            <pc:docMk/>
-            <pc:sldMk cId="476464163" sldId="833"/>
-            <ac:spMk id="14" creationId="{7183B911-AB56-EBA7-BA95-B5F780D1EBF3}"/>
-          </ac:spMkLst>
-        </pc:spChg>
-        <pc:spChg chg="mod">
-          <ac:chgData name="Sana Belguith" userId="edaa0afb-4621-4165-af1d-05ed505f7999" providerId="ADAL" clId="{06919C33-FD09-4C75-9807-013446205127}" dt="2022-10-26T11:56:04.005" v="1052" actId="18245"/>
-          <ac:spMkLst>
-            <pc:docMk/>
-            <pc:sldMk cId="476464163" sldId="833"/>
-            <ac:spMk id="15" creationId="{FBF64134-B7A0-469E-22CA-0E67ADFB92B0}"/>
-          </ac:spMkLst>
-        </pc:spChg>
-        <pc:grpChg chg="mod">
-          <ac:chgData name="Sana Belguith" userId="edaa0afb-4621-4165-af1d-05ed505f7999" providerId="ADAL" clId="{06919C33-FD09-4C75-9807-013446205127}" dt="2022-10-26T11:57:21.831" v="1103" actId="1036"/>
-          <ac:grpSpMkLst>
-            <pc:docMk/>
-            <pc:sldMk cId="476464163" sldId="833"/>
-            <ac:grpSpMk id="8" creationId="{5B86F84C-0990-8766-C212-38EA8009A1F1}"/>
-          </ac:grpSpMkLst>
-        </pc:grpChg>
-        <pc:graphicFrameChg chg="add del mod modGraphic">
-          <ac:chgData name="Sana Belguith" userId="edaa0afb-4621-4165-af1d-05ed505f7999" providerId="ADAL" clId="{06919C33-FD09-4C75-9807-013446205127}" dt="2022-10-26T11:56:04.005" v="1052" actId="18245"/>
-          <ac:graphicFrameMkLst>
-            <pc:docMk/>
-            <pc:sldMk cId="476464163" sldId="833"/>
-            <ac:graphicFrameMk id="4" creationId="{D0EF230B-B24A-95D6-1F98-F2AF3C2618AD}"/>
-          </ac:graphicFrameMkLst>
-        </pc:graphicFrameChg>
       </pc:sldChg>
       <pc:sldChg chg="addSp delSp modSp add mod">
         <pc:chgData name="Sana Belguith" userId="edaa0afb-4621-4165-af1d-05ed505f7999" providerId="ADAL" clId="{06919C33-FD09-4C75-9807-013446205127}" dt="2022-10-26T13:47:53.694" v="2184" actId="478"/>
@@ -1719,38 +535,6 @@
           <pc:docMk/>
           <pc:sldMk cId="1447406246" sldId="834"/>
         </pc:sldMkLst>
-        <pc:spChg chg="add del mod">
-          <ac:chgData name="Sana Belguith" userId="edaa0afb-4621-4165-af1d-05ed505f7999" providerId="ADAL" clId="{06919C33-FD09-4C75-9807-013446205127}" dt="2022-10-26T13:47:53.694" v="2184" actId="478"/>
-          <ac:spMkLst>
-            <pc:docMk/>
-            <pc:sldMk cId="1447406246" sldId="834"/>
-            <ac:spMk id="5" creationId="{3756D532-88E0-709C-CEF1-90F077F37B6F}"/>
-          </ac:spMkLst>
-        </pc:spChg>
-        <pc:spChg chg="del">
-          <ac:chgData name="Sana Belguith" userId="edaa0afb-4621-4165-af1d-05ed505f7999" providerId="ADAL" clId="{06919C33-FD09-4C75-9807-013446205127}" dt="2022-10-26T13:47:49.220" v="2181" actId="478"/>
-          <ac:spMkLst>
-            <pc:docMk/>
-            <pc:sldMk cId="1447406246" sldId="834"/>
-            <ac:spMk id="6" creationId="{1F85734F-124C-9C8D-E1E1-FF04C909B08D}"/>
-          </ac:spMkLst>
-        </pc:spChg>
-        <pc:graphicFrameChg chg="del">
-          <ac:chgData name="Sana Belguith" userId="edaa0afb-4621-4165-af1d-05ed505f7999" providerId="ADAL" clId="{06919C33-FD09-4C75-9807-013446205127}" dt="2022-10-26T13:47:49.220" v="2181" actId="478"/>
-          <ac:graphicFrameMkLst>
-            <pc:docMk/>
-            <pc:sldMk cId="1447406246" sldId="834"/>
-            <ac:graphicFrameMk id="4" creationId="{93FF51F6-D480-6E08-9B09-55A742334957}"/>
-          </ac:graphicFrameMkLst>
-        </pc:graphicFrameChg>
-        <pc:graphicFrameChg chg="add mod">
-          <ac:chgData name="Sana Belguith" userId="edaa0afb-4621-4165-af1d-05ed505f7999" providerId="ADAL" clId="{06919C33-FD09-4C75-9807-013446205127}" dt="2022-10-26T13:47:52.072" v="2183" actId="1076"/>
-          <ac:graphicFrameMkLst>
-            <pc:docMk/>
-            <pc:sldMk cId="1447406246" sldId="834"/>
-            <ac:graphicFrameMk id="7" creationId="{CABD49A4-59EB-D153-8592-8F469A9B78CF}"/>
-          </ac:graphicFrameMkLst>
-        </pc:graphicFrameChg>
       </pc:sldChg>
       <pc:sldChg chg="addSp delSp modSp new mod modAnim">
         <pc:chgData name="Sana Belguith" userId="edaa0afb-4621-4165-af1d-05ed505f7999" providerId="ADAL" clId="{06919C33-FD09-4C75-9807-013446205127}" dt="2022-10-26T14:30:51.987" v="2633" actId="5793"/>
@@ -1758,30 +542,6 @@
           <pc:docMk/>
           <pc:sldMk cId="2733562778" sldId="835"/>
         </pc:sldMkLst>
-        <pc:spChg chg="del">
-          <ac:chgData name="Sana Belguith" userId="edaa0afb-4621-4165-af1d-05ed505f7999" providerId="ADAL" clId="{06919C33-FD09-4C75-9807-013446205127}" dt="2022-10-26T13:50:12.509" v="2284" actId="478"/>
-          <ac:spMkLst>
-            <pc:docMk/>
-            <pc:sldMk cId="2733562778" sldId="835"/>
-            <ac:spMk id="2" creationId="{7286B5B0-3EC6-331E-5B53-0C4D80DB94AF}"/>
-          </ac:spMkLst>
-        </pc:spChg>
-        <pc:spChg chg="mod">
-          <ac:chgData name="Sana Belguith" userId="edaa0afb-4621-4165-af1d-05ed505f7999" providerId="ADAL" clId="{06919C33-FD09-4C75-9807-013446205127}" dt="2022-10-26T14:30:51.987" v="2633" actId="5793"/>
-          <ac:spMkLst>
-            <pc:docMk/>
-            <pc:sldMk cId="2733562778" sldId="835"/>
-            <ac:spMk id="3" creationId="{63D88D10-DFD4-C4F8-5A83-22B4C2A3EA5C}"/>
-          </ac:spMkLst>
-        </pc:spChg>
-        <pc:spChg chg="add mod">
-          <ac:chgData name="Sana Belguith" userId="edaa0afb-4621-4165-af1d-05ed505f7999" providerId="ADAL" clId="{06919C33-FD09-4C75-9807-013446205127}" dt="2022-10-26T13:50:13.124" v="2285"/>
-          <ac:spMkLst>
-            <pc:docMk/>
-            <pc:sldMk cId="2733562778" sldId="835"/>
-            <ac:spMk id="4" creationId="{165EC578-5F1B-8760-DD5A-F6E3B81550F5}"/>
-          </ac:spMkLst>
-        </pc:spChg>
       </pc:sldChg>
       <pc:sldChg chg="modSp add mod ord">
         <pc:chgData name="Sana Belguith" userId="edaa0afb-4621-4165-af1d-05ed505f7999" providerId="ADAL" clId="{06919C33-FD09-4C75-9807-013446205127}" dt="2022-10-27T11:22:53.577" v="3604" actId="108"/>
@@ -1789,14 +549,6 @@
           <pc:docMk/>
           <pc:sldMk cId="874890184" sldId="836"/>
         </pc:sldMkLst>
-        <pc:spChg chg="mod">
-          <ac:chgData name="Sana Belguith" userId="edaa0afb-4621-4165-af1d-05ed505f7999" providerId="ADAL" clId="{06919C33-FD09-4C75-9807-013446205127}" dt="2022-10-27T11:22:53.577" v="3604" actId="108"/>
-          <ac:spMkLst>
-            <pc:docMk/>
-            <pc:sldMk cId="874890184" sldId="836"/>
-            <ac:spMk id="3" creationId="{47F5169D-F3BF-748F-AE7E-DB87613F077F}"/>
-          </ac:spMkLst>
-        </pc:spChg>
       </pc:sldChg>
       <pc:sldChg chg="modSp add mod">
         <pc:chgData name="Sana Belguith" userId="edaa0afb-4621-4165-af1d-05ed505f7999" providerId="ADAL" clId="{06919C33-FD09-4C75-9807-013446205127}" dt="2022-10-26T14:31:10.629" v="2634" actId="2711"/>
@@ -1804,14 +556,6 @@
           <pc:docMk/>
           <pc:sldMk cId="1709057645" sldId="837"/>
         </pc:sldMkLst>
-        <pc:spChg chg="mod">
-          <ac:chgData name="Sana Belguith" userId="edaa0afb-4621-4165-af1d-05ed505f7999" providerId="ADAL" clId="{06919C33-FD09-4C75-9807-013446205127}" dt="2022-10-26T14:31:10.629" v="2634" actId="2711"/>
-          <ac:spMkLst>
-            <pc:docMk/>
-            <pc:sldMk cId="1709057645" sldId="837"/>
-            <ac:spMk id="3" creationId="{47F5169D-F3BF-748F-AE7E-DB87613F077F}"/>
-          </ac:spMkLst>
-        </pc:spChg>
       </pc:sldChg>
       <pc:sldChg chg="modSp add mod">
         <pc:chgData name="Sana Belguith" userId="edaa0afb-4621-4165-af1d-05ed505f7999" providerId="ADAL" clId="{06919C33-FD09-4C75-9807-013446205127}" dt="2022-10-26T14:06:11.237" v="2610" actId="20577"/>
@@ -1819,14 +563,6 @@
           <pc:docMk/>
           <pc:sldMk cId="1443625494" sldId="838"/>
         </pc:sldMkLst>
-        <pc:spChg chg="mod">
-          <ac:chgData name="Sana Belguith" userId="edaa0afb-4621-4165-af1d-05ed505f7999" providerId="ADAL" clId="{06919C33-FD09-4C75-9807-013446205127}" dt="2022-10-26T14:06:11.237" v="2610" actId="20577"/>
-          <ac:spMkLst>
-            <pc:docMk/>
-            <pc:sldMk cId="1443625494" sldId="838"/>
-            <ac:spMk id="3" creationId="{47F5169D-F3BF-748F-AE7E-DB87613F077F}"/>
-          </ac:spMkLst>
-        </pc:spChg>
       </pc:sldChg>
       <pc:sldChg chg="delSp modSp add mod">
         <pc:chgData name="Sana Belguith" userId="edaa0afb-4621-4165-af1d-05ed505f7999" providerId="ADAL" clId="{06919C33-FD09-4C75-9807-013446205127}" dt="2022-10-26T14:57:57.311" v="3194" actId="108"/>
@@ -1834,118 +570,6 @@
           <pc:docMk/>
           <pc:sldMk cId="1085959852" sldId="839"/>
         </pc:sldMkLst>
-        <pc:spChg chg="mod">
-          <ac:chgData name="Sana Belguith" userId="edaa0afb-4621-4165-af1d-05ed505f7999" providerId="ADAL" clId="{06919C33-FD09-4C75-9807-013446205127}" dt="2022-10-26T14:57:57.311" v="3194" actId="108"/>
-          <ac:spMkLst>
-            <pc:docMk/>
-            <pc:sldMk cId="1085959852" sldId="839"/>
-            <ac:spMk id="2" creationId="{B1223369-682F-D513-8E0C-2251EBCA5E58}"/>
-          </ac:spMkLst>
-        </pc:spChg>
-        <pc:spChg chg="mod">
-          <ac:chgData name="Sana Belguith" userId="edaa0afb-4621-4165-af1d-05ed505f7999" providerId="ADAL" clId="{06919C33-FD09-4C75-9807-013446205127}" dt="2022-10-26T14:46:48.263" v="2986" actId="20577"/>
-          <ac:spMkLst>
-            <pc:docMk/>
-            <pc:sldMk cId="1085959852" sldId="839"/>
-            <ac:spMk id="3" creationId="{DEDB7778-BBC7-5EFB-CF1D-2F46B352D17F}"/>
-          </ac:spMkLst>
-        </pc:spChg>
-        <pc:spChg chg="del">
-          <ac:chgData name="Sana Belguith" userId="edaa0afb-4621-4165-af1d-05ed505f7999" providerId="ADAL" clId="{06919C33-FD09-4C75-9807-013446205127}" dt="2022-10-26T14:45:52.019" v="2965" actId="478"/>
-          <ac:spMkLst>
-            <pc:docMk/>
-            <pc:sldMk cId="1085959852" sldId="839"/>
-            <ac:spMk id="4" creationId="{AA6D8119-7170-683D-896F-3F27EDF8EB6F}"/>
-          </ac:spMkLst>
-        </pc:spChg>
-        <pc:spChg chg="del">
-          <ac:chgData name="Sana Belguith" userId="edaa0afb-4621-4165-af1d-05ed505f7999" providerId="ADAL" clId="{06919C33-FD09-4C75-9807-013446205127}" dt="2022-10-26T14:45:52.019" v="2965" actId="478"/>
-          <ac:spMkLst>
-            <pc:docMk/>
-            <pc:sldMk cId="1085959852" sldId="839"/>
-            <ac:spMk id="7" creationId="{F2DF11C6-A136-3C8A-E263-69DA40BB280E}"/>
-          </ac:spMkLst>
-        </pc:spChg>
-        <pc:spChg chg="del">
-          <ac:chgData name="Sana Belguith" userId="edaa0afb-4621-4165-af1d-05ed505f7999" providerId="ADAL" clId="{06919C33-FD09-4C75-9807-013446205127}" dt="2022-10-26T14:45:52.019" v="2965" actId="478"/>
-          <ac:spMkLst>
-            <pc:docMk/>
-            <pc:sldMk cId="1085959852" sldId="839"/>
-            <ac:spMk id="8" creationId="{F4D1C4FD-6CEB-B21D-D6B0-E68BB4E3F3BC}"/>
-          </ac:spMkLst>
-        </pc:spChg>
-        <pc:spChg chg="del">
-          <ac:chgData name="Sana Belguith" userId="edaa0afb-4621-4165-af1d-05ed505f7999" providerId="ADAL" clId="{06919C33-FD09-4C75-9807-013446205127}" dt="2022-10-26T14:45:52.019" v="2965" actId="478"/>
-          <ac:spMkLst>
-            <pc:docMk/>
-            <pc:sldMk cId="1085959852" sldId="839"/>
-            <ac:spMk id="9" creationId="{904ABEE8-B0F1-F233-A34D-B42B38D6F5C1}"/>
-          </ac:spMkLst>
-        </pc:spChg>
-        <pc:spChg chg="del">
-          <ac:chgData name="Sana Belguith" userId="edaa0afb-4621-4165-af1d-05ed505f7999" providerId="ADAL" clId="{06919C33-FD09-4C75-9807-013446205127}" dt="2022-10-26T14:45:52.019" v="2965" actId="478"/>
-          <ac:spMkLst>
-            <pc:docMk/>
-            <pc:sldMk cId="1085959852" sldId="839"/>
-            <ac:spMk id="10" creationId="{ECAC9090-CA4F-872F-511C-C95EDC814BDE}"/>
-          </ac:spMkLst>
-        </pc:spChg>
-        <pc:spChg chg="del">
-          <ac:chgData name="Sana Belguith" userId="edaa0afb-4621-4165-af1d-05ed505f7999" providerId="ADAL" clId="{06919C33-FD09-4C75-9807-013446205127}" dt="2022-10-26T14:45:52.019" v="2965" actId="478"/>
-          <ac:spMkLst>
-            <pc:docMk/>
-            <pc:sldMk cId="1085959852" sldId="839"/>
-            <ac:spMk id="12" creationId="{44614E1F-FD4F-DB94-1DCE-B180AFA6FBD8}"/>
-          </ac:spMkLst>
-        </pc:spChg>
-        <pc:spChg chg="del">
-          <ac:chgData name="Sana Belguith" userId="edaa0afb-4621-4165-af1d-05ed505f7999" providerId="ADAL" clId="{06919C33-FD09-4C75-9807-013446205127}" dt="2022-10-26T14:45:52.019" v="2965" actId="478"/>
-          <ac:spMkLst>
-            <pc:docMk/>
-            <pc:sldMk cId="1085959852" sldId="839"/>
-            <ac:spMk id="17" creationId="{25D0FCFA-D1F3-82D2-10C0-7BE16B5DCFCD}"/>
-          </ac:spMkLst>
-        </pc:spChg>
-        <pc:spChg chg="del">
-          <ac:chgData name="Sana Belguith" userId="edaa0afb-4621-4165-af1d-05ed505f7999" providerId="ADAL" clId="{06919C33-FD09-4C75-9807-013446205127}" dt="2022-10-26T14:45:52.019" v="2965" actId="478"/>
-          <ac:spMkLst>
-            <pc:docMk/>
-            <pc:sldMk cId="1085959852" sldId="839"/>
-            <ac:spMk id="20" creationId="{A29D5251-5D6F-324B-12D1-49215D90E996}"/>
-          </ac:spMkLst>
-        </pc:spChg>
-        <pc:cxnChg chg="del">
-          <ac:chgData name="Sana Belguith" userId="edaa0afb-4621-4165-af1d-05ed505f7999" providerId="ADAL" clId="{06919C33-FD09-4C75-9807-013446205127}" dt="2022-10-26T14:45:52.019" v="2965" actId="478"/>
-          <ac:cxnSpMkLst>
-            <pc:docMk/>
-            <pc:sldMk cId="1085959852" sldId="839"/>
-            <ac:cxnSpMk id="11" creationId="{B4BF95BE-01D1-012F-D4CC-2138B3A20CE0}"/>
-          </ac:cxnSpMkLst>
-        </pc:cxnChg>
-        <pc:cxnChg chg="del mod">
-          <ac:chgData name="Sana Belguith" userId="edaa0afb-4621-4165-af1d-05ed505f7999" providerId="ADAL" clId="{06919C33-FD09-4C75-9807-013446205127}" dt="2022-10-26T14:45:52.019" v="2965" actId="478"/>
-          <ac:cxnSpMkLst>
-            <pc:docMk/>
-            <pc:sldMk cId="1085959852" sldId="839"/>
-            <ac:cxnSpMk id="13" creationId="{2A394954-D211-AB89-6E6B-BA97E21BCB36}"/>
-          </ac:cxnSpMkLst>
-        </pc:cxnChg>
-        <pc:cxnChg chg="del mod">
-          <ac:chgData name="Sana Belguith" userId="edaa0afb-4621-4165-af1d-05ed505f7999" providerId="ADAL" clId="{06919C33-FD09-4C75-9807-013446205127}" dt="2022-10-26T14:45:52.019" v="2965" actId="478"/>
-          <ac:cxnSpMkLst>
-            <pc:docMk/>
-            <pc:sldMk cId="1085959852" sldId="839"/>
-            <ac:cxnSpMk id="18" creationId="{33A4A944-F571-6CFA-1F35-693A89FF3549}"/>
-          </ac:cxnSpMkLst>
-        </pc:cxnChg>
-        <pc:cxnChg chg="del mod">
-          <ac:chgData name="Sana Belguith" userId="edaa0afb-4621-4165-af1d-05ed505f7999" providerId="ADAL" clId="{06919C33-FD09-4C75-9807-013446205127}" dt="2022-10-26T14:45:52.019" v="2965" actId="478"/>
-          <ac:cxnSpMkLst>
-            <pc:docMk/>
-            <pc:sldMk cId="1085959852" sldId="839"/>
-            <ac:cxnSpMk id="21" creationId="{CCDDFE58-0A79-64C0-5DE7-F9ED9C321992}"/>
-          </ac:cxnSpMkLst>
-        </pc:cxnChg>
       </pc:sldChg>
       <pc:sldChg chg="delSp add del mod">
         <pc:chgData name="Sana Belguith" userId="edaa0afb-4621-4165-af1d-05ed505f7999" providerId="ADAL" clId="{06919C33-FD09-4C75-9807-013446205127}" dt="2022-10-26T14:52:21.113" v="3060" actId="47"/>
@@ -1953,14 +577,6 @@
           <pc:docMk/>
           <pc:sldMk cId="343088343" sldId="840"/>
         </pc:sldMkLst>
-        <pc:picChg chg="del">
-          <ac:chgData name="Sana Belguith" userId="edaa0afb-4621-4165-af1d-05ed505f7999" providerId="ADAL" clId="{06919C33-FD09-4C75-9807-013446205127}" dt="2022-10-26T14:52:08.268" v="3057" actId="478"/>
-          <ac:picMkLst>
-            <pc:docMk/>
-            <pc:sldMk cId="343088343" sldId="840"/>
-            <ac:picMk id="5" creationId="{B52D45EC-9CC5-8D27-E7A4-0EC01F35D208}"/>
-          </ac:picMkLst>
-        </pc:picChg>
       </pc:sldChg>
       <pc:sldChg chg="modSp add mod">
         <pc:chgData name="Sana Belguith" userId="edaa0afb-4621-4165-af1d-05ed505f7999" providerId="ADAL" clId="{06919C33-FD09-4C75-9807-013446205127}" dt="2022-10-27T13:42:07.055" v="3630" actId="20577"/>
@@ -1968,22 +584,6 @@
           <pc:docMk/>
           <pc:sldMk cId="543135454" sldId="840"/>
         </pc:sldMkLst>
-        <pc:spChg chg="mod">
-          <ac:chgData name="Sana Belguith" userId="edaa0afb-4621-4165-af1d-05ed505f7999" providerId="ADAL" clId="{06919C33-FD09-4C75-9807-013446205127}" dt="2022-10-26T15:06:51.564" v="3363" actId="14100"/>
-          <ac:spMkLst>
-            <pc:docMk/>
-            <pc:sldMk cId="543135454" sldId="840"/>
-            <ac:spMk id="2" creationId="{82C6D1E6-CE5D-BD84-A25F-E77C7F2E35E2}"/>
-          </ac:spMkLst>
-        </pc:spChg>
-        <pc:spChg chg="mod">
-          <ac:chgData name="Sana Belguith" userId="edaa0afb-4621-4165-af1d-05ed505f7999" providerId="ADAL" clId="{06919C33-FD09-4C75-9807-013446205127}" dt="2022-10-27T13:42:07.055" v="3630" actId="20577"/>
-          <ac:spMkLst>
-            <pc:docMk/>
-            <pc:sldMk cId="543135454" sldId="840"/>
-            <ac:spMk id="3" creationId="{F1D51E3F-48A2-AB1D-98A5-8312F09CC113}"/>
-          </ac:spMkLst>
-        </pc:spChg>
       </pc:sldChg>
       <pc:sldChg chg="modSp add mod">
         <pc:chgData name="Sana Belguith" userId="edaa0afb-4621-4165-af1d-05ed505f7999" providerId="ADAL" clId="{06919C33-FD09-4C75-9807-013446205127}" dt="2022-10-27T13:45:23.973" v="3635" actId="20577"/>
@@ -1991,22 +591,6 @@
           <pc:docMk/>
           <pc:sldMk cId="133803380" sldId="841"/>
         </pc:sldMkLst>
-        <pc:spChg chg="mod">
-          <ac:chgData name="Sana Belguith" userId="edaa0afb-4621-4165-af1d-05ed505f7999" providerId="ADAL" clId="{06919C33-FD09-4C75-9807-013446205127}" dt="2022-10-26T15:25:22.599" v="3500" actId="20577"/>
-          <ac:spMkLst>
-            <pc:docMk/>
-            <pc:sldMk cId="133803380" sldId="841"/>
-            <ac:spMk id="2" creationId="{7AB951F6-EE64-25E4-D683-E5BD4E050AE1}"/>
-          </ac:spMkLst>
-        </pc:spChg>
-        <pc:spChg chg="mod">
-          <ac:chgData name="Sana Belguith" userId="edaa0afb-4621-4165-af1d-05ed505f7999" providerId="ADAL" clId="{06919C33-FD09-4C75-9807-013446205127}" dt="2022-10-27T13:45:23.973" v="3635" actId="20577"/>
-          <ac:spMkLst>
-            <pc:docMk/>
-            <pc:sldMk cId="133803380" sldId="841"/>
-            <ac:spMk id="3" creationId="{3AC6DF8F-6FF7-959D-6412-3632242B7FEC}"/>
-          </ac:spMkLst>
-        </pc:spChg>
       </pc:sldChg>
       <pc:sldChg chg="addSp delSp modSp new mod chgLayout">
         <pc:chgData name="Sana Belguith" userId="edaa0afb-4621-4165-af1d-05ed505f7999" providerId="ADAL" clId="{06919C33-FD09-4C75-9807-013446205127}" dt="2022-10-26T15:34:45.380" v="3596" actId="5793"/>
@@ -2014,46 +598,6 @@
           <pc:docMk/>
           <pc:sldMk cId="1604521730" sldId="842"/>
         </pc:sldMkLst>
-        <pc:spChg chg="del">
-          <ac:chgData name="Sana Belguith" userId="edaa0afb-4621-4165-af1d-05ed505f7999" providerId="ADAL" clId="{06919C33-FD09-4C75-9807-013446205127}" dt="2022-10-26T15:30:27.988" v="3529" actId="700"/>
-          <ac:spMkLst>
-            <pc:docMk/>
-            <pc:sldMk cId="1604521730" sldId="842"/>
-            <ac:spMk id="2" creationId="{F8F81A11-5961-83F1-510A-0F6CA0D8931B}"/>
-          </ac:spMkLst>
-        </pc:spChg>
-        <pc:spChg chg="del">
-          <ac:chgData name="Sana Belguith" userId="edaa0afb-4621-4165-af1d-05ed505f7999" providerId="ADAL" clId="{06919C33-FD09-4C75-9807-013446205127}" dt="2022-10-26T15:27:20.288" v="3525" actId="931"/>
-          <ac:spMkLst>
-            <pc:docMk/>
-            <pc:sldMk cId="1604521730" sldId="842"/>
-            <ac:spMk id="3" creationId="{04B28D93-7A09-CA65-F28B-B6B715AA5A2D}"/>
-          </ac:spMkLst>
-        </pc:spChg>
-        <pc:spChg chg="add mod ord">
-          <ac:chgData name="Sana Belguith" userId="edaa0afb-4621-4165-af1d-05ed505f7999" providerId="ADAL" clId="{06919C33-FD09-4C75-9807-013446205127}" dt="2022-10-26T15:30:56.772" v="3538" actId="1076"/>
-          <ac:spMkLst>
-            <pc:docMk/>
-            <pc:sldMk cId="1604521730" sldId="842"/>
-            <ac:spMk id="6" creationId="{FF226437-6926-07FF-844A-5499AC068CF3}"/>
-          </ac:spMkLst>
-        </pc:spChg>
-        <pc:spChg chg="add mod">
-          <ac:chgData name="Sana Belguith" userId="edaa0afb-4621-4165-af1d-05ed505f7999" providerId="ADAL" clId="{06919C33-FD09-4C75-9807-013446205127}" dt="2022-10-26T15:34:45.380" v="3596" actId="5793"/>
-          <ac:spMkLst>
-            <pc:docMk/>
-            <pc:sldMk cId="1604521730" sldId="842"/>
-            <ac:spMk id="8" creationId="{D4131D9F-484F-0FFA-0ABA-1AE62FB21F90}"/>
-          </ac:spMkLst>
-        </pc:spChg>
-        <pc:picChg chg="add del mod ord">
-          <ac:chgData name="Sana Belguith" userId="edaa0afb-4621-4165-af1d-05ed505f7999" providerId="ADAL" clId="{06919C33-FD09-4C75-9807-013446205127}" dt="2022-10-26T15:30:36.126" v="3531" actId="478"/>
-          <ac:picMkLst>
-            <pc:docMk/>
-            <pc:sldMk cId="1604521730" sldId="842"/>
-            <ac:picMk id="5" creationId="{49C636E5-9229-3EAA-87F3-A2F8371801E3}"/>
-          </ac:picMkLst>
-        </pc:picChg>
       </pc:sldChg>
       <pc:sldChg chg="add del">
         <pc:chgData name="Sana Belguith" userId="edaa0afb-4621-4165-af1d-05ed505f7999" providerId="ADAL" clId="{06919C33-FD09-4C75-9807-013446205127}" dt="2022-10-26T15:26:05.036" v="3508"/>
@@ -2068,54 +612,6 @@
           <pc:docMk/>
           <pc:sldMk cId="2104286480" sldId="843"/>
         </pc:sldMkLst>
-        <pc:spChg chg="add del mod">
-          <ac:chgData name="Sana Belguith" userId="edaa0afb-4621-4165-af1d-05ed505f7999" providerId="ADAL" clId="{06919C33-FD09-4C75-9807-013446205127}" dt="2022-10-26T15:33:24.926" v="3576" actId="478"/>
-          <ac:spMkLst>
-            <pc:docMk/>
-            <pc:sldMk cId="2104286480" sldId="843"/>
-            <ac:spMk id="3" creationId="{F5BED6FF-ADE6-4050-B2FA-90038BE92440}"/>
-          </ac:spMkLst>
-        </pc:spChg>
-        <pc:spChg chg="del">
-          <ac:chgData name="Sana Belguith" userId="edaa0afb-4621-4165-af1d-05ed505f7999" providerId="ADAL" clId="{06919C33-FD09-4C75-9807-013446205127}" dt="2022-10-26T15:33:46.703" v="3585" actId="478"/>
-          <ac:spMkLst>
-            <pc:docMk/>
-            <pc:sldMk cId="2104286480" sldId="843"/>
-            <ac:spMk id="6" creationId="{FF226437-6926-07FF-844A-5499AC068CF3}"/>
-          </ac:spMkLst>
-        </pc:spChg>
-        <pc:spChg chg="add del">
-          <ac:chgData name="Sana Belguith" userId="edaa0afb-4621-4165-af1d-05ed505f7999" providerId="ADAL" clId="{06919C33-FD09-4C75-9807-013446205127}" dt="2022-10-26T15:33:19.869" v="3575" actId="22"/>
-          <ac:spMkLst>
-            <pc:docMk/>
-            <pc:sldMk cId="2104286480" sldId="843"/>
-            <ac:spMk id="7" creationId="{318912FD-7A24-BEED-E8B9-4C16D88048B7}"/>
-          </ac:spMkLst>
-        </pc:spChg>
-        <pc:spChg chg="add mod">
-          <ac:chgData name="Sana Belguith" userId="edaa0afb-4621-4165-af1d-05ed505f7999" providerId="ADAL" clId="{06919C33-FD09-4C75-9807-013446205127}" dt="2022-10-26T15:34:35.071" v="3594" actId="12"/>
-          <ac:spMkLst>
-            <pc:docMk/>
-            <pc:sldMk cId="2104286480" sldId="843"/>
-            <ac:spMk id="9" creationId="{860A396D-6D49-D7A7-0A66-52F6077468DA}"/>
-          </ac:spMkLst>
-        </pc:spChg>
-        <pc:spChg chg="add mod">
-          <ac:chgData name="Sana Belguith" userId="edaa0afb-4621-4165-af1d-05ed505f7999" providerId="ADAL" clId="{06919C33-FD09-4C75-9807-013446205127}" dt="2022-10-26T15:33:47.378" v="3586"/>
-          <ac:spMkLst>
-            <pc:docMk/>
-            <pc:sldMk cId="2104286480" sldId="843"/>
-            <ac:spMk id="10" creationId="{51606804-D887-B3A7-60BD-1F661C044F50}"/>
-          </ac:spMkLst>
-        </pc:spChg>
-        <pc:picChg chg="add del">
-          <ac:chgData name="Sana Belguith" userId="edaa0afb-4621-4165-af1d-05ed505f7999" providerId="ADAL" clId="{06919C33-FD09-4C75-9807-013446205127}" dt="2022-10-26T15:33:32.374" v="3580" actId="478"/>
-          <ac:picMkLst>
-            <pc:docMk/>
-            <pc:sldMk cId="2104286480" sldId="843"/>
-            <ac:picMk id="5" creationId="{49C636E5-9229-3EAA-87F3-A2F8371801E3}"/>
-          </ac:picMkLst>
-        </pc:picChg>
       </pc:sldChg>
     </pc:docChg>
   </pc:docChgLst>
@@ -2132,14 +628,6 @@
           <pc:docMk/>
           <pc:sldMk cId="4276838678" sldId="388"/>
         </pc:sldMkLst>
-        <pc:spChg chg="mod">
-          <ac:chgData name="Sana Belguith" userId="edaa0afb-4621-4165-af1d-05ed505f7999" providerId="ADAL" clId="{6E147B01-719F-4DF3-A8D5-E95C10836EC0}" dt="2024-11-03T19:12:50.465" v="22" actId="20577"/>
-          <ac:spMkLst>
-            <pc:docMk/>
-            <pc:sldMk cId="4276838678" sldId="388"/>
-            <ac:spMk id="5" creationId="{2C231BF0-3B23-4702-BBC3-E8C847793AFF}"/>
-          </ac:spMkLst>
-        </pc:spChg>
       </pc:sldChg>
       <pc:sldChg chg="modSp mod">
         <pc:chgData name="Sana Belguith" userId="edaa0afb-4621-4165-af1d-05ed505f7999" providerId="ADAL" clId="{6E147B01-719F-4DF3-A8D5-E95C10836EC0}" dt="2024-11-03T19:18:58.330" v="33" actId="20577"/>
@@ -2147,14 +635,6 @@
           <pc:docMk/>
           <pc:sldMk cId="2401707025" sldId="404"/>
         </pc:sldMkLst>
-        <pc:spChg chg="mod">
-          <ac:chgData name="Sana Belguith" userId="edaa0afb-4621-4165-af1d-05ed505f7999" providerId="ADAL" clId="{6E147B01-719F-4DF3-A8D5-E95C10836EC0}" dt="2024-11-03T19:18:58.330" v="33" actId="20577"/>
-          <ac:spMkLst>
-            <pc:docMk/>
-            <pc:sldMk cId="2401707025" sldId="404"/>
-            <ac:spMk id="3" creationId="{875E7498-990B-47BC-8629-AE2C57E9FAEF}"/>
-          </ac:spMkLst>
-        </pc:spChg>
       </pc:sldChg>
       <pc:sldChg chg="modSp mod">
         <pc:chgData name="Sana Belguith" userId="edaa0afb-4621-4165-af1d-05ed505f7999" providerId="ADAL" clId="{6E147B01-719F-4DF3-A8D5-E95C10836EC0}" dt="2024-11-03T19:24:48.305" v="41" actId="20577"/>
@@ -2162,14 +642,6 @@
           <pc:docMk/>
           <pc:sldMk cId="2002294350" sldId="425"/>
         </pc:sldMkLst>
-        <pc:spChg chg="mod">
-          <ac:chgData name="Sana Belguith" userId="edaa0afb-4621-4165-af1d-05ed505f7999" providerId="ADAL" clId="{6E147B01-719F-4DF3-A8D5-E95C10836EC0}" dt="2024-11-03T19:24:48.305" v="41" actId="20577"/>
-          <ac:spMkLst>
-            <pc:docMk/>
-            <pc:sldMk cId="2002294350" sldId="425"/>
-            <ac:spMk id="3" creationId="{809EADAF-02EB-4865-A014-580DF81D9E69}"/>
-          </ac:spMkLst>
-        </pc:spChg>
       </pc:sldChg>
       <pc:sldChg chg="modSp mod">
         <pc:chgData name="Sana Belguith" userId="edaa0afb-4621-4165-af1d-05ed505f7999" providerId="ADAL" clId="{6E147B01-719F-4DF3-A8D5-E95C10836EC0}" dt="2024-11-03T19:17:53.511" v="25" actId="404"/>
@@ -2177,12 +649,43 @@
           <pc:docMk/>
           <pc:sldMk cId="1801458314" sldId="438"/>
         </pc:sldMkLst>
+      </pc:sldChg>
+    </pc:docChg>
+  </pc:docChgLst>
+  <pc:docChgLst>
+    <pc:chgData name="Sana Belguith" userId="edaa0afb-4621-4165-af1d-05ed505f7999" providerId="ADAL" clId="{FAC4329E-AD2F-4436-8EA1-93788499A5D0}"/>
+    <pc:docChg chg="modSld">
+      <pc:chgData name="Sana Belguith" userId="edaa0afb-4621-4165-af1d-05ed505f7999" providerId="ADAL" clId="{FAC4329E-AD2F-4436-8EA1-93788499A5D0}" dt="2025-11-10T08:49:29.474" v="2" actId="20577"/>
+      <pc:docMkLst>
+        <pc:docMk/>
+      </pc:docMkLst>
+      <pc:sldChg chg="modSp mod">
+        <pc:chgData name="Sana Belguith" userId="edaa0afb-4621-4165-af1d-05ed505f7999" providerId="ADAL" clId="{FAC4329E-AD2F-4436-8EA1-93788499A5D0}" dt="2025-11-10T08:49:29.474" v="2" actId="20577"/>
+        <pc:sldMkLst>
+          <pc:docMk/>
+          <pc:sldMk cId="1873631347" sldId="401"/>
+        </pc:sldMkLst>
         <pc:spChg chg="mod">
-          <ac:chgData name="Sana Belguith" userId="edaa0afb-4621-4165-af1d-05ed505f7999" providerId="ADAL" clId="{6E147B01-719F-4DF3-A8D5-E95C10836EC0}" dt="2024-11-03T19:17:53.511" v="25" actId="404"/>
+          <ac:chgData name="Sana Belguith" userId="edaa0afb-4621-4165-af1d-05ed505f7999" providerId="ADAL" clId="{FAC4329E-AD2F-4436-8EA1-93788499A5D0}" dt="2025-11-10T08:49:29.474" v="2" actId="20577"/>
           <ac:spMkLst>
             <pc:docMk/>
-            <pc:sldMk cId="1801458314" sldId="438"/>
-            <ac:spMk id="3" creationId="{DA7C0BA8-EFA8-0A0F-8EFB-FFFC775A0A67}"/>
+            <pc:sldMk cId="1873631347" sldId="401"/>
+            <ac:spMk id="3" creationId="{875E7498-990B-47BC-8629-AE2C57E9FAEF}"/>
+          </ac:spMkLst>
+        </pc:spChg>
+      </pc:sldChg>
+      <pc:sldChg chg="modSp mod">
+        <pc:chgData name="Sana Belguith" userId="edaa0afb-4621-4165-af1d-05ed505f7999" providerId="ADAL" clId="{FAC4329E-AD2F-4436-8EA1-93788499A5D0}" dt="2025-11-10T08:48:07.437" v="1" actId="20577"/>
+        <pc:sldMkLst>
+          <pc:docMk/>
+          <pc:sldMk cId="3416181727" sldId="407"/>
+        </pc:sldMkLst>
+        <pc:spChg chg="mod">
+          <ac:chgData name="Sana Belguith" userId="edaa0afb-4621-4165-af1d-05ed505f7999" providerId="ADAL" clId="{FAC4329E-AD2F-4436-8EA1-93788499A5D0}" dt="2025-11-10T08:48:07.437" v="1" actId="20577"/>
+          <ac:spMkLst>
+            <pc:docMk/>
+            <pc:sldMk cId="3416181727" sldId="407"/>
+            <ac:spMk id="3" creationId="{4C7B5F2A-3F89-4959-A826-CED97086B95D}"/>
           </ac:spMkLst>
         </pc:spChg>
       </pc:sldChg>
@@ -2201,14 +704,6 @@
           <pc:docMk/>
           <pc:sldMk cId="3038245579" sldId="257"/>
         </pc:sldMkLst>
-        <pc:spChg chg="mod">
-          <ac:chgData name="Sana Belguith" userId="edaa0afb-4621-4165-af1d-05ed505f7999" providerId="ADAL" clId="{10F9F129-592B-40F1-997D-F487E669D3CB}" dt="2022-11-17T10:48:57.649" v="639" actId="27636"/>
-          <ac:spMkLst>
-            <pc:docMk/>
-            <pc:sldMk cId="3038245579" sldId="257"/>
-            <ac:spMk id="7" creationId="{D8041D3B-EB65-42B9-B5FC-BD8CF7A0FEEB}"/>
-          </ac:spMkLst>
-        </pc:spChg>
       </pc:sldChg>
       <pc:sldChg chg="modSp add del mod">
         <pc:chgData name="Sana Belguith" userId="edaa0afb-4621-4165-af1d-05ed505f7999" providerId="ADAL" clId="{10F9F129-592B-40F1-997D-F487E669D3CB}" dt="2022-11-17T10:43:16.184" v="572" actId="47"/>
@@ -2216,14 +711,6 @@
           <pc:docMk/>
           <pc:sldMk cId="0" sldId="260"/>
         </pc:sldMkLst>
-        <pc:spChg chg="mod">
-          <ac:chgData name="Sana Belguith" userId="edaa0afb-4621-4165-af1d-05ed505f7999" providerId="ADAL" clId="{10F9F129-592B-40F1-997D-F487E669D3CB}" dt="2022-11-16T15:47:56.512" v="425" actId="1076"/>
-          <ac:spMkLst>
-            <pc:docMk/>
-            <pc:sldMk cId="0" sldId="260"/>
-            <ac:spMk id="2" creationId="{00000000-0000-0000-0000-000000000000}"/>
-          </ac:spMkLst>
-        </pc:spChg>
       </pc:sldChg>
       <pc:sldChg chg="modSp add mod">
         <pc:chgData name="Sana Belguith" userId="edaa0afb-4621-4165-af1d-05ed505f7999" providerId="ADAL" clId="{10F9F129-592B-40F1-997D-F487E669D3CB}" dt="2022-11-16T13:47:23.630" v="17" actId="2711"/>
@@ -2231,14 +718,6 @@
           <pc:docMk/>
           <pc:sldMk cId="2375385487" sldId="361"/>
         </pc:sldMkLst>
-        <pc:spChg chg="mod">
-          <ac:chgData name="Sana Belguith" userId="edaa0afb-4621-4165-af1d-05ed505f7999" providerId="ADAL" clId="{10F9F129-592B-40F1-997D-F487E669D3CB}" dt="2022-11-16T13:47:23.630" v="17" actId="2711"/>
-          <ac:spMkLst>
-            <pc:docMk/>
-            <pc:sldMk cId="2375385487" sldId="361"/>
-            <ac:spMk id="4" creationId="{064D8D26-B133-4846-8DD0-D46F81284C5A}"/>
-          </ac:spMkLst>
-        </pc:spChg>
       </pc:sldChg>
       <pc:sldChg chg="modSp add mod">
         <pc:chgData name="Sana Belguith" userId="edaa0afb-4621-4165-af1d-05ed505f7999" providerId="ADAL" clId="{10F9F129-592B-40F1-997D-F487E669D3CB}" dt="2022-11-16T13:52:02.426" v="37" actId="404"/>
@@ -2246,22 +725,6 @@
           <pc:docMk/>
           <pc:sldMk cId="898831132" sldId="362"/>
         </pc:sldMkLst>
-        <pc:spChg chg="mod">
-          <ac:chgData name="Sana Belguith" userId="edaa0afb-4621-4165-af1d-05ed505f7999" providerId="ADAL" clId="{10F9F129-592B-40F1-997D-F487E669D3CB}" dt="2022-11-16T13:52:02.426" v="37" actId="404"/>
-          <ac:spMkLst>
-            <pc:docMk/>
-            <pc:sldMk cId="898831132" sldId="362"/>
-            <ac:spMk id="4" creationId="{93CAEB3F-F769-4A41-891A-E499BC145B3F}"/>
-          </ac:spMkLst>
-        </pc:spChg>
-        <pc:spChg chg="mod">
-          <ac:chgData name="Sana Belguith" userId="edaa0afb-4621-4165-af1d-05ed505f7999" providerId="ADAL" clId="{10F9F129-592B-40F1-997D-F487E669D3CB}" dt="2022-11-16T13:47:37.507" v="20" actId="2711"/>
-          <ac:spMkLst>
-            <pc:docMk/>
-            <pc:sldMk cId="898831132" sldId="362"/>
-            <ac:spMk id="5" creationId="{1445283B-F11B-4FFE-892C-4D11C2ED8E82}"/>
-          </ac:spMkLst>
-        </pc:spChg>
       </pc:sldChg>
       <pc:sldChg chg="modSp add mod">
         <pc:chgData name="Sana Belguith" userId="edaa0afb-4621-4165-af1d-05ed505f7999" providerId="ADAL" clId="{10F9F129-592B-40F1-997D-F487E669D3CB}" dt="2022-11-16T13:52:06.037" v="38" actId="108"/>
@@ -2269,22 +732,6 @@
           <pc:docMk/>
           <pc:sldMk cId="129483875" sldId="363"/>
         </pc:sldMkLst>
-        <pc:spChg chg="mod">
-          <ac:chgData name="Sana Belguith" userId="edaa0afb-4621-4165-af1d-05ed505f7999" providerId="ADAL" clId="{10F9F129-592B-40F1-997D-F487E669D3CB}" dt="2022-11-16T13:52:06.037" v="38" actId="108"/>
-          <ac:spMkLst>
-            <pc:docMk/>
-            <pc:sldMk cId="129483875" sldId="363"/>
-            <ac:spMk id="2" creationId="{B3879D63-739A-4F4E-A545-6B99458AF0D4}"/>
-          </ac:spMkLst>
-        </pc:spChg>
-        <pc:spChg chg="mod">
-          <ac:chgData name="Sana Belguith" userId="edaa0afb-4621-4165-af1d-05ed505f7999" providerId="ADAL" clId="{10F9F129-592B-40F1-997D-F487E669D3CB}" dt="2022-11-16T13:48:12.824" v="25" actId="255"/>
-          <ac:spMkLst>
-            <pc:docMk/>
-            <pc:sldMk cId="129483875" sldId="363"/>
-            <ac:spMk id="3" creationId="{364352E8-6349-4C9E-88BF-68FB2855CAA1}"/>
-          </ac:spMkLst>
-        </pc:spChg>
       </pc:sldChg>
       <pc:sldChg chg="modSp add mod">
         <pc:chgData name="Sana Belguith" userId="edaa0afb-4621-4165-af1d-05ed505f7999" providerId="ADAL" clId="{10F9F129-592B-40F1-997D-F487E669D3CB}" dt="2022-11-16T13:55:33.976" v="91" actId="1076"/>
@@ -2292,102 +739,6 @@
           <pc:docMk/>
           <pc:sldMk cId="3731856780" sldId="364"/>
         </pc:sldMkLst>
-        <pc:spChg chg="mod">
-          <ac:chgData name="Sana Belguith" userId="edaa0afb-4621-4165-af1d-05ed505f7999" providerId="ADAL" clId="{10F9F129-592B-40F1-997D-F487E669D3CB}" dt="2022-11-16T13:54:40.009" v="75" actId="1076"/>
-          <ac:spMkLst>
-            <pc:docMk/>
-            <pc:sldMk cId="3731856780" sldId="364"/>
-            <ac:spMk id="2" creationId="{E6E542B4-E4E1-4DA0-A326-3413F289F42C}"/>
-          </ac:spMkLst>
-        </pc:spChg>
-        <pc:spChg chg="mod">
-          <ac:chgData name="Sana Belguith" userId="edaa0afb-4621-4165-af1d-05ed505f7999" providerId="ADAL" clId="{10F9F129-592B-40F1-997D-F487E669D3CB}" dt="2022-11-16T13:55:29.827" v="89" actId="1076"/>
-          <ac:spMkLst>
-            <pc:docMk/>
-            <pc:sldMk cId="3731856780" sldId="364"/>
-            <ac:spMk id="5" creationId="{68AF798E-A925-499C-A6D7-56B92C949B2A}"/>
-          </ac:spMkLst>
-        </pc:spChg>
-        <pc:spChg chg="mod">
-          <ac:chgData name="Sana Belguith" userId="edaa0afb-4621-4165-af1d-05ed505f7999" providerId="ADAL" clId="{10F9F129-592B-40F1-997D-F487E669D3CB}" dt="2022-11-16T13:55:29.827" v="89" actId="1076"/>
-          <ac:spMkLst>
-            <pc:docMk/>
-            <pc:sldMk cId="3731856780" sldId="364"/>
-            <ac:spMk id="6" creationId="{4EBC1484-9C76-4B83-AA51-376AB66F6091}"/>
-          </ac:spMkLst>
-        </pc:spChg>
-        <pc:spChg chg="mod">
-          <ac:chgData name="Sana Belguith" userId="edaa0afb-4621-4165-af1d-05ed505f7999" providerId="ADAL" clId="{10F9F129-592B-40F1-997D-F487E669D3CB}" dt="2022-11-16T13:55:29.827" v="89" actId="1076"/>
-          <ac:spMkLst>
-            <pc:docMk/>
-            <pc:sldMk cId="3731856780" sldId="364"/>
-            <ac:spMk id="7" creationId="{D240B57A-F727-490A-982C-584D18819401}"/>
-          </ac:spMkLst>
-        </pc:spChg>
-        <pc:spChg chg="mod">
-          <ac:chgData name="Sana Belguith" userId="edaa0afb-4621-4165-af1d-05ed505f7999" providerId="ADAL" clId="{10F9F129-592B-40F1-997D-F487E669D3CB}" dt="2022-11-16T13:55:29.827" v="89" actId="1076"/>
-          <ac:spMkLst>
-            <pc:docMk/>
-            <pc:sldMk cId="3731856780" sldId="364"/>
-            <ac:spMk id="9" creationId="{1C11EA2B-932F-4C85-8C6B-6C165F4EBC38}"/>
-          </ac:spMkLst>
-        </pc:spChg>
-        <pc:spChg chg="mod">
-          <ac:chgData name="Sana Belguith" userId="edaa0afb-4621-4165-af1d-05ed505f7999" providerId="ADAL" clId="{10F9F129-592B-40F1-997D-F487E669D3CB}" dt="2022-11-16T13:55:29.827" v="89" actId="1076"/>
-          <ac:spMkLst>
-            <pc:docMk/>
-            <pc:sldMk cId="3731856780" sldId="364"/>
-            <ac:spMk id="11" creationId="{636BA0E7-897C-4E2D-8118-2A2335CD0867}"/>
-          </ac:spMkLst>
-        </pc:spChg>
-        <pc:spChg chg="mod">
-          <ac:chgData name="Sana Belguith" userId="edaa0afb-4621-4165-af1d-05ed505f7999" providerId="ADAL" clId="{10F9F129-592B-40F1-997D-F487E669D3CB}" dt="2022-11-16T13:55:29.827" v="89" actId="1076"/>
-          <ac:spMkLst>
-            <pc:docMk/>
-            <pc:sldMk cId="3731856780" sldId="364"/>
-            <ac:spMk id="13" creationId="{8F9792B0-CBD7-49BC-A4AB-8524D4D237AF}"/>
-          </ac:spMkLst>
-        </pc:spChg>
-        <pc:spChg chg="mod">
-          <ac:chgData name="Sana Belguith" userId="edaa0afb-4621-4165-af1d-05ed505f7999" providerId="ADAL" clId="{10F9F129-592B-40F1-997D-F487E669D3CB}" dt="2022-11-16T13:55:29.827" v="89" actId="1076"/>
-          <ac:spMkLst>
-            <pc:docMk/>
-            <pc:sldMk cId="3731856780" sldId="364"/>
-            <ac:spMk id="15" creationId="{5D56CF06-0B53-4B01-9F90-F427A51C5EED}"/>
-          </ac:spMkLst>
-        </pc:spChg>
-        <pc:spChg chg="mod">
-          <ac:chgData name="Sana Belguith" userId="edaa0afb-4621-4165-af1d-05ed505f7999" providerId="ADAL" clId="{10F9F129-592B-40F1-997D-F487E669D3CB}" dt="2022-11-16T13:55:29.827" v="89" actId="1076"/>
-          <ac:spMkLst>
-            <pc:docMk/>
-            <pc:sldMk cId="3731856780" sldId="364"/>
-            <ac:spMk id="21" creationId="{64BC8608-ABD5-436C-A3F9-18BD6B472F03}"/>
-          </ac:spMkLst>
-        </pc:spChg>
-        <pc:spChg chg="mod">
-          <ac:chgData name="Sana Belguith" userId="edaa0afb-4621-4165-af1d-05ed505f7999" providerId="ADAL" clId="{10F9F129-592B-40F1-997D-F487E669D3CB}" dt="2022-11-16T13:55:29.827" v="89" actId="1076"/>
-          <ac:spMkLst>
-            <pc:docMk/>
-            <pc:sldMk cId="3731856780" sldId="364"/>
-            <ac:spMk id="22" creationId="{7927A76B-21E6-44B0-B4CE-E516A8092A49}"/>
-          </ac:spMkLst>
-        </pc:spChg>
-        <pc:spChg chg="mod">
-          <ac:chgData name="Sana Belguith" userId="edaa0afb-4621-4165-af1d-05ed505f7999" providerId="ADAL" clId="{10F9F129-592B-40F1-997D-F487E669D3CB}" dt="2022-11-16T13:55:29.827" v="89" actId="1076"/>
-          <ac:spMkLst>
-            <pc:docMk/>
-            <pc:sldMk cId="3731856780" sldId="364"/>
-            <ac:spMk id="24" creationId="{EC2C9702-1F04-4CC4-9884-F7BFF1C7AB52}"/>
-          </ac:spMkLst>
-        </pc:spChg>
-        <pc:spChg chg="mod">
-          <ac:chgData name="Sana Belguith" userId="edaa0afb-4621-4165-af1d-05ed505f7999" providerId="ADAL" clId="{10F9F129-592B-40F1-997D-F487E669D3CB}" dt="2022-11-16T13:55:33.976" v="91" actId="1076"/>
-          <ac:spMkLst>
-            <pc:docMk/>
-            <pc:sldMk cId="3731856780" sldId="364"/>
-            <ac:spMk id="25" creationId="{1DE02984-8790-4E75-85B9-7117F59797B7}"/>
-          </ac:spMkLst>
-        </pc:spChg>
       </pc:sldChg>
       <pc:sldChg chg="modSp add del mod">
         <pc:chgData name="Sana Belguith" userId="edaa0afb-4621-4165-af1d-05ed505f7999" providerId="ADAL" clId="{10F9F129-592B-40F1-997D-F487E669D3CB}" dt="2022-11-17T10:20:14.979" v="490" actId="47"/>
@@ -2395,38 +746,6 @@
           <pc:docMk/>
           <pc:sldMk cId="3836569670" sldId="365"/>
         </pc:sldMkLst>
-        <pc:spChg chg="mod">
-          <ac:chgData name="Sana Belguith" userId="edaa0afb-4621-4165-af1d-05ed505f7999" providerId="ADAL" clId="{10F9F129-592B-40F1-997D-F487E669D3CB}" dt="2022-11-16T13:52:10.771" v="39" actId="108"/>
-          <ac:spMkLst>
-            <pc:docMk/>
-            <pc:sldMk cId="3836569670" sldId="365"/>
-            <ac:spMk id="2" creationId="{E6E542B4-E4E1-4DA0-A326-3413F289F42C}"/>
-          </ac:spMkLst>
-        </pc:spChg>
-        <pc:spChg chg="mod">
-          <ac:chgData name="Sana Belguith" userId="edaa0afb-4621-4165-af1d-05ed505f7999" providerId="ADAL" clId="{10F9F129-592B-40F1-997D-F487E669D3CB}" dt="2022-11-16T13:51:26.381" v="31" actId="404"/>
-          <ac:spMkLst>
-            <pc:docMk/>
-            <pc:sldMk cId="3836569670" sldId="365"/>
-            <ac:spMk id="5" creationId="{68AF798E-A925-499C-A6D7-56B92C949B2A}"/>
-          </ac:spMkLst>
-        </pc:spChg>
-        <pc:spChg chg="mod">
-          <ac:chgData name="Sana Belguith" userId="edaa0afb-4621-4165-af1d-05ed505f7999" providerId="ADAL" clId="{10F9F129-592B-40F1-997D-F487E669D3CB}" dt="2022-11-16T13:51:34.706" v="33" actId="404"/>
-          <ac:spMkLst>
-            <pc:docMk/>
-            <pc:sldMk cId="3836569670" sldId="365"/>
-            <ac:spMk id="9" creationId="{1C11EA2B-932F-4C85-8C6B-6C165F4EBC38}"/>
-          </ac:spMkLst>
-        </pc:spChg>
-        <pc:spChg chg="mod">
-          <ac:chgData name="Sana Belguith" userId="edaa0afb-4621-4165-af1d-05ed505f7999" providerId="ADAL" clId="{10F9F129-592B-40F1-997D-F487E669D3CB}" dt="2022-11-16T13:51:32.349" v="32" actId="404"/>
-          <ac:spMkLst>
-            <pc:docMk/>
-            <pc:sldMk cId="3836569670" sldId="365"/>
-            <ac:spMk id="21" creationId="{64BC8608-ABD5-436C-A3F9-18BD6B472F03}"/>
-          </ac:spMkLst>
-        </pc:spChg>
       </pc:sldChg>
       <pc:sldChg chg="modSp add del mod">
         <pc:chgData name="Sana Belguith" userId="edaa0afb-4621-4165-af1d-05ed505f7999" providerId="ADAL" clId="{10F9F129-592B-40F1-997D-F487E669D3CB}" dt="2022-11-17T10:20:14.979" v="490" actId="47"/>
@@ -2434,86 +753,6 @@
           <pc:docMk/>
           <pc:sldMk cId="1722304630" sldId="366"/>
         </pc:sldMkLst>
-        <pc:spChg chg="mod">
-          <ac:chgData name="Sana Belguith" userId="edaa0afb-4621-4165-af1d-05ed505f7999" providerId="ADAL" clId="{10F9F129-592B-40F1-997D-F487E669D3CB}" dt="2022-11-16T13:52:27.905" v="45" actId="1076"/>
-          <ac:spMkLst>
-            <pc:docMk/>
-            <pc:sldMk cId="1722304630" sldId="366"/>
-            <ac:spMk id="2" creationId="{E6E542B4-E4E1-4DA0-A326-3413F289F42C}"/>
-          </ac:spMkLst>
-        </pc:spChg>
-        <pc:spChg chg="mod">
-          <ac:chgData name="Sana Belguith" userId="edaa0afb-4621-4165-af1d-05ed505f7999" providerId="ADAL" clId="{10F9F129-592B-40F1-997D-F487E669D3CB}" dt="2022-11-16T13:53:19.521" v="58" actId="1076"/>
-          <ac:spMkLst>
-            <pc:docMk/>
-            <pc:sldMk cId="1722304630" sldId="366"/>
-            <ac:spMk id="3" creationId="{8D3C4915-F3F9-46CC-936B-70A8065564CD}"/>
-          </ac:spMkLst>
-        </pc:spChg>
-        <pc:spChg chg="mod">
-          <ac:chgData name="Sana Belguith" userId="edaa0afb-4621-4165-af1d-05ed505f7999" providerId="ADAL" clId="{10F9F129-592B-40F1-997D-F487E669D3CB}" dt="2022-11-16T13:53:21.072" v="59" actId="1076"/>
-          <ac:spMkLst>
-            <pc:docMk/>
-            <pc:sldMk cId="1722304630" sldId="366"/>
-            <ac:spMk id="4" creationId="{620606CF-5624-4A50-AAA2-7E8D902974AE}"/>
-          </ac:spMkLst>
-        </pc:spChg>
-        <pc:spChg chg="mod">
-          <ac:chgData name="Sana Belguith" userId="edaa0afb-4621-4165-af1d-05ed505f7999" providerId="ADAL" clId="{10F9F129-592B-40F1-997D-F487E669D3CB}" dt="2022-11-16T13:53:05.580" v="54" actId="404"/>
-          <ac:spMkLst>
-            <pc:docMk/>
-            <pc:sldMk cId="1722304630" sldId="366"/>
-            <ac:spMk id="5" creationId="{68AF798E-A925-499C-A6D7-56B92C949B2A}"/>
-          </ac:spMkLst>
-        </pc:spChg>
-        <pc:spChg chg="mod">
-          <ac:chgData name="Sana Belguith" userId="edaa0afb-4621-4165-af1d-05ed505f7999" providerId="ADAL" clId="{10F9F129-592B-40F1-997D-F487E669D3CB}" dt="2022-11-16T13:51:52.138" v="34" actId="1076"/>
-          <ac:spMkLst>
-            <pc:docMk/>
-            <pc:sldMk cId="1722304630" sldId="366"/>
-            <ac:spMk id="6" creationId="{4EBC1484-9C76-4B83-AA51-376AB66F6091}"/>
-          </ac:spMkLst>
-        </pc:spChg>
-        <pc:spChg chg="mod">
-          <ac:chgData name="Sana Belguith" userId="edaa0afb-4621-4165-af1d-05ed505f7999" providerId="ADAL" clId="{10F9F129-592B-40F1-997D-F487E669D3CB}" dt="2022-11-16T13:52:51.768" v="51" actId="1076"/>
-          <ac:spMkLst>
-            <pc:docMk/>
-            <pc:sldMk cId="1722304630" sldId="366"/>
-            <ac:spMk id="7" creationId="{D240B57A-F727-490A-982C-584D18819401}"/>
-          </ac:spMkLst>
-        </pc:spChg>
-        <pc:spChg chg="mod">
-          <ac:chgData name="Sana Belguith" userId="edaa0afb-4621-4165-af1d-05ed505f7999" providerId="ADAL" clId="{10F9F129-592B-40F1-997D-F487E669D3CB}" dt="2022-11-16T13:53:07.476" v="55" actId="404"/>
-          <ac:spMkLst>
-            <pc:docMk/>
-            <pc:sldMk cId="1722304630" sldId="366"/>
-            <ac:spMk id="9" creationId="{1C11EA2B-932F-4C85-8C6B-6C165F4EBC38}"/>
-          </ac:spMkLst>
-        </pc:spChg>
-        <pc:spChg chg="mod">
-          <ac:chgData name="Sana Belguith" userId="edaa0afb-4621-4165-af1d-05ed505f7999" providerId="ADAL" clId="{10F9F129-592B-40F1-997D-F487E669D3CB}" dt="2022-11-16T13:51:52.138" v="34" actId="1076"/>
-          <ac:spMkLst>
-            <pc:docMk/>
-            <pc:sldMk cId="1722304630" sldId="366"/>
-            <ac:spMk id="11" creationId="{636BA0E7-897C-4E2D-8118-2A2335CD0867}"/>
-          </ac:spMkLst>
-        </pc:spChg>
-        <pc:spChg chg="mod">
-          <ac:chgData name="Sana Belguith" userId="edaa0afb-4621-4165-af1d-05ed505f7999" providerId="ADAL" clId="{10F9F129-592B-40F1-997D-F487E669D3CB}" dt="2022-11-16T13:52:49.577" v="50" actId="1076"/>
-          <ac:spMkLst>
-            <pc:docMk/>
-            <pc:sldMk cId="1722304630" sldId="366"/>
-            <ac:spMk id="13" creationId="{8F9792B0-CBD7-49BC-A4AB-8524D4D237AF}"/>
-          </ac:spMkLst>
-        </pc:spChg>
-        <pc:spChg chg="mod">
-          <ac:chgData name="Sana Belguith" userId="edaa0afb-4621-4165-af1d-05ed505f7999" providerId="ADAL" clId="{10F9F129-592B-40F1-997D-F487E669D3CB}" dt="2022-11-16T13:53:16.292" v="57" actId="404"/>
-          <ac:spMkLst>
-            <pc:docMk/>
-            <pc:sldMk cId="1722304630" sldId="366"/>
-            <ac:spMk id="21" creationId="{64BC8608-ABD5-436C-A3F9-18BD6B472F03}"/>
-          </ac:spMkLst>
-        </pc:spChg>
       </pc:sldChg>
       <pc:sldChg chg="addSp delSp modSp add mod">
         <pc:chgData name="Sana Belguith" userId="edaa0afb-4621-4165-af1d-05ed505f7999" providerId="ADAL" clId="{10F9F129-592B-40F1-997D-F487E669D3CB}" dt="2022-11-17T10:19:59.737" v="489" actId="1076"/>
@@ -2521,118 +760,6 @@
           <pc:docMk/>
           <pc:sldMk cId="2028455272" sldId="367"/>
         </pc:sldMkLst>
-        <pc:spChg chg="del">
-          <ac:chgData name="Sana Belguith" userId="edaa0afb-4621-4165-af1d-05ed505f7999" providerId="ADAL" clId="{10F9F129-592B-40F1-997D-F487E669D3CB}" dt="2022-11-16T13:53:28.102" v="60" actId="478"/>
-          <ac:spMkLst>
-            <pc:docMk/>
-            <pc:sldMk cId="2028455272" sldId="367"/>
-            <ac:spMk id="2" creationId="{E6E542B4-E4E1-4DA0-A326-3413F289F42C}"/>
-          </ac:spMkLst>
-        </pc:spChg>
-        <pc:spChg chg="add del mod">
-          <ac:chgData name="Sana Belguith" userId="edaa0afb-4621-4165-af1d-05ed505f7999" providerId="ADAL" clId="{10F9F129-592B-40F1-997D-F487E669D3CB}" dt="2022-11-16T13:53:31.337" v="61" actId="478"/>
-          <ac:spMkLst>
-            <pc:docMk/>
-            <pc:sldMk cId="2028455272" sldId="367"/>
-            <ac:spMk id="4" creationId="{399D4CA7-E3BB-73E8-069E-921FEE05EC8F}"/>
-          </ac:spMkLst>
-        </pc:spChg>
-        <pc:spChg chg="mod">
-          <ac:chgData name="Sana Belguith" userId="edaa0afb-4621-4165-af1d-05ed505f7999" providerId="ADAL" clId="{10F9F129-592B-40F1-997D-F487E669D3CB}" dt="2022-11-17T10:19:52.780" v="487" actId="1037"/>
-          <ac:spMkLst>
-            <pc:docMk/>
-            <pc:sldMk cId="2028455272" sldId="367"/>
-            <ac:spMk id="5" creationId="{68AF798E-A925-499C-A6D7-56B92C949B2A}"/>
-          </ac:spMkLst>
-        </pc:spChg>
-        <pc:spChg chg="mod">
-          <ac:chgData name="Sana Belguith" userId="edaa0afb-4621-4165-af1d-05ed505f7999" providerId="ADAL" clId="{10F9F129-592B-40F1-997D-F487E669D3CB}" dt="2022-11-17T10:19:52.780" v="487" actId="1037"/>
-          <ac:spMkLst>
-            <pc:docMk/>
-            <pc:sldMk cId="2028455272" sldId="367"/>
-            <ac:spMk id="6" creationId="{4EBC1484-9C76-4B83-AA51-376AB66F6091}"/>
-          </ac:spMkLst>
-        </pc:spChg>
-        <pc:spChg chg="mod">
-          <ac:chgData name="Sana Belguith" userId="edaa0afb-4621-4165-af1d-05ed505f7999" providerId="ADAL" clId="{10F9F129-592B-40F1-997D-F487E669D3CB}" dt="2022-11-17T10:19:52.780" v="487" actId="1037"/>
-          <ac:spMkLst>
-            <pc:docMk/>
-            <pc:sldMk cId="2028455272" sldId="367"/>
-            <ac:spMk id="7" creationId="{D240B57A-F727-490A-982C-584D18819401}"/>
-          </ac:spMkLst>
-        </pc:spChg>
-        <pc:spChg chg="add mod">
-          <ac:chgData name="Sana Belguith" userId="edaa0afb-4621-4165-af1d-05ed505f7999" providerId="ADAL" clId="{10F9F129-592B-40F1-997D-F487E669D3CB}" dt="2022-11-16T13:53:31.783" v="62"/>
-          <ac:spMkLst>
-            <pc:docMk/>
-            <pc:sldMk cId="2028455272" sldId="367"/>
-            <ac:spMk id="8" creationId="{82E30976-63E9-F2F7-8D64-D82FCAC6F9C2}"/>
-          </ac:spMkLst>
-        </pc:spChg>
-        <pc:spChg chg="mod">
-          <ac:chgData name="Sana Belguith" userId="edaa0afb-4621-4165-af1d-05ed505f7999" providerId="ADAL" clId="{10F9F129-592B-40F1-997D-F487E669D3CB}" dt="2022-11-17T10:19:52.780" v="487" actId="1037"/>
-          <ac:spMkLst>
-            <pc:docMk/>
-            <pc:sldMk cId="2028455272" sldId="367"/>
-            <ac:spMk id="9" creationId="{1C11EA2B-932F-4C85-8C6B-6C165F4EBC38}"/>
-          </ac:spMkLst>
-        </pc:spChg>
-        <pc:spChg chg="add mod">
-          <ac:chgData name="Sana Belguith" userId="edaa0afb-4621-4165-af1d-05ed505f7999" providerId="ADAL" clId="{10F9F129-592B-40F1-997D-F487E669D3CB}" dt="2022-11-17T10:19:59.737" v="489" actId="1076"/>
-          <ac:spMkLst>
-            <pc:docMk/>
-            <pc:sldMk cId="2028455272" sldId="367"/>
-            <ac:spMk id="10" creationId="{99D5E5FC-D3EA-4A2F-9D41-88B0E4A23508}"/>
-          </ac:spMkLst>
-        </pc:spChg>
-        <pc:spChg chg="mod">
-          <ac:chgData name="Sana Belguith" userId="edaa0afb-4621-4165-af1d-05ed505f7999" providerId="ADAL" clId="{10F9F129-592B-40F1-997D-F487E669D3CB}" dt="2022-11-17T10:19:52.780" v="487" actId="1037"/>
-          <ac:spMkLst>
-            <pc:docMk/>
-            <pc:sldMk cId="2028455272" sldId="367"/>
-            <ac:spMk id="11" creationId="{636BA0E7-897C-4E2D-8118-2A2335CD0867}"/>
-          </ac:spMkLst>
-        </pc:spChg>
-        <pc:spChg chg="add mod">
-          <ac:chgData name="Sana Belguith" userId="edaa0afb-4621-4165-af1d-05ed505f7999" providerId="ADAL" clId="{10F9F129-592B-40F1-997D-F487E669D3CB}" dt="2022-11-17T10:19:42.388" v="461"/>
-          <ac:spMkLst>
-            <pc:docMk/>
-            <pc:sldMk cId="2028455272" sldId="367"/>
-            <ac:spMk id="12" creationId="{9D95B369-38C4-734C-7E6D-59D623770D31}"/>
-          </ac:spMkLst>
-        </pc:spChg>
-        <pc:spChg chg="mod">
-          <ac:chgData name="Sana Belguith" userId="edaa0afb-4621-4165-af1d-05ed505f7999" providerId="ADAL" clId="{10F9F129-592B-40F1-997D-F487E669D3CB}" dt="2022-11-17T10:19:52.780" v="487" actId="1037"/>
-          <ac:spMkLst>
-            <pc:docMk/>
-            <pc:sldMk cId="2028455272" sldId="367"/>
-            <ac:spMk id="13" creationId="{8F9792B0-CBD7-49BC-A4AB-8524D4D237AF}"/>
-          </ac:spMkLst>
-        </pc:spChg>
-        <pc:spChg chg="mod">
-          <ac:chgData name="Sana Belguith" userId="edaa0afb-4621-4165-af1d-05ed505f7999" providerId="ADAL" clId="{10F9F129-592B-40F1-997D-F487E669D3CB}" dt="2022-11-17T10:19:52.780" v="487" actId="1037"/>
-          <ac:spMkLst>
-            <pc:docMk/>
-            <pc:sldMk cId="2028455272" sldId="367"/>
-            <ac:spMk id="21" creationId="{64BC8608-ABD5-436C-A3F9-18BD6B472F03}"/>
-          </ac:spMkLst>
-        </pc:spChg>
-        <pc:spChg chg="mod">
-          <ac:chgData name="Sana Belguith" userId="edaa0afb-4621-4165-af1d-05ed505f7999" providerId="ADAL" clId="{10F9F129-592B-40F1-997D-F487E669D3CB}" dt="2022-11-17T10:19:57.762" v="488" actId="1076"/>
-          <ac:spMkLst>
-            <pc:docMk/>
-            <pc:sldMk cId="2028455272" sldId="367"/>
-            <ac:spMk id="22" creationId="{7927A76B-21E6-44B0-B4CE-E516A8092A49}"/>
-          </ac:spMkLst>
-        </pc:spChg>
-        <pc:spChg chg="mod">
-          <ac:chgData name="Sana Belguith" userId="edaa0afb-4621-4165-af1d-05ed505f7999" providerId="ADAL" clId="{10F9F129-592B-40F1-997D-F487E669D3CB}" dt="2022-11-17T10:19:52.780" v="487" actId="1037"/>
-          <ac:spMkLst>
-            <pc:docMk/>
-            <pc:sldMk cId="2028455272" sldId="367"/>
-            <ac:spMk id="24" creationId="{EC2C9702-1F04-4CC4-9884-F7BFF1C7AB52}"/>
-          </ac:spMkLst>
-        </pc:spChg>
       </pc:sldChg>
       <pc:sldChg chg="modSp add mod">
         <pc:chgData name="Sana Belguith" userId="edaa0afb-4621-4165-af1d-05ed505f7999" providerId="ADAL" clId="{10F9F129-592B-40F1-997D-F487E669D3CB}" dt="2022-11-16T13:57:04.649" v="112" actId="14100"/>
@@ -2640,78 +767,6 @@
           <pc:docMk/>
           <pc:sldMk cId="941356834" sldId="368"/>
         </pc:sldMkLst>
-        <pc:spChg chg="mod">
-          <ac:chgData name="Sana Belguith" userId="edaa0afb-4621-4165-af1d-05ed505f7999" providerId="ADAL" clId="{10F9F129-592B-40F1-997D-F487E669D3CB}" dt="2022-11-16T13:56:05.314" v="96" actId="1076"/>
-          <ac:spMkLst>
-            <pc:docMk/>
-            <pc:sldMk cId="941356834" sldId="368"/>
-            <ac:spMk id="2" creationId="{E6E542B4-E4E1-4DA0-A326-3413F289F42C}"/>
-          </ac:spMkLst>
-        </pc:spChg>
-        <pc:spChg chg="mod">
-          <ac:chgData name="Sana Belguith" userId="edaa0afb-4621-4165-af1d-05ed505f7999" providerId="ADAL" clId="{10F9F129-592B-40F1-997D-F487E669D3CB}" dt="2022-11-16T13:56:49.305" v="108" actId="1076"/>
-          <ac:spMkLst>
-            <pc:docMk/>
-            <pc:sldMk cId="941356834" sldId="368"/>
-            <ac:spMk id="3" creationId="{ACC2724E-AB55-4967-843D-C38966AB58A1}"/>
-          </ac:spMkLst>
-        </pc:spChg>
-        <pc:spChg chg="mod">
-          <ac:chgData name="Sana Belguith" userId="edaa0afb-4621-4165-af1d-05ed505f7999" providerId="ADAL" clId="{10F9F129-592B-40F1-997D-F487E669D3CB}" dt="2022-11-16T13:57:02.592" v="111" actId="14100"/>
-          <ac:spMkLst>
-            <pc:docMk/>
-            <pc:sldMk cId="941356834" sldId="368"/>
-            <ac:spMk id="5" creationId="{68AF798E-A925-499C-A6D7-56B92C949B2A}"/>
-          </ac:spMkLst>
-        </pc:spChg>
-        <pc:spChg chg="mod">
-          <ac:chgData name="Sana Belguith" userId="edaa0afb-4621-4165-af1d-05ed505f7999" providerId="ADAL" clId="{10F9F129-592B-40F1-997D-F487E669D3CB}" dt="2022-11-16T13:56:23.434" v="101" actId="404"/>
-          <ac:spMkLst>
-            <pc:docMk/>
-            <pc:sldMk cId="941356834" sldId="368"/>
-            <ac:spMk id="7" creationId="{D240B57A-F727-490A-982C-584D18819401}"/>
-          </ac:spMkLst>
-        </pc:spChg>
-        <pc:spChg chg="mod">
-          <ac:chgData name="Sana Belguith" userId="edaa0afb-4621-4165-af1d-05ed505f7999" providerId="ADAL" clId="{10F9F129-592B-40F1-997D-F487E669D3CB}" dt="2022-11-16T13:56:42.305" v="107" actId="14100"/>
-          <ac:spMkLst>
-            <pc:docMk/>
-            <pc:sldMk cId="941356834" sldId="368"/>
-            <ac:spMk id="9" creationId="{1C11EA2B-932F-4C85-8C6B-6C165F4EBC38}"/>
-          </ac:spMkLst>
-        </pc:spChg>
-        <pc:spChg chg="mod">
-          <ac:chgData name="Sana Belguith" userId="edaa0afb-4621-4165-af1d-05ed505f7999" providerId="ADAL" clId="{10F9F129-592B-40F1-997D-F487E669D3CB}" dt="2022-11-16T13:56:40.177" v="106" actId="1076"/>
-          <ac:spMkLst>
-            <pc:docMk/>
-            <pc:sldMk cId="941356834" sldId="368"/>
-            <ac:spMk id="10" creationId="{E706CB39-8D33-4986-BA8D-9241B8E8ECB5}"/>
-          </ac:spMkLst>
-        </pc:spChg>
-        <pc:spChg chg="mod">
-          <ac:chgData name="Sana Belguith" userId="edaa0afb-4621-4165-af1d-05ed505f7999" providerId="ADAL" clId="{10F9F129-592B-40F1-997D-F487E669D3CB}" dt="2022-11-16T13:56:27.545" v="103" actId="1076"/>
-          <ac:spMkLst>
-            <pc:docMk/>
-            <pc:sldMk cId="941356834" sldId="368"/>
-            <ac:spMk id="13" creationId="{8F9792B0-CBD7-49BC-A4AB-8524D4D237AF}"/>
-          </ac:spMkLst>
-        </pc:spChg>
-        <pc:spChg chg="mod">
-          <ac:chgData name="Sana Belguith" userId="edaa0afb-4621-4165-af1d-05ed505f7999" providerId="ADAL" clId="{10F9F129-592B-40F1-997D-F487E669D3CB}" dt="2022-11-16T13:57:04.649" v="112" actId="14100"/>
-          <ac:spMkLst>
-            <pc:docMk/>
-            <pc:sldMk cId="941356834" sldId="368"/>
-            <ac:spMk id="21" creationId="{64BC8608-ABD5-436C-A3F9-18BD6B472F03}"/>
-          </ac:spMkLst>
-        </pc:spChg>
-        <pc:picChg chg="mod">
-          <ac:chgData name="Sana Belguith" userId="edaa0afb-4621-4165-af1d-05ed505f7999" providerId="ADAL" clId="{10F9F129-592B-40F1-997D-F487E669D3CB}" dt="2022-11-16T13:56:51.433" v="109" actId="1076"/>
-          <ac:picMkLst>
-            <pc:docMk/>
-            <pc:sldMk cId="941356834" sldId="368"/>
-            <ac:picMk id="8" creationId="{DAE2C522-F582-413D-8575-6A42BEF9B94F}"/>
-          </ac:picMkLst>
-        </pc:picChg>
       </pc:sldChg>
       <pc:sldChg chg="modSp add mod">
         <pc:chgData name="Sana Belguith" userId="edaa0afb-4621-4165-af1d-05ed505f7999" providerId="ADAL" clId="{10F9F129-592B-40F1-997D-F487E669D3CB}" dt="2022-11-16T13:52:15.877" v="42" actId="403"/>
@@ -2719,14 +774,6 @@
           <pc:docMk/>
           <pc:sldMk cId="706578797" sldId="369"/>
         </pc:sldMkLst>
-        <pc:spChg chg="mod">
-          <ac:chgData name="Sana Belguith" userId="edaa0afb-4621-4165-af1d-05ed505f7999" providerId="ADAL" clId="{10F9F129-592B-40F1-997D-F487E669D3CB}" dt="2022-11-16T13:52:15.877" v="42" actId="403"/>
-          <ac:spMkLst>
-            <pc:docMk/>
-            <pc:sldMk cId="706578797" sldId="369"/>
-            <ac:spMk id="4" creationId="{9C4192DB-8FDD-4EB1-A0E8-2F990B4436D7}"/>
-          </ac:spMkLst>
-        </pc:spChg>
       </pc:sldChg>
       <pc:sldChg chg="modSp add del mod">
         <pc:chgData name="Sana Belguith" userId="edaa0afb-4621-4165-af1d-05ed505f7999" providerId="ADAL" clId="{10F9F129-592B-40F1-997D-F487E669D3CB}" dt="2022-11-17T10:20:31.236" v="491" actId="47"/>
@@ -2734,70 +781,6 @@
           <pc:docMk/>
           <pc:sldMk cId="3170944832" sldId="370"/>
         </pc:sldMkLst>
-        <pc:spChg chg="mod">
-          <ac:chgData name="Sana Belguith" userId="edaa0afb-4621-4165-af1d-05ed505f7999" providerId="ADAL" clId="{10F9F129-592B-40F1-997D-F487E669D3CB}" dt="2022-11-16T13:57:20.121" v="115" actId="1076"/>
-          <ac:spMkLst>
-            <pc:docMk/>
-            <pc:sldMk cId="3170944832" sldId="370"/>
-            <ac:spMk id="2" creationId="{E6E542B4-E4E1-4DA0-A326-3413F289F42C}"/>
-          </ac:spMkLst>
-        </pc:spChg>
-        <pc:spChg chg="mod">
-          <ac:chgData name="Sana Belguith" userId="edaa0afb-4621-4165-af1d-05ed505f7999" providerId="ADAL" clId="{10F9F129-592B-40F1-997D-F487E669D3CB}" dt="2022-11-16T13:57:58.321" v="123" actId="1076"/>
-          <ac:spMkLst>
-            <pc:docMk/>
-            <pc:sldMk cId="3170944832" sldId="370"/>
-            <ac:spMk id="3" creationId="{ACC2724E-AB55-4967-843D-C38966AB58A1}"/>
-          </ac:spMkLst>
-        </pc:spChg>
-        <pc:spChg chg="mod">
-          <ac:chgData name="Sana Belguith" userId="edaa0afb-4621-4165-af1d-05ed505f7999" providerId="ADAL" clId="{10F9F129-592B-40F1-997D-F487E669D3CB}" dt="2022-11-16T13:57:52.505" v="121" actId="14100"/>
-          <ac:spMkLst>
-            <pc:docMk/>
-            <pc:sldMk cId="3170944832" sldId="370"/>
-            <ac:spMk id="5" creationId="{68AF798E-A925-499C-A6D7-56B92C949B2A}"/>
-          </ac:spMkLst>
-        </pc:spChg>
-        <pc:spChg chg="mod">
-          <ac:chgData name="Sana Belguith" userId="edaa0afb-4621-4165-af1d-05ed505f7999" providerId="ADAL" clId="{10F9F129-592B-40F1-997D-F487E669D3CB}" dt="2022-11-16T13:57:24.929" v="116" actId="108"/>
-          <ac:spMkLst>
-            <pc:docMk/>
-            <pc:sldMk cId="3170944832" sldId="370"/>
-            <ac:spMk id="7" creationId="{D240B57A-F727-490A-982C-584D18819401}"/>
-          </ac:spMkLst>
-        </pc:spChg>
-        <pc:spChg chg="mod">
-          <ac:chgData name="Sana Belguith" userId="edaa0afb-4621-4165-af1d-05ed505f7999" providerId="ADAL" clId="{10F9F129-592B-40F1-997D-F487E669D3CB}" dt="2022-11-16T13:57:55.057" v="122" actId="14100"/>
-          <ac:spMkLst>
-            <pc:docMk/>
-            <pc:sldMk cId="3170944832" sldId="370"/>
-            <ac:spMk id="9" creationId="{1C11EA2B-932F-4C85-8C6B-6C165F4EBC38}"/>
-          </ac:spMkLst>
-        </pc:spChg>
-        <pc:spChg chg="mod">
-          <ac:chgData name="Sana Belguith" userId="edaa0afb-4621-4165-af1d-05ed505f7999" providerId="ADAL" clId="{10F9F129-592B-40F1-997D-F487E669D3CB}" dt="2022-11-16T13:57:27.021" v="117" actId="108"/>
-          <ac:spMkLst>
-            <pc:docMk/>
-            <pc:sldMk cId="3170944832" sldId="370"/>
-            <ac:spMk id="13" creationId="{8F9792B0-CBD7-49BC-A4AB-8524D4D237AF}"/>
-          </ac:spMkLst>
-        </pc:spChg>
-        <pc:spChg chg="mod">
-          <ac:chgData name="Sana Belguith" userId="edaa0afb-4621-4165-af1d-05ed505f7999" providerId="ADAL" clId="{10F9F129-592B-40F1-997D-F487E669D3CB}" dt="2022-11-16T13:58:02.249" v="125" actId="14100"/>
-          <ac:spMkLst>
-            <pc:docMk/>
-            <pc:sldMk cId="3170944832" sldId="370"/>
-            <ac:spMk id="21" creationId="{64BC8608-ABD5-436C-A3F9-18BD6B472F03}"/>
-          </ac:spMkLst>
-        </pc:spChg>
-        <pc:picChg chg="mod">
-          <ac:chgData name="Sana Belguith" userId="edaa0afb-4621-4165-af1d-05ed505f7999" providerId="ADAL" clId="{10F9F129-592B-40F1-997D-F487E669D3CB}" dt="2022-11-16T13:58:00.249" v="124" actId="1076"/>
-          <ac:picMkLst>
-            <pc:docMk/>
-            <pc:sldMk cId="3170944832" sldId="370"/>
-            <ac:picMk id="8" creationId="{DAE2C522-F582-413D-8575-6A42BEF9B94F}"/>
-          </ac:picMkLst>
-        </pc:picChg>
       </pc:sldChg>
       <pc:sldChg chg="addSp delSp modSp add mod">
         <pc:chgData name="Sana Belguith" userId="edaa0afb-4621-4165-af1d-05ed505f7999" providerId="ADAL" clId="{10F9F129-592B-40F1-997D-F487E669D3CB}" dt="2022-11-16T13:59:30.272" v="144"/>
@@ -2805,110 +788,6 @@
           <pc:docMk/>
           <pc:sldMk cId="1381126486" sldId="371"/>
         </pc:sldMkLst>
-        <pc:spChg chg="del">
-          <ac:chgData name="Sana Belguith" userId="edaa0afb-4621-4165-af1d-05ed505f7999" providerId="ADAL" clId="{10F9F129-592B-40F1-997D-F487E669D3CB}" dt="2022-11-16T13:59:27.126" v="142" actId="478"/>
-          <ac:spMkLst>
-            <pc:docMk/>
-            <pc:sldMk cId="1381126486" sldId="371"/>
-            <ac:spMk id="2" creationId="{E6E542B4-E4E1-4DA0-A326-3413F289F42C}"/>
-          </ac:spMkLst>
-        </pc:spChg>
-        <pc:spChg chg="mod">
-          <ac:chgData name="Sana Belguith" userId="edaa0afb-4621-4165-af1d-05ed505f7999" providerId="ADAL" clId="{10F9F129-592B-40F1-997D-F487E669D3CB}" dt="2022-11-16T13:58:42.250" v="133" actId="1076"/>
-          <ac:spMkLst>
-            <pc:docMk/>
-            <pc:sldMk cId="1381126486" sldId="371"/>
-            <ac:spMk id="3" creationId="{ACC2724E-AB55-4967-843D-C38966AB58A1}"/>
-          </ac:spMkLst>
-        </pc:spChg>
-        <pc:spChg chg="mod">
-          <ac:chgData name="Sana Belguith" userId="edaa0afb-4621-4165-af1d-05ed505f7999" providerId="ADAL" clId="{10F9F129-592B-40F1-997D-F487E669D3CB}" dt="2022-11-16T13:59:01.560" v="140" actId="1076"/>
-          <ac:spMkLst>
-            <pc:docMk/>
-            <pc:sldMk cId="1381126486" sldId="371"/>
-            <ac:spMk id="4" creationId="{B93F47F3-21B0-43AF-9462-D4A80E463CA3}"/>
-          </ac:spMkLst>
-        </pc:spChg>
-        <pc:spChg chg="mod">
-          <ac:chgData name="Sana Belguith" userId="edaa0afb-4621-4165-af1d-05ed505f7999" providerId="ADAL" clId="{10F9F129-592B-40F1-997D-F487E669D3CB}" dt="2022-11-16T13:58:35.344" v="131" actId="14100"/>
-          <ac:spMkLst>
-            <pc:docMk/>
-            <pc:sldMk cId="1381126486" sldId="371"/>
-            <ac:spMk id="5" creationId="{68AF798E-A925-499C-A6D7-56B92C949B2A}"/>
-          </ac:spMkLst>
-        </pc:spChg>
-        <pc:spChg chg="mod">
-          <ac:chgData name="Sana Belguith" userId="edaa0afb-4621-4165-af1d-05ed505f7999" providerId="ADAL" clId="{10F9F129-592B-40F1-997D-F487E669D3CB}" dt="2022-11-16T13:58:19.800" v="126" actId="108"/>
-          <ac:spMkLst>
-            <pc:docMk/>
-            <pc:sldMk cId="1381126486" sldId="371"/>
-            <ac:spMk id="7" creationId="{D240B57A-F727-490A-982C-584D18819401}"/>
-          </ac:spMkLst>
-        </pc:spChg>
-        <pc:spChg chg="mod">
-          <ac:chgData name="Sana Belguith" userId="edaa0afb-4621-4165-af1d-05ed505f7999" providerId="ADAL" clId="{10F9F129-592B-40F1-997D-F487E669D3CB}" dt="2022-11-16T13:58:37.551" v="132" actId="14100"/>
-          <ac:spMkLst>
-            <pc:docMk/>
-            <pc:sldMk cId="1381126486" sldId="371"/>
-            <ac:spMk id="9" creationId="{1C11EA2B-932F-4C85-8C6B-6C165F4EBC38}"/>
-          </ac:spMkLst>
-        </pc:spChg>
-        <pc:spChg chg="mod">
-          <ac:chgData name="Sana Belguith" userId="edaa0afb-4621-4165-af1d-05ed505f7999" providerId="ADAL" clId="{10F9F129-592B-40F1-997D-F487E669D3CB}" dt="2022-11-16T13:58:21.846" v="127" actId="108"/>
-          <ac:spMkLst>
-            <pc:docMk/>
-            <pc:sldMk cId="1381126486" sldId="371"/>
-            <ac:spMk id="13" creationId="{8F9792B0-CBD7-49BC-A4AB-8524D4D237AF}"/>
-          </ac:spMkLst>
-        </pc:spChg>
-        <pc:spChg chg="mod">
-          <ac:chgData name="Sana Belguith" userId="edaa0afb-4621-4165-af1d-05ed505f7999" providerId="ADAL" clId="{10F9F129-592B-40F1-997D-F487E669D3CB}" dt="2022-11-16T13:59:03.881" v="141" actId="1076"/>
-          <ac:spMkLst>
-            <pc:docMk/>
-            <pc:sldMk cId="1381126486" sldId="371"/>
-            <ac:spMk id="14" creationId="{A394C116-D2F7-4495-B309-E8F1E90291C5}"/>
-          </ac:spMkLst>
-        </pc:spChg>
-        <pc:spChg chg="add del mod">
-          <ac:chgData name="Sana Belguith" userId="edaa0afb-4621-4165-af1d-05ed505f7999" providerId="ADAL" clId="{10F9F129-592B-40F1-997D-F487E669D3CB}" dt="2022-11-16T13:59:29.939" v="143" actId="478"/>
-          <ac:spMkLst>
-            <pc:docMk/>
-            <pc:sldMk cId="1381126486" sldId="371"/>
-            <ac:spMk id="16" creationId="{E2D12B0D-9CFB-E19E-5D92-CB6C64CC2374}"/>
-          </ac:spMkLst>
-        </pc:spChg>
-        <pc:spChg chg="add mod">
-          <ac:chgData name="Sana Belguith" userId="edaa0afb-4621-4165-af1d-05ed505f7999" providerId="ADAL" clId="{10F9F129-592B-40F1-997D-F487E669D3CB}" dt="2022-11-16T13:59:30.272" v="144"/>
-          <ac:spMkLst>
-            <pc:docMk/>
-            <pc:sldMk cId="1381126486" sldId="371"/>
-            <ac:spMk id="17" creationId="{0CEEA589-3421-E669-412C-2D79DACC0A1E}"/>
-          </ac:spMkLst>
-        </pc:spChg>
-        <pc:spChg chg="mod">
-          <ac:chgData name="Sana Belguith" userId="edaa0afb-4621-4165-af1d-05ed505f7999" providerId="ADAL" clId="{10F9F129-592B-40F1-997D-F487E669D3CB}" dt="2022-11-16T13:58:48.937" v="135" actId="14100"/>
-          <ac:spMkLst>
-            <pc:docMk/>
-            <pc:sldMk cId="1381126486" sldId="371"/>
-            <ac:spMk id="21" creationId="{64BC8608-ABD5-436C-A3F9-18BD6B472F03}"/>
-          </ac:spMkLst>
-        </pc:spChg>
-        <pc:picChg chg="mod">
-          <ac:chgData name="Sana Belguith" userId="edaa0afb-4621-4165-af1d-05ed505f7999" providerId="ADAL" clId="{10F9F129-592B-40F1-997D-F487E669D3CB}" dt="2022-11-16T13:58:44.641" v="134" actId="1076"/>
-          <ac:picMkLst>
-            <pc:docMk/>
-            <pc:sldMk cId="1381126486" sldId="371"/>
-            <ac:picMk id="8" creationId="{DAE2C522-F582-413D-8575-6A42BEF9B94F}"/>
-          </ac:picMkLst>
-        </pc:picChg>
-        <pc:cxnChg chg="mod">
-          <ac:chgData name="Sana Belguith" userId="edaa0afb-4621-4165-af1d-05ed505f7999" providerId="ADAL" clId="{10F9F129-592B-40F1-997D-F487E669D3CB}" dt="2022-11-16T13:58:56.928" v="137" actId="14100"/>
-          <ac:cxnSpMkLst>
-            <pc:docMk/>
-            <pc:sldMk cId="1381126486" sldId="371"/>
-            <ac:cxnSpMk id="12" creationId="{426A1100-E026-401A-A1E2-40AFCD1A6132}"/>
-          </ac:cxnSpMkLst>
-        </pc:cxnChg>
       </pc:sldChg>
       <pc:sldChg chg="addSp modSp add del mod">
         <pc:chgData name="Sana Belguith" userId="edaa0afb-4621-4165-af1d-05ed505f7999" providerId="ADAL" clId="{10F9F129-592B-40F1-997D-F487E669D3CB}" dt="2022-11-17T10:27:29.753" v="492" actId="47"/>
@@ -2916,30 +795,6 @@
           <pc:docMk/>
           <pc:sldMk cId="1085920982" sldId="372"/>
         </pc:sldMkLst>
-        <pc:spChg chg="add mod">
-          <ac:chgData name="Sana Belguith" userId="edaa0afb-4621-4165-af1d-05ed505f7999" providerId="ADAL" clId="{10F9F129-592B-40F1-997D-F487E669D3CB}" dt="2022-11-16T13:59:43.117" v="147"/>
-          <ac:spMkLst>
-            <pc:docMk/>
-            <pc:sldMk cId="1085920982" sldId="372"/>
-            <ac:spMk id="2" creationId="{3A22B234-F47F-D3BE-7C74-C18F2D29F3DA}"/>
-          </ac:spMkLst>
-        </pc:spChg>
-        <pc:spChg chg="mod">
-          <ac:chgData name="Sana Belguith" userId="edaa0afb-4621-4165-af1d-05ed505f7999" providerId="ADAL" clId="{10F9F129-592B-40F1-997D-F487E669D3CB}" dt="2022-11-16T14:06:16.475" v="247" actId="108"/>
-          <ac:spMkLst>
-            <pc:docMk/>
-            <pc:sldMk cId="1085920982" sldId="372"/>
-            <ac:spMk id="3" creationId="{18B0134F-16B6-4B45-AFC0-DCD2108EDCFD}"/>
-          </ac:spMkLst>
-        </pc:spChg>
-        <pc:spChg chg="mod">
-          <ac:chgData name="Sana Belguith" userId="edaa0afb-4621-4165-af1d-05ed505f7999" providerId="ADAL" clId="{10F9F129-592B-40F1-997D-F487E669D3CB}" dt="2022-11-16T14:00:02.480" v="153" actId="1076"/>
-          <ac:spMkLst>
-            <pc:docMk/>
-            <pc:sldMk cId="1085920982" sldId="372"/>
-            <ac:spMk id="4" creationId="{A9CC11E1-1242-4ED0-AE70-895DDCEF2414}"/>
-          </ac:spMkLst>
-        </pc:spChg>
       </pc:sldChg>
       <pc:sldChg chg="addSp delSp modSp add mod">
         <pc:chgData name="Sana Belguith" userId="edaa0afb-4621-4165-af1d-05ed505f7999" providerId="ADAL" clId="{10F9F129-592B-40F1-997D-F487E669D3CB}" dt="2022-11-16T14:01:15.696" v="172" actId="108"/>
@@ -2947,118 +802,6 @@
           <pc:docMk/>
           <pc:sldMk cId="114912574" sldId="373"/>
         </pc:sldMkLst>
-        <pc:spChg chg="del">
-          <ac:chgData name="Sana Belguith" userId="edaa0afb-4621-4165-af1d-05ed505f7999" providerId="ADAL" clId="{10F9F129-592B-40F1-997D-F487E669D3CB}" dt="2022-11-16T14:00:22.380" v="154" actId="478"/>
-          <ac:spMkLst>
-            <pc:docMk/>
-            <pc:sldMk cId="114912574" sldId="373"/>
-            <ac:spMk id="2" creationId="{E6E542B4-E4E1-4DA0-A326-3413F289F42C}"/>
-          </ac:spMkLst>
-        </pc:spChg>
-        <pc:spChg chg="mod">
-          <ac:chgData name="Sana Belguith" userId="edaa0afb-4621-4165-af1d-05ed505f7999" providerId="ADAL" clId="{10F9F129-592B-40F1-997D-F487E669D3CB}" dt="2022-11-16T14:00:58.768" v="167" actId="1076"/>
-          <ac:spMkLst>
-            <pc:docMk/>
-            <pc:sldMk cId="114912574" sldId="373"/>
-            <ac:spMk id="3" creationId="{ACC2724E-AB55-4967-843D-C38966AB58A1}"/>
-          </ac:spMkLst>
-        </pc:spChg>
-        <pc:spChg chg="mod">
-          <ac:chgData name="Sana Belguith" userId="edaa0afb-4621-4165-af1d-05ed505f7999" providerId="ADAL" clId="{10F9F129-592B-40F1-997D-F487E669D3CB}" dt="2022-11-16T14:01:11.586" v="170" actId="108"/>
-          <ac:spMkLst>
-            <pc:docMk/>
-            <pc:sldMk cId="114912574" sldId="373"/>
-            <ac:spMk id="5" creationId="{68AF798E-A925-499C-A6D7-56B92C949B2A}"/>
-          </ac:spMkLst>
-        </pc:spChg>
-        <pc:spChg chg="mod">
-          <ac:chgData name="Sana Belguith" userId="edaa0afb-4621-4165-af1d-05ed505f7999" providerId="ADAL" clId="{10F9F129-592B-40F1-997D-F487E669D3CB}" dt="2022-11-16T14:00:47.313" v="161" actId="1076"/>
-          <ac:spMkLst>
-            <pc:docMk/>
-            <pc:sldMk cId="114912574" sldId="373"/>
-            <ac:spMk id="6" creationId="{4EBC1484-9C76-4B83-AA51-376AB66F6091}"/>
-          </ac:spMkLst>
-        </pc:spChg>
-        <pc:spChg chg="mod">
-          <ac:chgData name="Sana Belguith" userId="edaa0afb-4621-4165-af1d-05ed505f7999" providerId="ADAL" clId="{10F9F129-592B-40F1-997D-F487E669D3CB}" dt="2022-11-16T14:00:47.313" v="161" actId="1076"/>
-          <ac:spMkLst>
-            <pc:docMk/>
-            <pc:sldMk cId="114912574" sldId="373"/>
-            <ac:spMk id="7" creationId="{D240B57A-F727-490A-982C-584D18819401}"/>
-          </ac:spMkLst>
-        </pc:spChg>
-        <pc:spChg chg="mod">
-          <ac:chgData name="Sana Belguith" userId="edaa0afb-4621-4165-af1d-05ed505f7999" providerId="ADAL" clId="{10F9F129-592B-40F1-997D-F487E669D3CB}" dt="2022-11-16T14:01:13.386" v="171" actId="108"/>
-          <ac:spMkLst>
-            <pc:docMk/>
-            <pc:sldMk cId="114912574" sldId="373"/>
-            <ac:spMk id="9" creationId="{1C11EA2B-932F-4C85-8C6B-6C165F4EBC38}"/>
-          </ac:spMkLst>
-        </pc:spChg>
-        <pc:spChg chg="mod">
-          <ac:chgData name="Sana Belguith" userId="edaa0afb-4621-4165-af1d-05ed505f7999" providerId="ADAL" clId="{10F9F129-592B-40F1-997D-F487E669D3CB}" dt="2022-11-16T14:00:39.704" v="160" actId="1076"/>
-          <ac:spMkLst>
-            <pc:docMk/>
-            <pc:sldMk cId="114912574" sldId="373"/>
-            <ac:spMk id="10" creationId="{677F81B2-3B88-4F0F-B40A-E7FA44850083}"/>
-          </ac:spMkLst>
-        </pc:spChg>
-        <pc:spChg chg="mod">
-          <ac:chgData name="Sana Belguith" userId="edaa0afb-4621-4165-af1d-05ed505f7999" providerId="ADAL" clId="{10F9F129-592B-40F1-997D-F487E669D3CB}" dt="2022-11-16T14:00:47.313" v="161" actId="1076"/>
-          <ac:spMkLst>
-            <pc:docMk/>
-            <pc:sldMk cId="114912574" sldId="373"/>
-            <ac:spMk id="11" creationId="{636BA0E7-897C-4E2D-8118-2A2335CD0867}"/>
-          </ac:spMkLst>
-        </pc:spChg>
-        <pc:spChg chg="mod">
-          <ac:chgData name="Sana Belguith" userId="edaa0afb-4621-4165-af1d-05ed505f7999" providerId="ADAL" clId="{10F9F129-592B-40F1-997D-F487E669D3CB}" dt="2022-11-16T14:00:47.313" v="161" actId="1076"/>
-          <ac:spMkLst>
-            <pc:docMk/>
-            <pc:sldMk cId="114912574" sldId="373"/>
-            <ac:spMk id="13" creationId="{8F9792B0-CBD7-49BC-A4AB-8524D4D237AF}"/>
-          </ac:spMkLst>
-        </pc:spChg>
-        <pc:spChg chg="add del mod">
-          <ac:chgData name="Sana Belguith" userId="edaa0afb-4621-4165-af1d-05ed505f7999" providerId="ADAL" clId="{10F9F129-592B-40F1-997D-F487E669D3CB}" dt="2022-11-16T14:00:24.392" v="155" actId="478"/>
-          <ac:spMkLst>
-            <pc:docMk/>
-            <pc:sldMk cId="114912574" sldId="373"/>
-            <ac:spMk id="16" creationId="{B9B28FA5-5923-CD7A-6B1A-D77A0B122ABD}"/>
-          </ac:spMkLst>
-        </pc:spChg>
-        <pc:spChg chg="add mod">
-          <ac:chgData name="Sana Belguith" userId="edaa0afb-4621-4165-af1d-05ed505f7999" providerId="ADAL" clId="{10F9F129-592B-40F1-997D-F487E669D3CB}" dt="2022-11-16T14:00:24.725" v="156"/>
-          <ac:spMkLst>
-            <pc:docMk/>
-            <pc:sldMk cId="114912574" sldId="373"/>
-            <ac:spMk id="17" creationId="{3C122C6D-773C-E25E-FE14-32ED30F7DD7B}"/>
-          </ac:spMkLst>
-        </pc:spChg>
-        <pc:spChg chg="mod">
-          <ac:chgData name="Sana Belguith" userId="edaa0afb-4621-4165-af1d-05ed505f7999" providerId="ADAL" clId="{10F9F129-592B-40F1-997D-F487E669D3CB}" dt="2022-11-16T14:01:15.696" v="172" actId="108"/>
-          <ac:spMkLst>
-            <pc:docMk/>
-            <pc:sldMk cId="114912574" sldId="373"/>
-            <ac:spMk id="21" creationId="{64BC8608-ABD5-436C-A3F9-18BD6B472F03}"/>
-          </ac:spMkLst>
-        </pc:spChg>
-        <pc:spChg chg="mod">
-          <ac:chgData name="Sana Belguith" userId="edaa0afb-4621-4165-af1d-05ed505f7999" providerId="ADAL" clId="{10F9F129-592B-40F1-997D-F487E669D3CB}" dt="2022-11-16T14:01:01.801" v="168" actId="14100"/>
-          <ac:spMkLst>
-            <pc:docMk/>
-            <pc:sldMk cId="114912574" sldId="373"/>
-            <ac:spMk id="24" creationId="{EC2C9702-1F04-4CC4-9884-F7BFF1C7AB52}"/>
-          </ac:spMkLst>
-        </pc:spChg>
-        <pc:picChg chg="mod">
-          <ac:chgData name="Sana Belguith" userId="edaa0afb-4621-4165-af1d-05ed505f7999" providerId="ADAL" clId="{10F9F129-592B-40F1-997D-F487E669D3CB}" dt="2022-11-16T14:01:03.120" v="169" actId="1076"/>
-          <ac:picMkLst>
-            <pc:docMk/>
-            <pc:sldMk cId="114912574" sldId="373"/>
-            <ac:picMk id="8" creationId="{DAE2C522-F582-413D-8575-6A42BEF9B94F}"/>
-          </ac:picMkLst>
-        </pc:picChg>
       </pc:sldChg>
       <pc:sldChg chg="modSp add del mod">
         <pc:chgData name="Sana Belguith" userId="edaa0afb-4621-4165-af1d-05ed505f7999" providerId="ADAL" clId="{10F9F129-592B-40F1-997D-F487E669D3CB}" dt="2022-11-17T13:29:43.465" v="644" actId="47"/>
@@ -3066,22 +809,6 @@
           <pc:docMk/>
           <pc:sldMk cId="3752278883" sldId="374"/>
         </pc:sldMkLst>
-        <pc:spChg chg="mod">
-          <ac:chgData name="Sana Belguith" userId="edaa0afb-4621-4165-af1d-05ed505f7999" providerId="ADAL" clId="{10F9F129-592B-40F1-997D-F487E669D3CB}" dt="2022-11-16T14:54:21.452" v="306" actId="1076"/>
-          <ac:spMkLst>
-            <pc:docMk/>
-            <pc:sldMk cId="3752278883" sldId="374"/>
-            <ac:spMk id="2" creationId="{CFE8D330-2F7C-4286-980E-D550D354917F}"/>
-          </ac:spMkLst>
-        </pc:spChg>
-        <pc:spChg chg="mod">
-          <ac:chgData name="Sana Belguith" userId="edaa0afb-4621-4165-af1d-05ed505f7999" providerId="ADAL" clId="{10F9F129-592B-40F1-997D-F487E669D3CB}" dt="2022-11-16T14:56:16.564" v="316" actId="108"/>
-          <ac:spMkLst>
-            <pc:docMk/>
-            <pc:sldMk cId="3752278883" sldId="374"/>
-            <ac:spMk id="3" creationId="{B70F0FAC-325C-495F-B6AF-16BDA23DDB16}"/>
-          </ac:spMkLst>
-        </pc:spChg>
       </pc:sldChg>
       <pc:sldChg chg="addSp delSp modSp add mod">
         <pc:chgData name="Sana Belguith" userId="edaa0afb-4621-4165-af1d-05ed505f7999" providerId="ADAL" clId="{10F9F129-592B-40F1-997D-F487E669D3CB}" dt="2022-11-16T14:02:20.057" v="191" actId="1076"/>
@@ -3089,118 +816,6 @@
           <pc:docMk/>
           <pc:sldMk cId="1895826298" sldId="375"/>
         </pc:sldMkLst>
-        <pc:spChg chg="del">
-          <ac:chgData name="Sana Belguith" userId="edaa0afb-4621-4165-af1d-05ed505f7999" providerId="ADAL" clId="{10F9F129-592B-40F1-997D-F487E669D3CB}" dt="2022-11-16T14:01:48.518" v="182" actId="478"/>
-          <ac:spMkLst>
-            <pc:docMk/>
-            <pc:sldMk cId="1895826298" sldId="375"/>
-            <ac:spMk id="2" creationId="{E6E542B4-E4E1-4DA0-A326-3413F289F42C}"/>
-          </ac:spMkLst>
-        </pc:spChg>
-        <pc:spChg chg="mod">
-          <ac:chgData name="Sana Belguith" userId="edaa0afb-4621-4165-af1d-05ed505f7999" providerId="ADAL" clId="{10F9F129-592B-40F1-997D-F487E669D3CB}" dt="2022-11-16T14:02:18.080" v="190" actId="1076"/>
-          <ac:spMkLst>
-            <pc:docMk/>
-            <pc:sldMk cId="1895826298" sldId="375"/>
-            <ac:spMk id="3" creationId="{ACC2724E-AB55-4967-843D-C38966AB58A1}"/>
-          </ac:spMkLst>
-        </pc:spChg>
-        <pc:spChg chg="mod">
-          <ac:chgData name="Sana Belguith" userId="edaa0afb-4621-4165-af1d-05ed505f7999" providerId="ADAL" clId="{10F9F129-592B-40F1-997D-F487E669D3CB}" dt="2022-11-16T14:02:09.754" v="187" actId="14100"/>
-          <ac:spMkLst>
-            <pc:docMk/>
-            <pc:sldMk cId="1895826298" sldId="375"/>
-            <ac:spMk id="5" creationId="{68AF798E-A925-499C-A6D7-56B92C949B2A}"/>
-          </ac:spMkLst>
-        </pc:spChg>
-        <pc:spChg chg="mod">
-          <ac:chgData name="Sana Belguith" userId="edaa0afb-4621-4165-af1d-05ed505f7999" providerId="ADAL" clId="{10F9F129-592B-40F1-997D-F487E669D3CB}" dt="2022-11-16T14:02:06.250" v="186" actId="1076"/>
-          <ac:spMkLst>
-            <pc:docMk/>
-            <pc:sldMk cId="1895826298" sldId="375"/>
-            <ac:spMk id="6" creationId="{4EBC1484-9C76-4B83-AA51-376AB66F6091}"/>
-          </ac:spMkLst>
-        </pc:spChg>
-        <pc:spChg chg="mod">
-          <ac:chgData name="Sana Belguith" userId="edaa0afb-4621-4165-af1d-05ed505f7999" providerId="ADAL" clId="{10F9F129-592B-40F1-997D-F487E669D3CB}" dt="2022-11-16T14:02:06.250" v="186" actId="1076"/>
-          <ac:spMkLst>
-            <pc:docMk/>
-            <pc:sldMk cId="1895826298" sldId="375"/>
-            <ac:spMk id="7" creationId="{D240B57A-F727-490A-982C-584D18819401}"/>
-          </ac:spMkLst>
-        </pc:spChg>
-        <pc:spChg chg="mod">
-          <ac:chgData name="Sana Belguith" userId="edaa0afb-4621-4165-af1d-05ed505f7999" providerId="ADAL" clId="{10F9F129-592B-40F1-997D-F487E669D3CB}" dt="2022-11-16T14:02:09.754" v="187" actId="14100"/>
-          <ac:spMkLst>
-            <pc:docMk/>
-            <pc:sldMk cId="1895826298" sldId="375"/>
-            <ac:spMk id="9" creationId="{1C11EA2B-932F-4C85-8C6B-6C165F4EBC38}"/>
-          </ac:spMkLst>
-        </pc:spChg>
-        <pc:spChg chg="add del mod">
-          <ac:chgData name="Sana Belguith" userId="edaa0afb-4621-4165-af1d-05ed505f7999" providerId="ADAL" clId="{10F9F129-592B-40F1-997D-F487E669D3CB}" dt="2022-11-16T14:01:50.587" v="183" actId="478"/>
-          <ac:spMkLst>
-            <pc:docMk/>
-            <pc:sldMk cId="1895826298" sldId="375"/>
-            <ac:spMk id="10" creationId="{EA68B80B-7B0D-BDB6-24F1-3188BF87397E}"/>
-          </ac:spMkLst>
-        </pc:spChg>
-        <pc:spChg chg="mod">
-          <ac:chgData name="Sana Belguith" userId="edaa0afb-4621-4165-af1d-05ed505f7999" providerId="ADAL" clId="{10F9F129-592B-40F1-997D-F487E669D3CB}" dt="2022-11-16T14:02:06.250" v="186" actId="1076"/>
-          <ac:spMkLst>
-            <pc:docMk/>
-            <pc:sldMk cId="1895826298" sldId="375"/>
-            <ac:spMk id="11" creationId="{636BA0E7-897C-4E2D-8118-2A2335CD0867}"/>
-          </ac:spMkLst>
-        </pc:spChg>
-        <pc:spChg chg="add mod">
-          <ac:chgData name="Sana Belguith" userId="edaa0afb-4621-4165-af1d-05ed505f7999" providerId="ADAL" clId="{10F9F129-592B-40F1-997D-F487E669D3CB}" dt="2022-11-16T14:01:54.706" v="184"/>
-          <ac:spMkLst>
-            <pc:docMk/>
-            <pc:sldMk cId="1895826298" sldId="375"/>
-            <ac:spMk id="12" creationId="{767B0010-C705-4532-D537-EF1781F81C8F}"/>
-          </ac:spMkLst>
-        </pc:spChg>
-        <pc:spChg chg="mod">
-          <ac:chgData name="Sana Belguith" userId="edaa0afb-4621-4165-af1d-05ed505f7999" providerId="ADAL" clId="{10F9F129-592B-40F1-997D-F487E669D3CB}" dt="2022-11-16T14:02:06.250" v="186" actId="1076"/>
-          <ac:spMkLst>
-            <pc:docMk/>
-            <pc:sldMk cId="1895826298" sldId="375"/>
-            <ac:spMk id="13" creationId="{8F9792B0-CBD7-49BC-A4AB-8524D4D237AF}"/>
-          </ac:spMkLst>
-        </pc:spChg>
-        <pc:spChg chg="mod">
-          <ac:chgData name="Sana Belguith" userId="edaa0afb-4621-4165-af1d-05ed505f7999" providerId="ADAL" clId="{10F9F129-592B-40F1-997D-F487E669D3CB}" dt="2022-11-16T14:01:57.628" v="185" actId="1076"/>
-          <ac:spMkLst>
-            <pc:docMk/>
-            <pc:sldMk cId="1895826298" sldId="375"/>
-            <ac:spMk id="15" creationId="{4A2BE182-77A4-4293-BA9B-6CC6A48818DD}"/>
-          </ac:spMkLst>
-        </pc:spChg>
-        <pc:spChg chg="mod">
-          <ac:chgData name="Sana Belguith" userId="edaa0afb-4621-4165-af1d-05ed505f7999" providerId="ADAL" clId="{10F9F129-592B-40F1-997D-F487E669D3CB}" dt="2022-11-16T14:02:11.810" v="188" actId="14100"/>
-          <ac:spMkLst>
-            <pc:docMk/>
-            <pc:sldMk cId="1895826298" sldId="375"/>
-            <ac:spMk id="21" creationId="{64BC8608-ABD5-436C-A3F9-18BD6B472F03}"/>
-          </ac:spMkLst>
-        </pc:spChg>
-        <pc:spChg chg="mod">
-          <ac:chgData name="Sana Belguith" userId="edaa0afb-4621-4165-af1d-05ed505f7999" providerId="ADAL" clId="{10F9F129-592B-40F1-997D-F487E669D3CB}" dt="2022-11-16T14:02:15.937" v="189" actId="14100"/>
-          <ac:spMkLst>
-            <pc:docMk/>
-            <pc:sldMk cId="1895826298" sldId="375"/>
-            <ac:spMk id="24" creationId="{EC2C9702-1F04-4CC4-9884-F7BFF1C7AB52}"/>
-          </ac:spMkLst>
-        </pc:spChg>
-        <pc:picChg chg="mod">
-          <ac:chgData name="Sana Belguith" userId="edaa0afb-4621-4165-af1d-05ed505f7999" providerId="ADAL" clId="{10F9F129-592B-40F1-997D-F487E669D3CB}" dt="2022-11-16T14:02:20.057" v="191" actId="1076"/>
-          <ac:picMkLst>
-            <pc:docMk/>
-            <pc:sldMk cId="1895826298" sldId="375"/>
-            <ac:picMk id="8" creationId="{DAE2C522-F582-413D-8575-6A42BEF9B94F}"/>
-          </ac:picMkLst>
-        </pc:picChg>
       </pc:sldChg>
       <pc:sldChg chg="modSp add mod">
         <pc:chgData name="Sana Belguith" userId="edaa0afb-4621-4165-af1d-05ed505f7999" providerId="ADAL" clId="{10F9F129-592B-40F1-997D-F487E669D3CB}" dt="2022-11-16T14:06:08.198" v="245" actId="108"/>
@@ -3208,22 +823,6 @@
           <pc:docMk/>
           <pc:sldMk cId="3290721575" sldId="376"/>
         </pc:sldMkLst>
-        <pc:spChg chg="mod">
-          <ac:chgData name="Sana Belguith" userId="edaa0afb-4621-4165-af1d-05ed505f7999" providerId="ADAL" clId="{10F9F129-592B-40F1-997D-F487E669D3CB}" dt="2022-11-16T14:03:53.696" v="216" actId="1076"/>
-          <ac:spMkLst>
-            <pc:docMk/>
-            <pc:sldMk cId="3290721575" sldId="376"/>
-            <ac:spMk id="2" creationId="{B3C7490C-79D2-48D9-B8D8-B1925CDE2300}"/>
-          </ac:spMkLst>
-        </pc:spChg>
-        <pc:spChg chg="mod">
-          <ac:chgData name="Sana Belguith" userId="edaa0afb-4621-4165-af1d-05ed505f7999" providerId="ADAL" clId="{10F9F129-592B-40F1-997D-F487E669D3CB}" dt="2022-11-16T14:06:08.198" v="245" actId="108"/>
-          <ac:spMkLst>
-            <pc:docMk/>
-            <pc:sldMk cId="3290721575" sldId="376"/>
-            <ac:spMk id="3" creationId="{912E9F91-60E5-4646-8756-9AA65E2031BE}"/>
-          </ac:spMkLst>
-        </pc:spChg>
       </pc:sldChg>
       <pc:sldChg chg="modSp add mod">
         <pc:chgData name="Sana Belguith" userId="edaa0afb-4621-4165-af1d-05ed505f7999" providerId="ADAL" clId="{10F9F129-592B-40F1-997D-F487E669D3CB}" dt="2022-11-16T14:06:05.225" v="244" actId="403"/>
@@ -3231,22 +830,6 @@
           <pc:docMk/>
           <pc:sldMk cId="3732628795" sldId="377"/>
         </pc:sldMkLst>
-        <pc:spChg chg="mod">
-          <ac:chgData name="Sana Belguith" userId="edaa0afb-4621-4165-af1d-05ed505f7999" providerId="ADAL" clId="{10F9F129-592B-40F1-997D-F487E669D3CB}" dt="2022-11-16T14:04:50.601" v="227" actId="1076"/>
-          <ac:spMkLst>
-            <pc:docMk/>
-            <pc:sldMk cId="3732628795" sldId="377"/>
-            <ac:spMk id="2" creationId="{B3C7490C-79D2-48D9-B8D8-B1925CDE2300}"/>
-          </ac:spMkLst>
-        </pc:spChg>
-        <pc:spChg chg="mod">
-          <ac:chgData name="Sana Belguith" userId="edaa0afb-4621-4165-af1d-05ed505f7999" providerId="ADAL" clId="{10F9F129-592B-40F1-997D-F487E669D3CB}" dt="2022-11-16T14:06:05.225" v="244" actId="403"/>
-          <ac:spMkLst>
-            <pc:docMk/>
-            <pc:sldMk cId="3732628795" sldId="377"/>
-            <ac:spMk id="3" creationId="{912E9F91-60E5-4646-8756-9AA65E2031BE}"/>
-          </ac:spMkLst>
-        </pc:spChg>
       </pc:sldChg>
       <pc:sldChg chg="delSp modSp add del mod">
         <pc:chgData name="Sana Belguith" userId="edaa0afb-4621-4165-af1d-05ed505f7999" providerId="ADAL" clId="{10F9F129-592B-40F1-997D-F487E669D3CB}" dt="2022-11-16T14:05:15.923" v="234" actId="47"/>
@@ -3254,30 +837,6 @@
           <pc:docMk/>
           <pc:sldMk cId="3950559460" sldId="378"/>
         </pc:sldMkLst>
-        <pc:spChg chg="mod">
-          <ac:chgData name="Sana Belguith" userId="edaa0afb-4621-4165-af1d-05ed505f7999" providerId="ADAL" clId="{10F9F129-592B-40F1-997D-F487E669D3CB}" dt="2022-11-16T14:04:58.752" v="230" actId="1076"/>
-          <ac:spMkLst>
-            <pc:docMk/>
-            <pc:sldMk cId="3950559460" sldId="378"/>
-            <ac:spMk id="2" creationId="{B3C7490C-79D2-48D9-B8D8-B1925CDE2300}"/>
-          </ac:spMkLst>
-        </pc:spChg>
-        <pc:spChg chg="mod">
-          <ac:chgData name="Sana Belguith" userId="edaa0afb-4621-4165-af1d-05ed505f7999" providerId="ADAL" clId="{10F9F129-592B-40F1-997D-F487E669D3CB}" dt="2022-11-16T14:05:04.421" v="231" actId="108"/>
-          <ac:spMkLst>
-            <pc:docMk/>
-            <pc:sldMk cId="3950559460" sldId="378"/>
-            <ac:spMk id="3" creationId="{912E9F91-60E5-4646-8756-9AA65E2031BE}"/>
-          </ac:spMkLst>
-        </pc:spChg>
-        <pc:spChg chg="del">
-          <ac:chgData name="Sana Belguith" userId="edaa0afb-4621-4165-af1d-05ed505f7999" providerId="ADAL" clId="{10F9F129-592B-40F1-997D-F487E669D3CB}" dt="2022-11-16T14:05:07.436" v="232" actId="478"/>
-          <ac:spMkLst>
-            <pc:docMk/>
-            <pc:sldMk cId="3950559460" sldId="378"/>
-            <ac:spMk id="4" creationId="{7C988D05-8E71-4203-A62D-C7614E50D3AF}"/>
-          </ac:spMkLst>
-        </pc:spChg>
       </pc:sldChg>
       <pc:sldChg chg="addSp delSp modSp add mod">
         <pc:chgData name="Sana Belguith" userId="edaa0afb-4621-4165-af1d-05ed505f7999" providerId="ADAL" clId="{10F9F129-592B-40F1-997D-F487E669D3CB}" dt="2022-11-16T14:03:39.891" v="213" actId="14100"/>
@@ -3285,94 +844,6 @@
           <pc:docMk/>
           <pc:sldMk cId="4226157631" sldId="379"/>
         </pc:sldMkLst>
-        <pc:spChg chg="del">
-          <ac:chgData name="Sana Belguith" userId="edaa0afb-4621-4165-af1d-05ed505f7999" providerId="ADAL" clId="{10F9F129-592B-40F1-997D-F487E669D3CB}" dt="2022-11-16T14:02:26.887" v="192" actId="478"/>
-          <ac:spMkLst>
-            <pc:docMk/>
-            <pc:sldMk cId="4226157631" sldId="379"/>
-            <ac:spMk id="2" creationId="{E6E542B4-E4E1-4DA0-A326-3413F289F42C}"/>
-          </ac:spMkLst>
-        </pc:spChg>
-        <pc:spChg chg="mod">
-          <ac:chgData name="Sana Belguith" userId="edaa0afb-4621-4165-af1d-05ed505f7999" providerId="ADAL" clId="{10F9F129-592B-40F1-997D-F487E669D3CB}" dt="2022-11-16T14:03:39.891" v="213" actId="14100"/>
-          <ac:spMkLst>
-            <pc:docMk/>
-            <pc:sldMk cId="4226157631" sldId="379"/>
-            <ac:spMk id="5" creationId="{68AF798E-A925-499C-A6D7-56B92C949B2A}"/>
-          </ac:spMkLst>
-        </pc:spChg>
-        <pc:spChg chg="mod">
-          <ac:chgData name="Sana Belguith" userId="edaa0afb-4621-4165-af1d-05ed505f7999" providerId="ADAL" clId="{10F9F129-592B-40F1-997D-F487E669D3CB}" dt="2022-11-16T14:03:36.346" v="212" actId="1076"/>
-          <ac:spMkLst>
-            <pc:docMk/>
-            <pc:sldMk cId="4226157631" sldId="379"/>
-            <ac:spMk id="6" creationId="{4EBC1484-9C76-4B83-AA51-376AB66F6091}"/>
-          </ac:spMkLst>
-        </pc:spChg>
-        <pc:spChg chg="mod">
-          <ac:chgData name="Sana Belguith" userId="edaa0afb-4621-4165-af1d-05ed505f7999" providerId="ADAL" clId="{10F9F129-592B-40F1-997D-F487E669D3CB}" dt="2022-11-16T14:03:36.346" v="212" actId="1076"/>
-          <ac:spMkLst>
-            <pc:docMk/>
-            <pc:sldMk cId="4226157631" sldId="379"/>
-            <ac:spMk id="7" creationId="{D240B57A-F727-490A-982C-584D18819401}"/>
-          </ac:spMkLst>
-        </pc:spChg>
-        <pc:spChg chg="mod">
-          <ac:chgData name="Sana Belguith" userId="edaa0afb-4621-4165-af1d-05ed505f7999" providerId="ADAL" clId="{10F9F129-592B-40F1-997D-F487E669D3CB}" dt="2022-11-16T14:03:39.891" v="213" actId="14100"/>
-          <ac:spMkLst>
-            <pc:docMk/>
-            <pc:sldMk cId="4226157631" sldId="379"/>
-            <ac:spMk id="9" creationId="{1C11EA2B-932F-4C85-8C6B-6C165F4EBC38}"/>
-          </ac:spMkLst>
-        </pc:spChg>
-        <pc:spChg chg="add del mod">
-          <ac:chgData name="Sana Belguith" userId="edaa0afb-4621-4165-af1d-05ed505f7999" providerId="ADAL" clId="{10F9F129-592B-40F1-997D-F487E669D3CB}" dt="2022-11-16T14:02:29.460" v="193" actId="478"/>
-          <ac:spMkLst>
-            <pc:docMk/>
-            <pc:sldMk cId="4226157631" sldId="379"/>
-            <ac:spMk id="10" creationId="{AC33EDA9-C655-BEE1-F519-E8F7790EB228}"/>
-          </ac:spMkLst>
-        </pc:spChg>
-        <pc:spChg chg="mod">
-          <ac:chgData name="Sana Belguith" userId="edaa0afb-4621-4165-af1d-05ed505f7999" providerId="ADAL" clId="{10F9F129-592B-40F1-997D-F487E669D3CB}" dt="2022-11-16T14:03:36.346" v="212" actId="1076"/>
-          <ac:spMkLst>
-            <pc:docMk/>
-            <pc:sldMk cId="4226157631" sldId="379"/>
-            <ac:spMk id="11" creationId="{636BA0E7-897C-4E2D-8118-2A2335CD0867}"/>
-          </ac:spMkLst>
-        </pc:spChg>
-        <pc:spChg chg="add mod">
-          <ac:chgData name="Sana Belguith" userId="edaa0afb-4621-4165-af1d-05ed505f7999" providerId="ADAL" clId="{10F9F129-592B-40F1-997D-F487E669D3CB}" dt="2022-11-16T14:02:29.792" v="194"/>
-          <ac:spMkLst>
-            <pc:docMk/>
-            <pc:sldMk cId="4226157631" sldId="379"/>
-            <ac:spMk id="12" creationId="{4A414F5A-9450-5291-8E47-8C40CC71BB6E}"/>
-          </ac:spMkLst>
-        </pc:spChg>
-        <pc:spChg chg="mod">
-          <ac:chgData name="Sana Belguith" userId="edaa0afb-4621-4165-af1d-05ed505f7999" providerId="ADAL" clId="{10F9F129-592B-40F1-997D-F487E669D3CB}" dt="2022-11-16T14:03:36.346" v="212" actId="1076"/>
-          <ac:spMkLst>
-            <pc:docMk/>
-            <pc:sldMk cId="4226157631" sldId="379"/>
-            <ac:spMk id="13" creationId="{8F9792B0-CBD7-49BC-A4AB-8524D4D237AF}"/>
-          </ac:spMkLst>
-        </pc:spChg>
-        <pc:spChg chg="mod">
-          <ac:chgData name="Sana Belguith" userId="edaa0afb-4621-4165-af1d-05ed505f7999" providerId="ADAL" clId="{10F9F129-592B-40F1-997D-F487E669D3CB}" dt="2022-11-16T14:03:30.337" v="211" actId="1076"/>
-          <ac:spMkLst>
-            <pc:docMk/>
-            <pc:sldMk cId="4226157631" sldId="379"/>
-            <ac:spMk id="15" creationId="{4A2BE182-77A4-4293-BA9B-6CC6A48818DD}"/>
-          </ac:spMkLst>
-        </pc:spChg>
-        <pc:spChg chg="mod">
-          <ac:chgData name="Sana Belguith" userId="edaa0afb-4621-4165-af1d-05ed505f7999" providerId="ADAL" clId="{10F9F129-592B-40F1-997D-F487E669D3CB}" dt="2022-11-16T14:03:39.891" v="213" actId="14100"/>
-          <ac:spMkLst>
-            <pc:docMk/>
-            <pc:sldMk cId="4226157631" sldId="379"/>
-            <ac:spMk id="21" creationId="{64BC8608-ABD5-436C-A3F9-18BD6B472F03}"/>
-          </ac:spMkLst>
-        </pc:spChg>
       </pc:sldChg>
       <pc:sldChg chg="modSp add mod">
         <pc:chgData name="Sana Belguith" userId="edaa0afb-4621-4165-af1d-05ed505f7999" providerId="ADAL" clId="{10F9F129-592B-40F1-997D-F487E669D3CB}" dt="2022-11-17T10:28:19.481" v="494" actId="20577"/>
@@ -3380,14 +851,6 @@
           <pc:docMk/>
           <pc:sldMk cId="122551928" sldId="380"/>
         </pc:sldMkLst>
-        <pc:spChg chg="mod">
-          <ac:chgData name="Sana Belguith" userId="edaa0afb-4621-4165-af1d-05ed505f7999" providerId="ADAL" clId="{10F9F129-592B-40F1-997D-F487E669D3CB}" dt="2022-11-17T10:28:19.481" v="494" actId="20577"/>
-          <ac:spMkLst>
-            <pc:docMk/>
-            <pc:sldMk cId="122551928" sldId="380"/>
-            <ac:spMk id="4" creationId="{064D8D26-B133-4846-8DD0-D46F81284C5A}"/>
-          </ac:spMkLst>
-        </pc:spChg>
       </pc:sldChg>
       <pc:sldChg chg="modSp add del mod">
         <pc:chgData name="Sana Belguith" userId="edaa0afb-4621-4165-af1d-05ed505f7999" providerId="ADAL" clId="{10F9F129-592B-40F1-997D-F487E669D3CB}" dt="2022-11-17T10:28:14.992" v="493" actId="47"/>
@@ -3395,22 +858,6 @@
           <pc:docMk/>
           <pc:sldMk cId="694844021" sldId="381"/>
         </pc:sldMkLst>
-        <pc:spChg chg="mod">
-          <ac:chgData name="Sana Belguith" userId="edaa0afb-4621-4165-af1d-05ed505f7999" providerId="ADAL" clId="{10F9F129-592B-40F1-997D-F487E669D3CB}" dt="2022-11-16T14:05:53.193" v="240" actId="1076"/>
-          <ac:spMkLst>
-            <pc:docMk/>
-            <pc:sldMk cId="694844021" sldId="381"/>
-            <ac:spMk id="4" creationId="{04C84AF9-DA12-456D-A99E-D103E336A0A0}"/>
-          </ac:spMkLst>
-        </pc:spChg>
-        <pc:spChg chg="mod">
-          <ac:chgData name="Sana Belguith" userId="edaa0afb-4621-4165-af1d-05ed505f7999" providerId="ADAL" clId="{10F9F129-592B-40F1-997D-F487E669D3CB}" dt="2022-11-16T14:06:01.541" v="243" actId="403"/>
-          <ac:spMkLst>
-            <pc:docMk/>
-            <pc:sldMk cId="694844021" sldId="381"/>
-            <ac:spMk id="5" creationId="{147A8436-A8C6-4FCA-A750-0F44252E690D}"/>
-          </ac:spMkLst>
-        </pc:spChg>
       </pc:sldChg>
       <pc:sldChg chg="modSp add del mod">
         <pc:chgData name="Sana Belguith" userId="edaa0afb-4621-4165-af1d-05ed505f7999" providerId="ADAL" clId="{10F9F129-592B-40F1-997D-F487E669D3CB}" dt="2022-11-16T14:46:44.998" v="288" actId="47"/>
@@ -3418,22 +865,6 @@
           <pc:docMk/>
           <pc:sldMk cId="3993338792" sldId="382"/>
         </pc:sldMkLst>
-        <pc:spChg chg="mod">
-          <ac:chgData name="Sana Belguith" userId="edaa0afb-4621-4165-af1d-05ed505f7999" providerId="ADAL" clId="{10F9F129-592B-40F1-997D-F487E669D3CB}" dt="2022-11-16T14:07:12.714" v="250" actId="108"/>
-          <ac:spMkLst>
-            <pc:docMk/>
-            <pc:sldMk cId="3993338792" sldId="382"/>
-            <ac:spMk id="4" creationId="{CF22C954-1CEA-4BD1-967E-ADE8E58014B8}"/>
-          </ac:spMkLst>
-        </pc:spChg>
-        <pc:spChg chg="mod">
-          <ac:chgData name="Sana Belguith" userId="edaa0afb-4621-4165-af1d-05ed505f7999" providerId="ADAL" clId="{10F9F129-592B-40F1-997D-F487E669D3CB}" dt="2022-11-16T14:07:15.669" v="251" actId="20577"/>
-          <ac:spMkLst>
-            <pc:docMk/>
-            <pc:sldMk cId="3993338792" sldId="382"/>
-            <ac:spMk id="5" creationId="{B95EB842-A91B-4AE7-B213-1E784CF45C7D}"/>
-          </ac:spMkLst>
-        </pc:spChg>
       </pc:sldChg>
       <pc:sldChg chg="addSp delSp modSp add del mod">
         <pc:chgData name="Sana Belguith" userId="edaa0afb-4621-4165-af1d-05ed505f7999" providerId="ADAL" clId="{10F9F129-592B-40F1-997D-F487E669D3CB}" dt="2022-11-16T14:08:05.173" v="264" actId="47"/>
@@ -3441,22 +872,6 @@
           <pc:docMk/>
           <pc:sldMk cId="853934146" sldId="383"/>
         </pc:sldMkLst>
-        <pc:spChg chg="add del mod">
-          <ac:chgData name="Sana Belguith" userId="edaa0afb-4621-4165-af1d-05ed505f7999" providerId="ADAL" clId="{10F9F129-592B-40F1-997D-F487E669D3CB}" dt="2022-11-16T14:07:36.889" v="257" actId="478"/>
-          <ac:spMkLst>
-            <pc:docMk/>
-            <pc:sldMk cId="853934146" sldId="383"/>
-            <ac:spMk id="2" creationId="{FD20298F-751E-4965-BF45-C1A2E822F6D9}"/>
-          </ac:spMkLst>
-        </pc:spChg>
-        <pc:spChg chg="add del mod">
-          <ac:chgData name="Sana Belguith" userId="edaa0afb-4621-4165-af1d-05ed505f7999" providerId="ADAL" clId="{10F9F129-592B-40F1-997D-F487E669D3CB}" dt="2022-11-16T14:07:36.889" v="257" actId="478"/>
-          <ac:spMkLst>
-            <pc:docMk/>
-            <pc:sldMk cId="853934146" sldId="383"/>
-            <ac:spMk id="5" creationId="{34B9339C-551F-3921-A50D-FC09DBFCB9A0}"/>
-          </ac:spMkLst>
-        </pc:spChg>
       </pc:sldChg>
       <pc:sldChg chg="addSp delSp modSp add del mod">
         <pc:chgData name="Sana Belguith" userId="edaa0afb-4621-4165-af1d-05ed505f7999" providerId="ADAL" clId="{10F9F129-592B-40F1-997D-F487E669D3CB}" dt="2022-11-16T14:08:05.173" v="264" actId="47"/>
@@ -3464,30 +879,6 @@
           <pc:docMk/>
           <pc:sldMk cId="471557899" sldId="384"/>
         </pc:sldMkLst>
-        <pc:spChg chg="del">
-          <ac:chgData name="Sana Belguith" userId="edaa0afb-4621-4165-af1d-05ed505f7999" providerId="ADAL" clId="{10F9F129-592B-40F1-997D-F487E669D3CB}" dt="2022-11-16T14:07:40.743" v="258" actId="478"/>
-          <ac:spMkLst>
-            <pc:docMk/>
-            <pc:sldMk cId="471557899" sldId="384"/>
-            <ac:spMk id="2" creationId="{FD20298F-751E-4965-BF45-C1A2E822F6D9}"/>
-          </ac:spMkLst>
-        </pc:spChg>
-        <pc:spChg chg="add del mod">
-          <ac:chgData name="Sana Belguith" userId="edaa0afb-4621-4165-af1d-05ed505f7999" providerId="ADAL" clId="{10F9F129-592B-40F1-997D-F487E669D3CB}" dt="2022-11-16T14:07:42.955" v="259" actId="478"/>
-          <ac:spMkLst>
-            <pc:docMk/>
-            <pc:sldMk cId="471557899" sldId="384"/>
-            <ac:spMk id="6" creationId="{0C2B88D1-D7FF-F2AA-A9DF-66F3A06A6C83}"/>
-          </ac:spMkLst>
-        </pc:spChg>
-        <pc:spChg chg="add mod">
-          <ac:chgData name="Sana Belguith" userId="edaa0afb-4621-4165-af1d-05ed505f7999" providerId="ADAL" clId="{10F9F129-592B-40F1-997D-F487E669D3CB}" dt="2022-11-16T14:07:43.323" v="260"/>
-          <ac:spMkLst>
-            <pc:docMk/>
-            <pc:sldMk cId="471557899" sldId="384"/>
-            <ac:spMk id="7" creationId="{3FFCA5B7-06A1-8B82-5FD0-5839094BAAD4}"/>
-          </ac:spMkLst>
-        </pc:spChg>
       </pc:sldChg>
       <pc:sldChg chg="modSp add del mod">
         <pc:chgData name="Sana Belguith" userId="edaa0afb-4621-4165-af1d-05ed505f7999" providerId="ADAL" clId="{10F9F129-592B-40F1-997D-F487E669D3CB}" dt="2022-11-16T14:41:45.134" v="278" actId="47"/>
@@ -3495,14 +886,6 @@
           <pc:docMk/>
           <pc:sldMk cId="3438766355" sldId="385"/>
         </pc:sldMkLst>
-        <pc:spChg chg="mod">
-          <ac:chgData name="Sana Belguith" userId="edaa0afb-4621-4165-af1d-05ed505f7999" providerId="ADAL" clId="{10F9F129-592B-40F1-997D-F487E669D3CB}" dt="2022-11-16T14:08:32.746" v="270" actId="1076"/>
-          <ac:spMkLst>
-            <pc:docMk/>
-            <pc:sldMk cId="3438766355" sldId="385"/>
-            <ac:spMk id="2" creationId="{FD20298F-751E-4965-BF45-C1A2E822F6D9}"/>
-          </ac:spMkLst>
-        </pc:spChg>
       </pc:sldChg>
       <pc:sldChg chg="addSp delSp modSp add del mod">
         <pc:chgData name="Sana Belguith" userId="edaa0afb-4621-4165-af1d-05ed505f7999" providerId="ADAL" clId="{10F9F129-592B-40F1-997D-F487E669D3CB}" dt="2022-11-16T14:08:18.378" v="265" actId="47"/>
@@ -3510,30 +893,6 @@
           <pc:docMk/>
           <pc:sldMk cId="3701396348" sldId="386"/>
         </pc:sldMkLst>
-        <pc:spChg chg="del">
-          <ac:chgData name="Sana Belguith" userId="edaa0afb-4621-4165-af1d-05ed505f7999" providerId="ADAL" clId="{10F9F129-592B-40F1-997D-F487E669D3CB}" dt="2022-11-16T14:07:58.806" v="261" actId="478"/>
-          <ac:spMkLst>
-            <pc:docMk/>
-            <pc:sldMk cId="3701396348" sldId="386"/>
-            <ac:spMk id="2" creationId="{FD20298F-751E-4965-BF45-C1A2E822F6D9}"/>
-          </ac:spMkLst>
-        </pc:spChg>
-        <pc:spChg chg="add del mod">
-          <ac:chgData name="Sana Belguith" userId="edaa0afb-4621-4165-af1d-05ed505f7999" providerId="ADAL" clId="{10F9F129-592B-40F1-997D-F487E669D3CB}" dt="2022-11-16T14:08:01.180" v="262" actId="478"/>
-          <ac:spMkLst>
-            <pc:docMk/>
-            <pc:sldMk cId="3701396348" sldId="386"/>
-            <ac:spMk id="10" creationId="{6FDA8AD4-CC35-AEB2-77C0-8E2D501D72CE}"/>
-          </ac:spMkLst>
-        </pc:spChg>
-        <pc:spChg chg="add mod">
-          <ac:chgData name="Sana Belguith" userId="edaa0afb-4621-4165-af1d-05ed505f7999" providerId="ADAL" clId="{10F9F129-592B-40F1-997D-F487E669D3CB}" dt="2022-11-16T14:08:01.494" v="263"/>
-          <ac:spMkLst>
-            <pc:docMk/>
-            <pc:sldMk cId="3701396348" sldId="386"/>
-            <ac:spMk id="11" creationId="{9DFF2DD8-8CDA-805A-6FEA-EADA2AE95F32}"/>
-          </ac:spMkLst>
-        </pc:spChg>
       </pc:sldChg>
       <pc:sldChg chg="modSp add del mod">
         <pc:chgData name="Sana Belguith" userId="edaa0afb-4621-4165-af1d-05ed505f7999" providerId="ADAL" clId="{10F9F129-592B-40F1-997D-F487E669D3CB}" dt="2022-11-16T14:41:45.134" v="278" actId="47"/>
@@ -3541,14 +900,6 @@
           <pc:docMk/>
           <pc:sldMk cId="3467758433" sldId="387"/>
         </pc:sldMkLst>
-        <pc:spChg chg="mod">
-          <ac:chgData name="Sana Belguith" userId="edaa0afb-4621-4165-af1d-05ed505f7999" providerId="ADAL" clId="{10F9F129-592B-40F1-997D-F487E669D3CB}" dt="2022-11-16T14:08:42.754" v="273" actId="1076"/>
-          <ac:spMkLst>
-            <pc:docMk/>
-            <pc:sldMk cId="3467758433" sldId="387"/>
-            <ac:spMk id="2" creationId="{FD20298F-751E-4965-BF45-C1A2E822F6D9}"/>
-          </ac:spMkLst>
-        </pc:spChg>
       </pc:sldChg>
       <pc:sldChg chg="delSp modSp add del mod">
         <pc:chgData name="Sana Belguith" userId="edaa0afb-4621-4165-af1d-05ed505f7999" providerId="ADAL" clId="{10F9F129-592B-40F1-997D-F487E669D3CB}" dt="2022-11-16T14:46:34.271" v="287" actId="47"/>
@@ -3556,22 +907,6 @@
           <pc:docMk/>
           <pc:sldMk cId="4276838678" sldId="388"/>
         </pc:sldMkLst>
-        <pc:spChg chg="mod">
-          <ac:chgData name="Sana Belguith" userId="edaa0afb-4621-4165-af1d-05ed505f7999" providerId="ADAL" clId="{10F9F129-592B-40F1-997D-F487E669D3CB}" dt="2022-11-16T14:08:52.393" v="276" actId="1076"/>
-          <ac:spMkLst>
-            <pc:docMk/>
-            <pc:sldMk cId="4276838678" sldId="388"/>
-            <ac:spMk id="2" creationId="{FD20298F-751E-4965-BF45-C1A2E822F6D9}"/>
-          </ac:spMkLst>
-        </pc:spChg>
-        <pc:spChg chg="del">
-          <ac:chgData name="Sana Belguith" userId="edaa0afb-4621-4165-af1d-05ed505f7999" providerId="ADAL" clId="{10F9F129-592B-40F1-997D-F487E669D3CB}" dt="2022-11-16T14:41:47.612" v="279" actId="478"/>
-          <ac:spMkLst>
-            <pc:docMk/>
-            <pc:sldMk cId="4276838678" sldId="388"/>
-            <ac:spMk id="5" creationId="{2C231BF0-3B23-4702-BBC3-E8C847793AFF}"/>
-          </ac:spMkLst>
-        </pc:spChg>
       </pc:sldChg>
       <pc:sldChg chg="modSp add del mod">
         <pc:chgData name="Sana Belguith" userId="edaa0afb-4621-4165-af1d-05ed505f7999" providerId="ADAL" clId="{10F9F129-592B-40F1-997D-F487E669D3CB}" dt="2022-11-16T14:09:08.277" v="277" actId="47"/>
@@ -3579,14 +914,6 @@
           <pc:docMk/>
           <pc:sldMk cId="2302777902" sldId="389"/>
         </pc:sldMkLst>
-        <pc:spChg chg="mod">
-          <ac:chgData name="Sana Belguith" userId="edaa0afb-4621-4165-af1d-05ed505f7999" providerId="ADAL" clId="{10F9F129-592B-40F1-997D-F487E669D3CB}" dt="2022-11-16T13:45:44.140" v="6" actId="27636"/>
-          <ac:spMkLst>
-            <pc:docMk/>
-            <pc:sldMk cId="2302777902" sldId="389"/>
-            <ac:spMk id="4" creationId="{F42BC318-8476-4C57-BE9D-DDA97AC344C5}"/>
-          </ac:spMkLst>
-        </pc:spChg>
       </pc:sldChg>
       <pc:sldChg chg="modSp add del mod">
         <pc:chgData name="Sana Belguith" userId="edaa0afb-4621-4165-af1d-05ed505f7999" providerId="ADAL" clId="{10F9F129-592B-40F1-997D-F487E669D3CB}" dt="2022-11-17T10:28:14.992" v="493" actId="47"/>
@@ -3594,22 +921,6 @@
           <pc:docMk/>
           <pc:sldMk cId="677847710" sldId="390"/>
         </pc:sldMkLst>
-        <pc:spChg chg="mod">
-          <ac:chgData name="Sana Belguith" userId="edaa0afb-4621-4165-af1d-05ed505f7999" providerId="ADAL" clId="{10F9F129-592B-40F1-997D-F487E669D3CB}" dt="2022-11-16T14:42:02.018" v="283" actId="1076"/>
-          <ac:spMkLst>
-            <pc:docMk/>
-            <pc:sldMk cId="677847710" sldId="390"/>
-            <ac:spMk id="2" creationId="{E96720F4-7F28-4743-B64E-132E34A678C9}"/>
-          </ac:spMkLst>
-        </pc:spChg>
-        <pc:spChg chg="mod">
-          <ac:chgData name="Sana Belguith" userId="edaa0afb-4621-4165-af1d-05ed505f7999" providerId="ADAL" clId="{10F9F129-592B-40F1-997D-F487E669D3CB}" dt="2022-11-16T14:42:15.188" v="286" actId="27636"/>
-          <ac:spMkLst>
-            <pc:docMk/>
-            <pc:sldMk cId="677847710" sldId="390"/>
-            <ac:spMk id="3" creationId="{376EBF4C-E251-4773-A1D4-FBD37762AA4E}"/>
-          </ac:spMkLst>
-        </pc:spChg>
       </pc:sldChg>
       <pc:sldChg chg="modSp add mod">
         <pc:chgData name="Sana Belguith" userId="edaa0afb-4621-4165-af1d-05ed505f7999" providerId="ADAL" clId="{10F9F129-592B-40F1-997D-F487E669D3CB}" dt="2022-11-16T14:47:08.728" v="296" actId="2711"/>
@@ -3617,22 +928,6 @@
           <pc:docMk/>
           <pc:sldMk cId="2292515070" sldId="391"/>
         </pc:sldMkLst>
-        <pc:spChg chg="mod">
-          <ac:chgData name="Sana Belguith" userId="edaa0afb-4621-4165-af1d-05ed505f7999" providerId="ADAL" clId="{10F9F129-592B-40F1-997D-F487E669D3CB}" dt="2022-11-16T14:47:02.467" v="294" actId="14100"/>
-          <ac:spMkLst>
-            <pc:docMk/>
-            <pc:sldMk cId="2292515070" sldId="391"/>
-            <ac:spMk id="2" creationId="{CFE8D330-2F7C-4286-980E-D550D354917F}"/>
-          </ac:spMkLst>
-        </pc:spChg>
-        <pc:spChg chg="mod">
-          <ac:chgData name="Sana Belguith" userId="edaa0afb-4621-4165-af1d-05ed505f7999" providerId="ADAL" clId="{10F9F129-592B-40F1-997D-F487E669D3CB}" dt="2022-11-16T14:47:08.728" v="296" actId="2711"/>
-          <ac:spMkLst>
-            <pc:docMk/>
-            <pc:sldMk cId="2292515070" sldId="391"/>
-            <ac:spMk id="3" creationId="{B70F0FAC-325C-495F-B6AF-16BDA23DDB16}"/>
-          </ac:spMkLst>
-        </pc:spChg>
       </pc:sldChg>
       <pc:sldChg chg="modSp add mod">
         <pc:chgData name="Sana Belguith" userId="edaa0afb-4621-4165-af1d-05ed505f7999" providerId="ADAL" clId="{10F9F129-592B-40F1-997D-F487E669D3CB}" dt="2022-11-16T14:56:13.255" v="315" actId="108"/>
@@ -3640,22 +935,6 @@
           <pc:docMk/>
           <pc:sldMk cId="2138662408" sldId="392"/>
         </pc:sldMkLst>
-        <pc:spChg chg="mod">
-          <ac:chgData name="Sana Belguith" userId="edaa0afb-4621-4165-af1d-05ed505f7999" providerId="ADAL" clId="{10F9F129-592B-40F1-997D-F487E669D3CB}" dt="2022-11-16T14:53:58.020" v="302" actId="1076"/>
-          <ac:spMkLst>
-            <pc:docMk/>
-            <pc:sldMk cId="2138662408" sldId="392"/>
-            <ac:spMk id="2" creationId="{CFE8D330-2F7C-4286-980E-D550D354917F}"/>
-          </ac:spMkLst>
-        </pc:spChg>
-        <pc:spChg chg="mod">
-          <ac:chgData name="Sana Belguith" userId="edaa0afb-4621-4165-af1d-05ed505f7999" providerId="ADAL" clId="{10F9F129-592B-40F1-997D-F487E669D3CB}" dt="2022-11-16T14:56:13.255" v="315" actId="108"/>
-          <ac:spMkLst>
-            <pc:docMk/>
-            <pc:sldMk cId="2138662408" sldId="392"/>
-            <ac:spMk id="3" creationId="{B70F0FAC-325C-495F-B6AF-16BDA23DDB16}"/>
-          </ac:spMkLst>
-        </pc:spChg>
       </pc:sldChg>
       <pc:sldChg chg="modSp add del mod">
         <pc:chgData name="Sana Belguith" userId="edaa0afb-4621-4165-af1d-05ed505f7999" providerId="ADAL" clId="{10F9F129-592B-40F1-997D-F487E669D3CB}" dt="2022-11-17T13:29:43.465" v="644" actId="47"/>
@@ -3663,22 +942,6 @@
           <pc:docMk/>
           <pc:sldMk cId="3914365444" sldId="393"/>
         </pc:sldMkLst>
-        <pc:spChg chg="mod">
-          <ac:chgData name="Sana Belguith" userId="edaa0afb-4621-4165-af1d-05ed505f7999" providerId="ADAL" clId="{10F9F129-592B-40F1-997D-F487E669D3CB}" dt="2022-11-16T14:54:49.436" v="310" actId="1076"/>
-          <ac:spMkLst>
-            <pc:docMk/>
-            <pc:sldMk cId="3914365444" sldId="393"/>
-            <ac:spMk id="2" creationId="{CFE8D330-2F7C-4286-980E-D550D354917F}"/>
-          </ac:spMkLst>
-        </pc:spChg>
-        <pc:spChg chg="mod">
-          <ac:chgData name="Sana Belguith" userId="edaa0afb-4621-4165-af1d-05ed505f7999" providerId="ADAL" clId="{10F9F129-592B-40F1-997D-F487E669D3CB}" dt="2022-11-16T14:56:20.021" v="317" actId="108"/>
-          <ac:spMkLst>
-            <pc:docMk/>
-            <pc:sldMk cId="3914365444" sldId="393"/>
-            <ac:spMk id="3" creationId="{B70F0FAC-325C-495F-B6AF-16BDA23DDB16}"/>
-          </ac:spMkLst>
-        </pc:spChg>
       </pc:sldChg>
       <pc:sldChg chg="modSp add del mod">
         <pc:chgData name="Sana Belguith" userId="edaa0afb-4621-4165-af1d-05ed505f7999" providerId="ADAL" clId="{10F9F129-592B-40F1-997D-F487E669D3CB}" dt="2022-11-17T13:29:43.465" v="644" actId="47"/>
@@ -3686,22 +949,6 @@
           <pc:docMk/>
           <pc:sldMk cId="3483910523" sldId="394"/>
         </pc:sldMkLst>
-        <pc:spChg chg="mod">
-          <ac:chgData name="Sana Belguith" userId="edaa0afb-4621-4165-af1d-05ed505f7999" providerId="ADAL" clId="{10F9F129-592B-40F1-997D-F487E669D3CB}" dt="2022-11-16T14:55:57.812" v="314" actId="1076"/>
-          <ac:spMkLst>
-            <pc:docMk/>
-            <pc:sldMk cId="3483910523" sldId="394"/>
-            <ac:spMk id="2" creationId="{CFE8D330-2F7C-4286-980E-D550D354917F}"/>
-          </ac:spMkLst>
-        </pc:spChg>
-        <pc:spChg chg="mod">
-          <ac:chgData name="Sana Belguith" userId="edaa0afb-4621-4165-af1d-05ed505f7999" providerId="ADAL" clId="{10F9F129-592B-40F1-997D-F487E669D3CB}" dt="2022-11-16T14:56:23.877" v="318" actId="108"/>
-          <ac:spMkLst>
-            <pc:docMk/>
-            <pc:sldMk cId="3483910523" sldId="394"/>
-            <ac:spMk id="3" creationId="{B70F0FAC-325C-495F-B6AF-16BDA23DDB16}"/>
-          </ac:spMkLst>
-        </pc:spChg>
       </pc:sldChg>
       <pc:sldChg chg="addSp delSp modSp add mod">
         <pc:chgData name="Sana Belguith" userId="edaa0afb-4621-4165-af1d-05ed505f7999" providerId="ADAL" clId="{10F9F129-592B-40F1-997D-F487E669D3CB}" dt="2022-11-16T14:56:41.226" v="322"/>
@@ -3709,38 +956,6 @@
           <pc:docMk/>
           <pc:sldMk cId="1805425739" sldId="395"/>
         </pc:sldMkLst>
-        <pc:spChg chg="del">
-          <ac:chgData name="Sana Belguith" userId="edaa0afb-4621-4165-af1d-05ed505f7999" providerId="ADAL" clId="{10F9F129-592B-40F1-997D-F487E669D3CB}" dt="2022-11-16T14:56:38.593" v="320" actId="478"/>
-          <ac:spMkLst>
-            <pc:docMk/>
-            <pc:sldMk cId="1805425739" sldId="395"/>
-            <ac:spMk id="2" creationId="{CFE8D330-2F7C-4286-980E-D550D354917F}"/>
-          </ac:spMkLst>
-        </pc:spChg>
-        <pc:spChg chg="mod">
-          <ac:chgData name="Sana Belguith" userId="edaa0afb-4621-4165-af1d-05ed505f7999" providerId="ADAL" clId="{10F9F129-592B-40F1-997D-F487E669D3CB}" dt="2022-11-16T14:56:29.868" v="319" actId="108"/>
-          <ac:spMkLst>
-            <pc:docMk/>
-            <pc:sldMk cId="1805425739" sldId="395"/>
-            <ac:spMk id="3" creationId="{B70F0FAC-325C-495F-B6AF-16BDA23DDB16}"/>
-          </ac:spMkLst>
-        </pc:spChg>
-        <pc:spChg chg="add del mod">
-          <ac:chgData name="Sana Belguith" userId="edaa0afb-4621-4165-af1d-05ed505f7999" providerId="ADAL" clId="{10F9F129-592B-40F1-997D-F487E669D3CB}" dt="2022-11-16T14:56:40.500" v="321" actId="478"/>
-          <ac:spMkLst>
-            <pc:docMk/>
-            <pc:sldMk cId="1805425739" sldId="395"/>
-            <ac:spMk id="16" creationId="{B4504493-954A-A015-8FA0-634821B5E72F}"/>
-          </ac:spMkLst>
-        </pc:spChg>
-        <pc:spChg chg="add mod">
-          <ac:chgData name="Sana Belguith" userId="edaa0afb-4621-4165-af1d-05ed505f7999" providerId="ADAL" clId="{10F9F129-592B-40F1-997D-F487E669D3CB}" dt="2022-11-16T14:56:41.226" v="322"/>
-          <ac:spMkLst>
-            <pc:docMk/>
-            <pc:sldMk cId="1805425739" sldId="395"/>
-            <ac:spMk id="17" creationId="{F03B5026-EE00-67A6-49C8-1613E312BE33}"/>
-          </ac:spMkLst>
-        </pc:spChg>
       </pc:sldChg>
       <pc:sldChg chg="delSp modSp add mod">
         <pc:chgData name="Sana Belguith" userId="edaa0afb-4621-4165-af1d-05ed505f7999" providerId="ADAL" clId="{10F9F129-592B-40F1-997D-F487E669D3CB}" dt="2022-11-16T14:58:59.196" v="328" actId="108"/>
@@ -3748,30 +963,6 @@
           <pc:docMk/>
           <pc:sldMk cId="3218059063" sldId="396"/>
         </pc:sldMkLst>
-        <pc:spChg chg="mod">
-          <ac:chgData name="Sana Belguith" userId="edaa0afb-4621-4165-af1d-05ed505f7999" providerId="ADAL" clId="{10F9F129-592B-40F1-997D-F487E669D3CB}" dt="2022-11-16T14:58:54.715" v="327" actId="14100"/>
-          <ac:spMkLst>
-            <pc:docMk/>
-            <pc:sldMk cId="3218059063" sldId="396"/>
-            <ac:spMk id="2" creationId="{CFE8D330-2F7C-4286-980E-D550D354917F}"/>
-          </ac:spMkLst>
-        </pc:spChg>
-        <pc:spChg chg="mod">
-          <ac:chgData name="Sana Belguith" userId="edaa0afb-4621-4165-af1d-05ed505f7999" providerId="ADAL" clId="{10F9F129-592B-40F1-997D-F487E669D3CB}" dt="2022-11-16T14:58:59.196" v="328" actId="108"/>
-          <ac:spMkLst>
-            <pc:docMk/>
-            <pc:sldMk cId="3218059063" sldId="396"/>
-            <ac:spMk id="3" creationId="{B70F0FAC-325C-495F-B6AF-16BDA23DDB16}"/>
-          </ac:spMkLst>
-        </pc:spChg>
-        <pc:spChg chg="del">
-          <ac:chgData name="Sana Belguith" userId="edaa0afb-4621-4165-af1d-05ed505f7999" providerId="ADAL" clId="{10F9F129-592B-40F1-997D-F487E669D3CB}" dt="2022-11-16T14:58:42.503" v="323" actId="478"/>
-          <ac:spMkLst>
-            <pc:docMk/>
-            <pc:sldMk cId="3218059063" sldId="396"/>
-            <ac:spMk id="14" creationId="{F28BCB5B-EC54-4551-B818-7A4C246E86F2}"/>
-          </ac:spMkLst>
-        </pc:spChg>
       </pc:sldChg>
       <pc:sldChg chg="modSp add mod">
         <pc:chgData name="Sana Belguith" userId="edaa0afb-4621-4165-af1d-05ed505f7999" providerId="ADAL" clId="{10F9F129-592B-40F1-997D-F487E669D3CB}" dt="2022-11-16T14:59:10.570" v="329" actId="2711"/>
@@ -3779,14 +970,6 @@
           <pc:docMk/>
           <pc:sldMk cId="3707207807" sldId="397"/>
         </pc:sldMkLst>
-        <pc:spChg chg="mod">
-          <ac:chgData name="Sana Belguith" userId="edaa0afb-4621-4165-af1d-05ed505f7999" providerId="ADAL" clId="{10F9F129-592B-40F1-997D-F487E669D3CB}" dt="2022-11-16T14:59:10.570" v="329" actId="2711"/>
-          <ac:spMkLst>
-            <pc:docMk/>
-            <pc:sldMk cId="3707207807" sldId="397"/>
-            <ac:spMk id="4" creationId="{064D8D26-B133-4846-8DD0-D46F81284C5A}"/>
-          </ac:spMkLst>
-        </pc:spChg>
       </pc:sldChg>
       <pc:sldChg chg="modSp add mod">
         <pc:chgData name="Sana Belguith" userId="edaa0afb-4621-4165-af1d-05ed505f7999" providerId="ADAL" clId="{10F9F129-592B-40F1-997D-F487E669D3CB}" dt="2022-11-16T15:41:49.526" v="358" actId="1076"/>
@@ -3794,14 +977,6 @@
           <pc:docMk/>
           <pc:sldMk cId="2185184214" sldId="398"/>
         </pc:sldMkLst>
-        <pc:spChg chg="mod">
-          <ac:chgData name="Sana Belguith" userId="edaa0afb-4621-4165-af1d-05ed505f7999" providerId="ADAL" clId="{10F9F129-592B-40F1-997D-F487E669D3CB}" dt="2022-11-16T15:41:49.526" v="358" actId="1076"/>
-          <ac:spMkLst>
-            <pc:docMk/>
-            <pc:sldMk cId="2185184214" sldId="398"/>
-            <ac:spMk id="2" creationId="{9F7BEBEC-72D4-409B-B898-FC3534080773}"/>
-          </ac:spMkLst>
-        </pc:spChg>
       </pc:sldChg>
       <pc:sldChg chg="modSp add mod">
         <pc:chgData name="Sana Belguith" userId="edaa0afb-4621-4165-af1d-05ed505f7999" providerId="ADAL" clId="{10F9F129-592B-40F1-997D-F487E669D3CB}" dt="2022-11-16T15:41:57.343" v="361" actId="1076"/>
@@ -3809,14 +984,6 @@
           <pc:docMk/>
           <pc:sldMk cId="619251659" sldId="399"/>
         </pc:sldMkLst>
-        <pc:spChg chg="mod">
-          <ac:chgData name="Sana Belguith" userId="edaa0afb-4621-4165-af1d-05ed505f7999" providerId="ADAL" clId="{10F9F129-592B-40F1-997D-F487E669D3CB}" dt="2022-11-16T15:41:57.343" v="361" actId="1076"/>
-          <ac:spMkLst>
-            <pc:docMk/>
-            <pc:sldMk cId="619251659" sldId="399"/>
-            <ac:spMk id="2" creationId="{9F7BEBEC-72D4-409B-B898-FC3534080773}"/>
-          </ac:spMkLst>
-        </pc:spChg>
       </pc:sldChg>
       <pc:sldChg chg="modSp add del mod">
         <pc:chgData name="Sana Belguith" userId="edaa0afb-4621-4165-af1d-05ed505f7999" providerId="ADAL" clId="{10F9F129-592B-40F1-997D-F487E669D3CB}" dt="2022-11-17T13:42:20.037" v="645" actId="47"/>
@@ -3824,14 +991,6 @@
           <pc:docMk/>
           <pc:sldMk cId="2047062216" sldId="400"/>
         </pc:sldMkLst>
-        <pc:spChg chg="mod">
-          <ac:chgData name="Sana Belguith" userId="edaa0afb-4621-4165-af1d-05ed505f7999" providerId="ADAL" clId="{10F9F129-592B-40F1-997D-F487E669D3CB}" dt="2022-11-16T15:42:07.982" v="365" actId="1076"/>
-          <ac:spMkLst>
-            <pc:docMk/>
-            <pc:sldMk cId="2047062216" sldId="400"/>
-            <ac:spMk id="2" creationId="{9F7BEBEC-72D4-409B-B898-FC3534080773}"/>
-          </ac:spMkLst>
-        </pc:spChg>
       </pc:sldChg>
       <pc:sldChg chg="modSp add mod">
         <pc:chgData name="Sana Belguith" userId="edaa0afb-4621-4165-af1d-05ed505f7999" providerId="ADAL" clId="{10F9F129-592B-40F1-997D-F487E669D3CB}" dt="2022-11-17T10:36:35.754" v="526" actId="108"/>
@@ -3839,22 +998,6 @@
           <pc:docMk/>
           <pc:sldMk cId="1873631347" sldId="401"/>
         </pc:sldMkLst>
-        <pc:spChg chg="mod">
-          <ac:chgData name="Sana Belguith" userId="edaa0afb-4621-4165-af1d-05ed505f7999" providerId="ADAL" clId="{10F9F129-592B-40F1-997D-F487E669D3CB}" dt="2022-11-16T15:42:17.710" v="368" actId="1076"/>
-          <ac:spMkLst>
-            <pc:docMk/>
-            <pc:sldMk cId="1873631347" sldId="401"/>
-            <ac:spMk id="2" creationId="{142A3A08-2DA3-456E-84D5-13E0FF388A8E}"/>
-          </ac:spMkLst>
-        </pc:spChg>
-        <pc:spChg chg="mod">
-          <ac:chgData name="Sana Belguith" userId="edaa0afb-4621-4165-af1d-05ed505f7999" providerId="ADAL" clId="{10F9F129-592B-40F1-997D-F487E669D3CB}" dt="2022-11-17T10:36:35.754" v="526" actId="108"/>
-          <ac:spMkLst>
-            <pc:docMk/>
-            <pc:sldMk cId="1873631347" sldId="401"/>
-            <ac:spMk id="3" creationId="{875E7498-990B-47BC-8629-AE2C57E9FAEF}"/>
-          </ac:spMkLst>
-        </pc:spChg>
       </pc:sldChg>
       <pc:sldChg chg="modSp add mod">
         <pc:chgData name="Sana Belguith" userId="edaa0afb-4621-4165-af1d-05ed505f7999" providerId="ADAL" clId="{10F9F129-592B-40F1-997D-F487E669D3CB}" dt="2022-11-17T10:37:53.101" v="531" actId="108"/>
@@ -3862,22 +1005,6 @@
           <pc:docMk/>
           <pc:sldMk cId="3554661473" sldId="402"/>
         </pc:sldMkLst>
-        <pc:spChg chg="mod">
-          <ac:chgData name="Sana Belguith" userId="edaa0afb-4621-4165-af1d-05ed505f7999" providerId="ADAL" clId="{10F9F129-592B-40F1-997D-F487E669D3CB}" dt="2022-11-16T15:42:46.110" v="378" actId="1076"/>
-          <ac:spMkLst>
-            <pc:docMk/>
-            <pc:sldMk cId="3554661473" sldId="402"/>
-            <ac:spMk id="2" creationId="{142A3A08-2DA3-456E-84D5-13E0FF388A8E}"/>
-          </ac:spMkLst>
-        </pc:spChg>
-        <pc:spChg chg="mod">
-          <ac:chgData name="Sana Belguith" userId="edaa0afb-4621-4165-af1d-05ed505f7999" providerId="ADAL" clId="{10F9F129-592B-40F1-997D-F487E669D3CB}" dt="2022-11-17T10:37:53.101" v="531" actId="108"/>
-          <ac:spMkLst>
-            <pc:docMk/>
-            <pc:sldMk cId="3554661473" sldId="402"/>
-            <ac:spMk id="3" creationId="{875E7498-990B-47BC-8629-AE2C57E9FAEF}"/>
-          </ac:spMkLst>
-        </pc:spChg>
       </pc:sldChg>
       <pc:sldChg chg="modSp add mod">
         <pc:chgData name="Sana Belguith" userId="edaa0afb-4621-4165-af1d-05ed505f7999" providerId="ADAL" clId="{10F9F129-592B-40F1-997D-F487E669D3CB}" dt="2022-11-17T13:45:30.065" v="654" actId="1076"/>
@@ -3885,54 +1012,6 @@
           <pc:docMk/>
           <pc:sldMk cId="3520830451" sldId="403"/>
         </pc:sldMkLst>
-        <pc:spChg chg="mod">
-          <ac:chgData name="Sana Belguith" userId="edaa0afb-4621-4165-af1d-05ed505f7999" providerId="ADAL" clId="{10F9F129-592B-40F1-997D-F487E669D3CB}" dt="2022-11-16T15:42:28.326" v="372" actId="14100"/>
-          <ac:spMkLst>
-            <pc:docMk/>
-            <pc:sldMk cId="3520830451" sldId="403"/>
-            <ac:spMk id="2" creationId="{96168E8B-FDAB-4007-AD31-1098EA9F853B}"/>
-          </ac:spMkLst>
-        </pc:spChg>
-        <pc:spChg chg="mod">
-          <ac:chgData name="Sana Belguith" userId="edaa0afb-4621-4165-af1d-05ed505f7999" providerId="ADAL" clId="{10F9F129-592B-40F1-997D-F487E669D3CB}" dt="2022-11-17T10:36:39.464" v="527" actId="108"/>
-          <ac:spMkLst>
-            <pc:docMk/>
-            <pc:sldMk cId="3520830451" sldId="403"/>
-            <ac:spMk id="3" creationId="{91CFFCC4-371E-46C1-B90F-B8421470918A}"/>
-          </ac:spMkLst>
-        </pc:spChg>
-        <pc:spChg chg="mod">
-          <ac:chgData name="Sana Belguith" userId="edaa0afb-4621-4165-af1d-05ed505f7999" providerId="ADAL" clId="{10F9F129-592B-40F1-997D-F487E669D3CB}" dt="2022-11-17T13:42:39.722" v="646" actId="1076"/>
-          <ac:spMkLst>
-            <pc:docMk/>
-            <pc:sldMk cId="3520830451" sldId="403"/>
-            <ac:spMk id="7" creationId="{851CA119-66F5-4A21-9184-B1DA2B75B93C}"/>
-          </ac:spMkLst>
-        </pc:spChg>
-        <pc:spChg chg="mod">
-          <ac:chgData name="Sana Belguith" userId="edaa0afb-4621-4165-af1d-05ed505f7999" providerId="ADAL" clId="{10F9F129-592B-40F1-997D-F487E669D3CB}" dt="2022-11-17T13:45:30.065" v="654" actId="1076"/>
-          <ac:spMkLst>
-            <pc:docMk/>
-            <pc:sldMk cId="3520830451" sldId="403"/>
-            <ac:spMk id="11" creationId="{E23F5DDB-182B-40A7-A5EA-4EFB135AFDD1}"/>
-          </ac:spMkLst>
-        </pc:spChg>
-        <pc:cxnChg chg="mod">
-          <ac:chgData name="Sana Belguith" userId="edaa0afb-4621-4165-af1d-05ed505f7999" providerId="ADAL" clId="{10F9F129-592B-40F1-997D-F487E669D3CB}" dt="2022-11-17T13:42:52.400" v="652" actId="14100"/>
-          <ac:cxnSpMkLst>
-            <pc:docMk/>
-            <pc:sldMk cId="3520830451" sldId="403"/>
-            <ac:cxnSpMk id="6" creationId="{3862EDFE-9516-44A1-A835-7689948B79E0}"/>
-          </ac:cxnSpMkLst>
-        </pc:cxnChg>
-        <pc:cxnChg chg="mod">
-          <ac:chgData name="Sana Belguith" userId="edaa0afb-4621-4165-af1d-05ed505f7999" providerId="ADAL" clId="{10F9F129-592B-40F1-997D-F487E669D3CB}" dt="2022-11-17T13:42:49.940" v="651" actId="14100"/>
-          <ac:cxnSpMkLst>
-            <pc:docMk/>
-            <pc:sldMk cId="3520830451" sldId="403"/>
-            <ac:cxnSpMk id="10" creationId="{84FB1D8C-E60A-48B6-8488-0E548980A2D1}"/>
-          </ac:cxnSpMkLst>
-        </pc:cxnChg>
       </pc:sldChg>
       <pc:sldChg chg="modSp add mod">
         <pc:chgData name="Sana Belguith" userId="edaa0afb-4621-4165-af1d-05ed505f7999" providerId="ADAL" clId="{10F9F129-592B-40F1-997D-F487E669D3CB}" dt="2022-11-17T13:46:36.419" v="655" actId="20577"/>
@@ -3940,22 +1019,6 @@
           <pc:docMk/>
           <pc:sldMk cId="2401707025" sldId="404"/>
         </pc:sldMkLst>
-        <pc:spChg chg="mod">
-          <ac:chgData name="Sana Belguith" userId="edaa0afb-4621-4165-af1d-05ed505f7999" providerId="ADAL" clId="{10F9F129-592B-40F1-997D-F487E669D3CB}" dt="2022-11-16T15:42:53.710" v="381" actId="1076"/>
-          <ac:spMkLst>
-            <pc:docMk/>
-            <pc:sldMk cId="2401707025" sldId="404"/>
-            <ac:spMk id="2" creationId="{142A3A08-2DA3-456E-84D5-13E0FF388A8E}"/>
-          </ac:spMkLst>
-        </pc:spChg>
-        <pc:spChg chg="mod">
-          <ac:chgData name="Sana Belguith" userId="edaa0afb-4621-4165-af1d-05ed505f7999" providerId="ADAL" clId="{10F9F129-592B-40F1-997D-F487E669D3CB}" dt="2022-11-17T13:46:36.419" v="655" actId="20577"/>
-          <ac:spMkLst>
-            <pc:docMk/>
-            <pc:sldMk cId="2401707025" sldId="404"/>
-            <ac:spMk id="3" creationId="{875E7498-990B-47BC-8629-AE2C57E9FAEF}"/>
-          </ac:spMkLst>
-        </pc:spChg>
       </pc:sldChg>
       <pc:sldChg chg="modSp add mod">
         <pc:chgData name="Sana Belguith" userId="edaa0afb-4621-4165-af1d-05ed505f7999" providerId="ADAL" clId="{10F9F129-592B-40F1-997D-F487E669D3CB}" dt="2022-11-17T10:50:25.133" v="642" actId="5793"/>
@@ -3963,22 +1026,6 @@
           <pc:docMk/>
           <pc:sldMk cId="1422701018" sldId="405"/>
         </pc:sldMkLst>
-        <pc:spChg chg="mod">
-          <ac:chgData name="Sana Belguith" userId="edaa0afb-4621-4165-af1d-05ed505f7999" providerId="ADAL" clId="{10F9F129-592B-40F1-997D-F487E669D3CB}" dt="2022-11-16T15:42:38.398" v="375" actId="1076"/>
-          <ac:spMkLst>
-            <pc:docMk/>
-            <pc:sldMk cId="1422701018" sldId="405"/>
-            <ac:spMk id="2" creationId="{926E070E-67C2-4D61-B176-A38DECBAE594}"/>
-          </ac:spMkLst>
-        </pc:spChg>
-        <pc:spChg chg="mod">
-          <ac:chgData name="Sana Belguith" userId="edaa0afb-4621-4165-af1d-05ed505f7999" providerId="ADAL" clId="{10F9F129-592B-40F1-997D-F487E669D3CB}" dt="2022-11-17T10:50:25.133" v="642" actId="5793"/>
-          <ac:spMkLst>
-            <pc:docMk/>
-            <pc:sldMk cId="1422701018" sldId="405"/>
-            <ac:spMk id="3" creationId="{1B3BB7C3-4C73-4B5D-8400-0D626F6B3BEB}"/>
-          </ac:spMkLst>
-        </pc:spChg>
       </pc:sldChg>
       <pc:sldChg chg="modSp add mod">
         <pc:chgData name="Sana Belguith" userId="edaa0afb-4621-4165-af1d-05ed505f7999" providerId="ADAL" clId="{10F9F129-592B-40F1-997D-F487E669D3CB}" dt="2022-11-16T14:59:43.008" v="337" actId="255"/>
@@ -3986,22 +1033,6 @@
           <pc:docMk/>
           <pc:sldMk cId="3180966785" sldId="406"/>
         </pc:sldMkLst>
-        <pc:spChg chg="mod">
-          <ac:chgData name="Sana Belguith" userId="edaa0afb-4621-4165-af1d-05ed505f7999" providerId="ADAL" clId="{10F9F129-592B-40F1-997D-F487E669D3CB}" dt="2022-11-16T14:59:25.284" v="333" actId="1076"/>
-          <ac:spMkLst>
-            <pc:docMk/>
-            <pc:sldMk cId="3180966785" sldId="406"/>
-            <ac:spMk id="4" creationId="{49B93474-FFA6-4AD4-BF45-87AC7E83DD60}"/>
-          </ac:spMkLst>
-        </pc:spChg>
-        <pc:spChg chg="mod">
-          <ac:chgData name="Sana Belguith" userId="edaa0afb-4621-4165-af1d-05ed505f7999" providerId="ADAL" clId="{10F9F129-592B-40F1-997D-F487E669D3CB}" dt="2022-11-16T14:59:43.008" v="337" actId="255"/>
-          <ac:spMkLst>
-            <pc:docMk/>
-            <pc:sldMk cId="3180966785" sldId="406"/>
-            <ac:spMk id="5" creationId="{AF86CE86-6784-4E26-86F2-D097BA60047C}"/>
-          </ac:spMkLst>
-        </pc:spChg>
       </pc:sldChg>
       <pc:sldChg chg="modSp add mod">
         <pc:chgData name="Sana Belguith" userId="edaa0afb-4621-4165-af1d-05ed505f7999" providerId="ADAL" clId="{10F9F129-592B-40F1-997D-F487E669D3CB}" dt="2022-11-17T10:34:58.225" v="525" actId="20577"/>
@@ -4009,22 +1040,6 @@
           <pc:docMk/>
           <pc:sldMk cId="3416181727" sldId="407"/>
         </pc:sldMkLst>
-        <pc:spChg chg="mod">
-          <ac:chgData name="Sana Belguith" userId="edaa0afb-4621-4165-af1d-05ed505f7999" providerId="ADAL" clId="{10F9F129-592B-40F1-997D-F487E669D3CB}" dt="2022-11-16T14:59:59.012" v="342" actId="1076"/>
-          <ac:spMkLst>
-            <pc:docMk/>
-            <pc:sldMk cId="3416181727" sldId="407"/>
-            <ac:spMk id="2" creationId="{28D127E4-ADCC-412D-89FF-9446B8C4ABB9}"/>
-          </ac:spMkLst>
-        </pc:spChg>
-        <pc:spChg chg="mod">
-          <ac:chgData name="Sana Belguith" userId="edaa0afb-4621-4165-af1d-05ed505f7999" providerId="ADAL" clId="{10F9F129-592B-40F1-997D-F487E669D3CB}" dt="2022-11-17T10:34:58.225" v="525" actId="20577"/>
-          <ac:spMkLst>
-            <pc:docMk/>
-            <pc:sldMk cId="3416181727" sldId="407"/>
-            <ac:spMk id="3" creationId="{4C7B5F2A-3F89-4959-A826-CED97086B95D}"/>
-          </ac:spMkLst>
-        </pc:spChg>
       </pc:sldChg>
       <pc:sldChg chg="modSp add mod">
         <pc:chgData name="Sana Belguith" userId="edaa0afb-4621-4165-af1d-05ed505f7999" providerId="ADAL" clId="{10F9F129-592B-40F1-997D-F487E669D3CB}" dt="2022-11-16T15:41:02.286" v="346" actId="1076"/>
@@ -4032,14 +1047,6 @@
           <pc:docMk/>
           <pc:sldMk cId="1740167014" sldId="408"/>
         </pc:sldMkLst>
-        <pc:spChg chg="mod">
-          <ac:chgData name="Sana Belguith" userId="edaa0afb-4621-4165-af1d-05ed505f7999" providerId="ADAL" clId="{10F9F129-592B-40F1-997D-F487E669D3CB}" dt="2022-11-16T15:41:02.286" v="346" actId="1076"/>
-          <ac:spMkLst>
-            <pc:docMk/>
-            <pc:sldMk cId="1740167014" sldId="408"/>
-            <ac:spMk id="2" creationId="{9F7BEBEC-72D4-409B-B898-FC3534080773}"/>
-          </ac:spMkLst>
-        </pc:spChg>
       </pc:sldChg>
       <pc:sldChg chg="modSp add mod">
         <pc:chgData name="Sana Belguith" userId="edaa0afb-4621-4165-af1d-05ed505f7999" providerId="ADAL" clId="{10F9F129-592B-40F1-997D-F487E669D3CB}" dt="2022-11-16T15:41:09.229" v="349" actId="1076"/>
@@ -4047,14 +1054,6 @@
           <pc:docMk/>
           <pc:sldMk cId="3873782959" sldId="409"/>
         </pc:sldMkLst>
-        <pc:spChg chg="mod">
-          <ac:chgData name="Sana Belguith" userId="edaa0afb-4621-4165-af1d-05ed505f7999" providerId="ADAL" clId="{10F9F129-592B-40F1-997D-F487E669D3CB}" dt="2022-11-16T15:41:09.229" v="349" actId="1076"/>
-          <ac:spMkLst>
-            <pc:docMk/>
-            <pc:sldMk cId="3873782959" sldId="409"/>
-            <ac:spMk id="2" creationId="{9F7BEBEC-72D4-409B-B898-FC3534080773}"/>
-          </ac:spMkLst>
-        </pc:spChg>
       </pc:sldChg>
       <pc:sldChg chg="modSp add mod">
         <pc:chgData name="Sana Belguith" userId="edaa0afb-4621-4165-af1d-05ed505f7999" providerId="ADAL" clId="{10F9F129-592B-40F1-997D-F487E669D3CB}" dt="2022-11-16T15:41:28.486" v="352" actId="1076"/>
@@ -4062,14 +1061,6 @@
           <pc:docMk/>
           <pc:sldMk cId="389055588" sldId="410"/>
         </pc:sldMkLst>
-        <pc:spChg chg="mod">
-          <ac:chgData name="Sana Belguith" userId="edaa0afb-4621-4165-af1d-05ed505f7999" providerId="ADAL" clId="{10F9F129-592B-40F1-997D-F487E669D3CB}" dt="2022-11-16T15:41:28.486" v="352" actId="1076"/>
-          <ac:spMkLst>
-            <pc:docMk/>
-            <pc:sldMk cId="389055588" sldId="410"/>
-            <ac:spMk id="2" creationId="{9F7BEBEC-72D4-409B-B898-FC3534080773}"/>
-          </ac:spMkLst>
-        </pc:spChg>
       </pc:sldChg>
       <pc:sldChg chg="modSp add mod">
         <pc:chgData name="Sana Belguith" userId="edaa0afb-4621-4165-af1d-05ed505f7999" providerId="ADAL" clId="{10F9F129-592B-40F1-997D-F487E669D3CB}" dt="2022-11-16T15:41:36.462" v="355" actId="1076"/>
@@ -4077,14 +1068,6 @@
           <pc:docMk/>
           <pc:sldMk cId="3353666703" sldId="411"/>
         </pc:sldMkLst>
-        <pc:spChg chg="mod">
-          <ac:chgData name="Sana Belguith" userId="edaa0afb-4621-4165-af1d-05ed505f7999" providerId="ADAL" clId="{10F9F129-592B-40F1-997D-F487E669D3CB}" dt="2022-11-16T15:41:36.462" v="355" actId="1076"/>
-          <ac:spMkLst>
-            <pc:docMk/>
-            <pc:sldMk cId="3353666703" sldId="411"/>
-            <ac:spMk id="2" creationId="{9F7BEBEC-72D4-409B-B898-FC3534080773}"/>
-          </ac:spMkLst>
-        </pc:spChg>
       </pc:sldChg>
       <pc:sldChg chg="add del">
         <pc:chgData name="Sana Belguith" userId="edaa0afb-4621-4165-af1d-05ed505f7999" providerId="ADAL" clId="{10F9F129-592B-40F1-997D-F487E669D3CB}" dt="2022-11-17T10:37:44.330" v="530" actId="47"/>
@@ -4099,22 +1082,6 @@
           <pc:docMk/>
           <pc:sldMk cId="411279874" sldId="413"/>
         </pc:sldMkLst>
-        <pc:spChg chg="mod">
-          <ac:chgData name="Sana Belguith" userId="edaa0afb-4621-4165-af1d-05ed505f7999" providerId="ADAL" clId="{10F9F129-592B-40F1-997D-F487E669D3CB}" dt="2022-11-16T15:43:05.175" v="384" actId="1076"/>
-          <ac:spMkLst>
-            <pc:docMk/>
-            <pc:sldMk cId="411279874" sldId="413"/>
-            <ac:spMk id="4" creationId="{A9172DB5-5069-495C-8D1A-F07B1AE2DA41}"/>
-          </ac:spMkLst>
-        </pc:spChg>
-        <pc:spChg chg="mod">
-          <ac:chgData name="Sana Belguith" userId="edaa0afb-4621-4165-af1d-05ed505f7999" providerId="ADAL" clId="{10F9F129-592B-40F1-997D-F487E669D3CB}" dt="2022-11-16T13:45:44.182" v="12" actId="27636"/>
-          <ac:spMkLst>
-            <pc:docMk/>
-            <pc:sldMk cId="411279874" sldId="413"/>
-            <ac:spMk id="5" creationId="{313F7715-4CCD-49CD-A012-727352387FC0}"/>
-          </ac:spMkLst>
-        </pc:spChg>
       </pc:sldChg>
       <pc:sldChg chg="add">
         <pc:chgData name="Sana Belguith" userId="edaa0afb-4621-4165-af1d-05ed505f7999" providerId="ADAL" clId="{10F9F129-592B-40F1-997D-F487E669D3CB}" dt="2022-11-16T13:45:44.036" v="1"/>
@@ -4129,14 +1096,6 @@
           <pc:docMk/>
           <pc:sldMk cId="2946336691" sldId="415"/>
         </pc:sldMkLst>
-        <pc:spChg chg="mod">
-          <ac:chgData name="Sana Belguith" userId="edaa0afb-4621-4165-af1d-05ed505f7999" providerId="ADAL" clId="{10F9F129-592B-40F1-997D-F487E669D3CB}" dt="2022-11-16T15:43:24.726" v="389" actId="1076"/>
-          <ac:spMkLst>
-            <pc:docMk/>
-            <pc:sldMk cId="2946336691" sldId="415"/>
-            <ac:spMk id="2" creationId="{E6E542B4-E4E1-4DA0-A326-3413F289F42C}"/>
-          </ac:spMkLst>
-        </pc:spChg>
       </pc:sldChg>
       <pc:sldChg chg="modSp add del mod">
         <pc:chgData name="Sana Belguith" userId="edaa0afb-4621-4165-af1d-05ed505f7999" providerId="ADAL" clId="{10F9F129-592B-40F1-997D-F487E669D3CB}" dt="2022-11-17T10:38:37.048" v="534" actId="47"/>
@@ -4144,14 +1103,6 @@
           <pc:docMk/>
           <pc:sldMk cId="3429040118" sldId="416"/>
         </pc:sldMkLst>
-        <pc:spChg chg="mod">
-          <ac:chgData name="Sana Belguith" userId="edaa0afb-4621-4165-af1d-05ed505f7999" providerId="ADAL" clId="{10F9F129-592B-40F1-997D-F487E669D3CB}" dt="2022-11-16T15:46:30.135" v="393" actId="1076"/>
-          <ac:spMkLst>
-            <pc:docMk/>
-            <pc:sldMk cId="3429040118" sldId="416"/>
-            <ac:spMk id="4" creationId="{B66FD162-E639-4034-81DE-D88666057486}"/>
-          </ac:spMkLst>
-        </pc:spChg>
       </pc:sldChg>
       <pc:sldChg chg="modSp add mod modAnim">
         <pc:chgData name="Sana Belguith" userId="edaa0afb-4621-4165-af1d-05ed505f7999" providerId="ADAL" clId="{10F9F129-592B-40F1-997D-F487E669D3CB}" dt="2022-11-17T10:39:18.289" v="539" actId="108"/>
@@ -4159,22 +1110,6 @@
           <pc:docMk/>
           <pc:sldMk cId="620333558" sldId="417"/>
         </pc:sldMkLst>
-        <pc:spChg chg="mod">
-          <ac:chgData name="Sana Belguith" userId="edaa0afb-4621-4165-af1d-05ed505f7999" providerId="ADAL" clId="{10F9F129-592B-40F1-997D-F487E669D3CB}" dt="2022-11-16T15:46:39.550" v="397" actId="1076"/>
-          <ac:spMkLst>
-            <pc:docMk/>
-            <pc:sldMk cId="620333558" sldId="417"/>
-            <ac:spMk id="4" creationId="{B66FD162-E639-4034-81DE-D88666057486}"/>
-          </ac:spMkLst>
-        </pc:spChg>
-        <pc:spChg chg="mod">
-          <ac:chgData name="Sana Belguith" userId="edaa0afb-4621-4165-af1d-05ed505f7999" providerId="ADAL" clId="{10F9F129-592B-40F1-997D-F487E669D3CB}" dt="2022-11-17T10:39:18.289" v="539" actId="108"/>
-          <ac:spMkLst>
-            <pc:docMk/>
-            <pc:sldMk cId="620333558" sldId="417"/>
-            <ac:spMk id="5" creationId="{59EA38F4-6554-46FA-BB88-39DEEA1CBEFA}"/>
-          </ac:spMkLst>
-        </pc:spChg>
       </pc:sldChg>
       <pc:sldChg chg="modSp add del mod">
         <pc:chgData name="Sana Belguith" userId="edaa0afb-4621-4165-af1d-05ed505f7999" providerId="ADAL" clId="{10F9F129-592B-40F1-997D-F487E669D3CB}" dt="2022-11-17T10:38:57.026" v="536" actId="47"/>
@@ -4182,14 +1117,6 @@
           <pc:docMk/>
           <pc:sldMk cId="1811540147" sldId="418"/>
         </pc:sldMkLst>
-        <pc:spChg chg="mod">
-          <ac:chgData name="Sana Belguith" userId="edaa0afb-4621-4165-af1d-05ed505f7999" providerId="ADAL" clId="{10F9F129-592B-40F1-997D-F487E669D3CB}" dt="2022-11-16T15:46:48.270" v="402" actId="1076"/>
-          <ac:spMkLst>
-            <pc:docMk/>
-            <pc:sldMk cId="1811540147" sldId="418"/>
-            <ac:spMk id="2" creationId="{B58AD4D9-B1D4-4A09-B604-A8951EE8D234}"/>
-          </ac:spMkLst>
-        </pc:spChg>
       </pc:sldChg>
       <pc:sldChg chg="modSp add del mod">
         <pc:chgData name="Sana Belguith" userId="edaa0afb-4621-4165-af1d-05ed505f7999" providerId="ADAL" clId="{10F9F129-592B-40F1-997D-F487E669D3CB}" dt="2022-11-17T10:39:52.055" v="548" actId="47"/>
@@ -4197,22 +1124,6 @@
           <pc:docMk/>
           <pc:sldMk cId="2122319517" sldId="419"/>
         </pc:sldMkLst>
-        <pc:spChg chg="mod">
-          <ac:chgData name="Sana Belguith" userId="edaa0afb-4621-4165-af1d-05ed505f7999" providerId="ADAL" clId="{10F9F129-592B-40F1-997D-F487E669D3CB}" dt="2022-11-16T15:46:56.510" v="405" actId="1076"/>
-          <ac:spMkLst>
-            <pc:docMk/>
-            <pc:sldMk cId="2122319517" sldId="419"/>
-            <ac:spMk id="2" creationId="{B58AD4D9-B1D4-4A09-B604-A8951EE8D234}"/>
-          </ac:spMkLst>
-        </pc:spChg>
-        <pc:spChg chg="mod">
-          <ac:chgData name="Sana Belguith" userId="edaa0afb-4621-4165-af1d-05ed505f7999" providerId="ADAL" clId="{10F9F129-592B-40F1-997D-F487E669D3CB}" dt="2022-11-17T10:39:38.312" v="547" actId="20577"/>
-          <ac:spMkLst>
-            <pc:docMk/>
-            <pc:sldMk cId="2122319517" sldId="419"/>
-            <ac:spMk id="3" creationId="{E5D8B694-A3D6-4FB5-8334-198B85AB77B4}"/>
-          </ac:spMkLst>
-        </pc:spChg>
       </pc:sldChg>
       <pc:sldChg chg="modSp add mod">
         <pc:chgData name="Sana Belguith" userId="edaa0afb-4621-4165-af1d-05ed505f7999" providerId="ADAL" clId="{10F9F129-592B-40F1-997D-F487E669D3CB}" dt="2022-11-17T10:40:13.968" v="561" actId="20577"/>
@@ -4220,22 +1131,6 @@
           <pc:docMk/>
           <pc:sldMk cId="1474200105" sldId="420"/>
         </pc:sldMkLst>
-        <pc:spChg chg="mod">
-          <ac:chgData name="Sana Belguith" userId="edaa0afb-4621-4165-af1d-05ed505f7999" providerId="ADAL" clId="{10F9F129-592B-40F1-997D-F487E669D3CB}" dt="2022-11-16T15:47:04.325" v="408" actId="1076"/>
-          <ac:spMkLst>
-            <pc:docMk/>
-            <pc:sldMk cId="1474200105" sldId="420"/>
-            <ac:spMk id="2" creationId="{B58AD4D9-B1D4-4A09-B604-A8951EE8D234}"/>
-          </ac:spMkLst>
-        </pc:spChg>
-        <pc:spChg chg="mod">
-          <ac:chgData name="Sana Belguith" userId="edaa0afb-4621-4165-af1d-05ed505f7999" providerId="ADAL" clId="{10F9F129-592B-40F1-997D-F487E669D3CB}" dt="2022-11-17T10:40:13.968" v="561" actId="20577"/>
-          <ac:spMkLst>
-            <pc:docMk/>
-            <pc:sldMk cId="1474200105" sldId="420"/>
-            <ac:spMk id="3" creationId="{E5D8B694-A3D6-4FB5-8334-198B85AB77B4}"/>
-          </ac:spMkLst>
-        </pc:spChg>
       </pc:sldChg>
       <pc:sldChg chg="addSp delSp modSp add mod">
         <pc:chgData name="Sana Belguith" userId="edaa0afb-4621-4165-af1d-05ed505f7999" providerId="ADAL" clId="{10F9F129-592B-40F1-997D-F487E669D3CB}" dt="2022-11-17T10:41:23.802" v="567" actId="6549"/>
@@ -4243,30 +1138,6 @@
           <pc:docMk/>
           <pc:sldMk cId="3317288994" sldId="421"/>
         </pc:sldMkLst>
-        <pc:spChg chg="mod">
-          <ac:chgData name="Sana Belguith" userId="edaa0afb-4621-4165-af1d-05ed505f7999" providerId="ADAL" clId="{10F9F129-592B-40F1-997D-F487E669D3CB}" dt="2022-11-16T15:47:14.263" v="412" actId="1076"/>
-          <ac:spMkLst>
-            <pc:docMk/>
-            <pc:sldMk cId="3317288994" sldId="421"/>
-            <ac:spMk id="2" creationId="{B58AD4D9-B1D4-4A09-B604-A8951EE8D234}"/>
-          </ac:spMkLst>
-        </pc:spChg>
-        <pc:spChg chg="mod">
-          <ac:chgData name="Sana Belguith" userId="edaa0afb-4621-4165-af1d-05ed505f7999" providerId="ADAL" clId="{10F9F129-592B-40F1-997D-F487E669D3CB}" dt="2022-11-17T10:41:23.802" v="567" actId="6549"/>
-          <ac:spMkLst>
-            <pc:docMk/>
-            <pc:sldMk cId="3317288994" sldId="421"/>
-            <ac:spMk id="3" creationId="{E5D8B694-A3D6-4FB5-8334-198B85AB77B4}"/>
-          </ac:spMkLst>
-        </pc:spChg>
-        <pc:picChg chg="add del mod">
-          <ac:chgData name="Sana Belguith" userId="edaa0afb-4621-4165-af1d-05ed505f7999" providerId="ADAL" clId="{10F9F129-592B-40F1-997D-F487E669D3CB}" dt="2022-11-17T10:41:10.571" v="565" actId="1076"/>
-          <ac:picMkLst>
-            <pc:docMk/>
-            <pc:sldMk cId="3317288994" sldId="421"/>
-            <ac:picMk id="6" creationId="{10A4CDD6-6810-4BE8-A222-1CFDD2E5E278}"/>
-          </ac:picMkLst>
-        </pc:picChg>
       </pc:sldChg>
       <pc:sldChg chg="modSp add del mod">
         <pc:chgData name="Sana Belguith" userId="edaa0afb-4621-4165-af1d-05ed505f7999" providerId="ADAL" clId="{10F9F129-592B-40F1-997D-F487E669D3CB}" dt="2022-11-17T10:42:35.764" v="569" actId="47"/>
@@ -4274,14 +1145,6 @@
           <pc:docMk/>
           <pc:sldMk cId="2608143609" sldId="422"/>
         </pc:sldMkLst>
-        <pc:spChg chg="mod">
-          <ac:chgData name="Sana Belguith" userId="edaa0afb-4621-4165-af1d-05ed505f7999" providerId="ADAL" clId="{10F9F129-592B-40F1-997D-F487E669D3CB}" dt="2022-11-16T15:47:26.399" v="415" actId="1076"/>
-          <ac:spMkLst>
-            <pc:docMk/>
-            <pc:sldMk cId="2608143609" sldId="422"/>
-            <ac:spMk id="2" creationId="{E54029CB-C341-4FBB-8251-C7829B50CC00}"/>
-          </ac:spMkLst>
-        </pc:spChg>
       </pc:sldChg>
       <pc:sldChg chg="modSp add del mod">
         <pc:chgData name="Sana Belguith" userId="edaa0afb-4621-4165-af1d-05ed505f7999" providerId="ADAL" clId="{10F9F129-592B-40F1-997D-F487E669D3CB}" dt="2022-11-17T10:42:35.764" v="569" actId="47"/>
@@ -4289,14 +1152,6 @@
           <pc:docMk/>
           <pc:sldMk cId="3314830419" sldId="423"/>
         </pc:sldMkLst>
-        <pc:spChg chg="mod">
-          <ac:chgData name="Sana Belguith" userId="edaa0afb-4621-4165-af1d-05ed505f7999" providerId="ADAL" clId="{10F9F129-592B-40F1-997D-F487E669D3CB}" dt="2022-11-16T15:47:38.318" v="419" actId="1076"/>
-          <ac:spMkLst>
-            <pc:docMk/>
-            <pc:sldMk cId="3314830419" sldId="423"/>
-            <ac:spMk id="2" creationId="{E54029CB-C341-4FBB-8251-C7829B50CC00}"/>
-          </ac:spMkLst>
-        </pc:spChg>
       </pc:sldChg>
       <pc:sldChg chg="modSp add mod">
         <pc:chgData name="Sana Belguith" userId="edaa0afb-4621-4165-af1d-05ed505f7999" providerId="ADAL" clId="{10F9F129-592B-40F1-997D-F487E669D3CB}" dt="2022-11-17T10:42:14.886" v="568" actId="108"/>
@@ -4304,22 +1159,6 @@
           <pc:docMk/>
           <pc:sldMk cId="3030295679" sldId="424"/>
         </pc:sldMkLst>
-        <pc:spChg chg="mod">
-          <ac:chgData name="Sana Belguith" userId="edaa0afb-4621-4165-af1d-05ed505f7999" providerId="ADAL" clId="{10F9F129-592B-40F1-997D-F487E669D3CB}" dt="2022-11-16T15:47:47.559" v="422" actId="1076"/>
-          <ac:spMkLst>
-            <pc:docMk/>
-            <pc:sldMk cId="3030295679" sldId="424"/>
-            <ac:spMk id="2" creationId="{E54029CB-C341-4FBB-8251-C7829B50CC00}"/>
-          </ac:spMkLst>
-        </pc:spChg>
-        <pc:spChg chg="mod">
-          <ac:chgData name="Sana Belguith" userId="edaa0afb-4621-4165-af1d-05ed505f7999" providerId="ADAL" clId="{10F9F129-592B-40F1-997D-F487E669D3CB}" dt="2022-11-17T10:42:14.886" v="568" actId="108"/>
-          <ac:spMkLst>
-            <pc:docMk/>
-            <pc:sldMk cId="3030295679" sldId="424"/>
-            <ac:spMk id="17" creationId="{F90CE0B9-A94F-4E2C-950E-4BFD09DB1F71}"/>
-          </ac:spMkLst>
-        </pc:spChg>
       </pc:sldChg>
       <pc:sldChg chg="modSp add mod">
         <pc:chgData name="Sana Belguith" userId="edaa0afb-4621-4165-af1d-05ed505f7999" providerId="ADAL" clId="{10F9F129-592B-40F1-997D-F487E669D3CB}" dt="2022-11-17T10:43:08.069" v="571" actId="1076"/>
@@ -4327,30 +1166,6 @@
           <pc:docMk/>
           <pc:sldMk cId="2002294350" sldId="425"/>
         </pc:sldMkLst>
-        <pc:spChg chg="mod">
-          <ac:chgData name="Sana Belguith" userId="edaa0afb-4621-4165-af1d-05ed505f7999" providerId="ADAL" clId="{10F9F129-592B-40F1-997D-F487E669D3CB}" dt="2022-11-16T15:48:05.182" v="428" actId="1076"/>
-          <ac:spMkLst>
-            <pc:docMk/>
-            <pc:sldMk cId="2002294350" sldId="425"/>
-            <ac:spMk id="2" creationId="{2848A6DF-7C72-4277-B856-FE098FC53161}"/>
-          </ac:spMkLst>
-        </pc:spChg>
-        <pc:spChg chg="mod">
-          <ac:chgData name="Sana Belguith" userId="edaa0afb-4621-4165-af1d-05ed505f7999" providerId="ADAL" clId="{10F9F129-592B-40F1-997D-F487E669D3CB}" dt="2022-11-17T10:42:51.981" v="570" actId="108"/>
-          <ac:spMkLst>
-            <pc:docMk/>
-            <pc:sldMk cId="2002294350" sldId="425"/>
-            <ac:spMk id="3" creationId="{809EADAF-02EB-4865-A014-580DF81D9E69}"/>
-          </ac:spMkLst>
-        </pc:spChg>
-        <pc:spChg chg="mod">
-          <ac:chgData name="Sana Belguith" userId="edaa0afb-4621-4165-af1d-05ed505f7999" providerId="ADAL" clId="{10F9F129-592B-40F1-997D-F487E669D3CB}" dt="2022-11-17T10:43:08.069" v="571" actId="1076"/>
-          <ac:spMkLst>
-            <pc:docMk/>
-            <pc:sldMk cId="2002294350" sldId="425"/>
-            <ac:spMk id="6" creationId="{DD471481-792A-4D46-B025-7A0C513772A0}"/>
-          </ac:spMkLst>
-        </pc:spChg>
       </pc:sldChg>
       <pc:sldChg chg="add del">
         <pc:chgData name="Sana Belguith" userId="edaa0afb-4621-4165-af1d-05ed505f7999" providerId="ADAL" clId="{10F9F129-592B-40F1-997D-F487E669D3CB}" dt="2022-11-16T15:57:05.759" v="460" actId="47"/>
@@ -4372,22 +1187,6 @@
           <pc:docMk/>
           <pc:sldMk cId="983067851" sldId="428"/>
         </pc:sldMkLst>
-        <pc:spChg chg="mod">
-          <ac:chgData name="Sana Belguith" userId="edaa0afb-4621-4165-af1d-05ed505f7999" providerId="ADAL" clId="{10F9F129-592B-40F1-997D-F487E669D3CB}" dt="2022-11-16T15:48:21.551" v="431" actId="1076"/>
-          <ac:spMkLst>
-            <pc:docMk/>
-            <pc:sldMk cId="983067851" sldId="428"/>
-            <ac:spMk id="2" creationId="{A5F21C7B-97E9-4489-89B4-BC301D086D2D}"/>
-          </ac:spMkLst>
-        </pc:spChg>
-        <pc:spChg chg="mod">
-          <ac:chgData name="Sana Belguith" userId="edaa0afb-4621-4165-af1d-05ed505f7999" providerId="ADAL" clId="{10F9F129-592B-40F1-997D-F487E669D3CB}" dt="2022-11-17T10:43:23.792" v="574" actId="1076"/>
-          <ac:spMkLst>
-            <pc:docMk/>
-            <pc:sldMk cId="983067851" sldId="428"/>
-            <ac:spMk id="10" creationId="{A2E7E010-0CFC-4F39-BC1F-3C01BCB32862}"/>
-          </ac:spMkLst>
-        </pc:spChg>
       </pc:sldChg>
       <pc:sldChg chg="modSp add mod">
         <pc:chgData name="Sana Belguith" userId="edaa0afb-4621-4165-af1d-05ed505f7999" providerId="ADAL" clId="{10F9F129-592B-40F1-997D-F487E669D3CB}" dt="2022-11-17T10:52:04.873" v="643" actId="14100"/>
@@ -4395,22 +1194,6 @@
           <pc:docMk/>
           <pc:sldMk cId="1440751793" sldId="429"/>
         </pc:sldMkLst>
-        <pc:spChg chg="mod">
-          <ac:chgData name="Sana Belguith" userId="edaa0afb-4621-4165-af1d-05ed505f7999" providerId="ADAL" clId="{10F9F129-592B-40F1-997D-F487E669D3CB}" dt="2022-11-16T15:48:29.928" v="434" actId="1076"/>
-          <ac:spMkLst>
-            <pc:docMk/>
-            <pc:sldMk cId="1440751793" sldId="429"/>
-            <ac:spMk id="2" creationId="{A5F21C7B-97E9-4489-89B4-BC301D086D2D}"/>
-          </ac:spMkLst>
-        </pc:spChg>
-        <pc:spChg chg="mod">
-          <ac:chgData name="Sana Belguith" userId="edaa0afb-4621-4165-af1d-05ed505f7999" providerId="ADAL" clId="{10F9F129-592B-40F1-997D-F487E669D3CB}" dt="2022-11-17T10:52:04.873" v="643" actId="14100"/>
-          <ac:spMkLst>
-            <pc:docMk/>
-            <pc:sldMk cId="1440751793" sldId="429"/>
-            <ac:spMk id="10" creationId="{A2E7E010-0CFC-4F39-BC1F-3C01BCB32862}"/>
-          </ac:spMkLst>
-        </pc:spChg>
       </pc:sldChg>
       <pc:sldChg chg="modSp add mod">
         <pc:chgData name="Sana Belguith" userId="edaa0afb-4621-4165-af1d-05ed505f7999" providerId="ADAL" clId="{10F9F129-592B-40F1-997D-F487E669D3CB}" dt="2022-11-17T10:43:39.132" v="577" actId="1076"/>
@@ -4418,22 +1201,6 @@
           <pc:docMk/>
           <pc:sldMk cId="1685751600" sldId="430"/>
         </pc:sldMkLst>
-        <pc:spChg chg="mod">
-          <ac:chgData name="Sana Belguith" userId="edaa0afb-4621-4165-af1d-05ed505f7999" providerId="ADAL" clId="{10F9F129-592B-40F1-997D-F487E669D3CB}" dt="2022-11-16T15:48:37.630" v="437" actId="1076"/>
-          <ac:spMkLst>
-            <pc:docMk/>
-            <pc:sldMk cId="1685751600" sldId="430"/>
-            <ac:spMk id="2" creationId="{A5F21C7B-97E9-4489-89B4-BC301D086D2D}"/>
-          </ac:spMkLst>
-        </pc:spChg>
-        <pc:spChg chg="mod">
-          <ac:chgData name="Sana Belguith" userId="edaa0afb-4621-4165-af1d-05ed505f7999" providerId="ADAL" clId="{10F9F129-592B-40F1-997D-F487E669D3CB}" dt="2022-11-17T10:43:39.132" v="577" actId="1076"/>
-          <ac:spMkLst>
-            <pc:docMk/>
-            <pc:sldMk cId="1685751600" sldId="430"/>
-            <ac:spMk id="10" creationId="{A2E7E010-0CFC-4F39-BC1F-3C01BCB32862}"/>
-          </ac:spMkLst>
-        </pc:spChg>
       </pc:sldChg>
       <pc:sldChg chg="modSp add mod">
         <pc:chgData name="Sana Belguith" userId="edaa0afb-4621-4165-af1d-05ed505f7999" providerId="ADAL" clId="{10F9F129-592B-40F1-997D-F487E669D3CB}" dt="2022-11-17T10:43:55.335" v="580" actId="14100"/>
@@ -4441,30 +1208,6 @@
           <pc:docMk/>
           <pc:sldMk cId="1651203510" sldId="431"/>
         </pc:sldMkLst>
-        <pc:spChg chg="mod">
-          <ac:chgData name="Sana Belguith" userId="edaa0afb-4621-4165-af1d-05ed505f7999" providerId="ADAL" clId="{10F9F129-592B-40F1-997D-F487E669D3CB}" dt="2022-11-16T15:48:47.503" v="440" actId="1076"/>
-          <ac:spMkLst>
-            <pc:docMk/>
-            <pc:sldMk cId="1651203510" sldId="431"/>
-            <ac:spMk id="2" creationId="{A5F21C7B-97E9-4489-89B4-BC301D086D2D}"/>
-          </ac:spMkLst>
-        </pc:spChg>
-        <pc:spChg chg="mod">
-          <ac:chgData name="Sana Belguith" userId="edaa0afb-4621-4165-af1d-05ed505f7999" providerId="ADAL" clId="{10F9F129-592B-40F1-997D-F487E669D3CB}" dt="2022-11-17T10:43:47.724" v="578" actId="14100"/>
-          <ac:spMkLst>
-            <pc:docMk/>
-            <pc:sldMk cId="1651203510" sldId="431"/>
-            <ac:spMk id="10" creationId="{A2E7E010-0CFC-4F39-BC1F-3C01BCB32862}"/>
-          </ac:spMkLst>
-        </pc:spChg>
-        <pc:spChg chg="mod">
-          <ac:chgData name="Sana Belguith" userId="edaa0afb-4621-4165-af1d-05ed505f7999" providerId="ADAL" clId="{10F9F129-592B-40F1-997D-F487E669D3CB}" dt="2022-11-17T10:43:55.335" v="580" actId="14100"/>
-          <ac:spMkLst>
-            <pc:docMk/>
-            <pc:sldMk cId="1651203510" sldId="431"/>
-            <ac:spMk id="25" creationId="{4AEA0BAA-37BC-4F17-881D-8F9456FC5AA0}"/>
-          </ac:spMkLst>
-        </pc:spChg>
       </pc:sldChg>
       <pc:sldChg chg="modSp add del mod">
         <pc:chgData name="Sana Belguith" userId="edaa0afb-4621-4165-af1d-05ed505f7999" providerId="ADAL" clId="{10F9F129-592B-40F1-997D-F487E669D3CB}" dt="2022-11-17T10:47:49.949" v="582" actId="47"/>
@@ -4472,14 +1215,6 @@
           <pc:docMk/>
           <pc:sldMk cId="3191391086" sldId="432"/>
         </pc:sldMkLst>
-        <pc:spChg chg="mod">
-          <ac:chgData name="Sana Belguith" userId="edaa0afb-4621-4165-af1d-05ed505f7999" providerId="ADAL" clId="{10F9F129-592B-40F1-997D-F487E669D3CB}" dt="2022-11-16T15:48:59.710" v="443" actId="1076"/>
-          <ac:spMkLst>
-            <pc:docMk/>
-            <pc:sldMk cId="3191391086" sldId="432"/>
-            <ac:spMk id="2" creationId="{A5F21C7B-97E9-4489-89B4-BC301D086D2D}"/>
-          </ac:spMkLst>
-        </pc:spChg>
       </pc:sldChg>
       <pc:sldChg chg="modSp add del mod">
         <pc:chgData name="Sana Belguith" userId="edaa0afb-4621-4165-af1d-05ed505f7999" providerId="ADAL" clId="{10F9F129-592B-40F1-997D-F487E669D3CB}" dt="2022-11-17T10:47:49.949" v="582" actId="47"/>
@@ -4487,22 +1222,6 @@
           <pc:docMk/>
           <pc:sldMk cId="2943983125" sldId="433"/>
         </pc:sldMkLst>
-        <pc:spChg chg="mod">
-          <ac:chgData name="Sana Belguith" userId="edaa0afb-4621-4165-af1d-05ed505f7999" providerId="ADAL" clId="{10F9F129-592B-40F1-997D-F487E669D3CB}" dt="2022-11-16T15:49:07.142" v="446" actId="1076"/>
-          <ac:spMkLst>
-            <pc:docMk/>
-            <pc:sldMk cId="2943983125" sldId="433"/>
-            <ac:spMk id="2" creationId="{A5F21C7B-97E9-4489-89B4-BC301D086D2D}"/>
-          </ac:spMkLst>
-        </pc:spChg>
-        <pc:spChg chg="mod">
-          <ac:chgData name="Sana Belguith" userId="edaa0afb-4621-4165-af1d-05ed505f7999" providerId="ADAL" clId="{10F9F129-592B-40F1-997D-F487E669D3CB}" dt="2022-11-17T10:44:12.916" v="581" actId="14100"/>
-          <ac:spMkLst>
-            <pc:docMk/>
-            <pc:sldMk cId="2943983125" sldId="433"/>
-            <ac:spMk id="10" creationId="{A2E7E010-0CFC-4F39-BC1F-3C01BCB32862}"/>
-          </ac:spMkLst>
-        </pc:spChg>
       </pc:sldChg>
       <pc:sldChg chg="modSp add mod">
         <pc:chgData name="Sana Belguith" userId="edaa0afb-4621-4165-af1d-05ed505f7999" providerId="ADAL" clId="{10F9F129-592B-40F1-997D-F487E669D3CB}" dt="2022-11-16T15:49:15.191" v="449" actId="1076"/>
@@ -4510,14 +1229,6 @@
           <pc:docMk/>
           <pc:sldMk cId="4051494561" sldId="434"/>
         </pc:sldMkLst>
-        <pc:spChg chg="mod">
-          <ac:chgData name="Sana Belguith" userId="edaa0afb-4621-4165-af1d-05ed505f7999" providerId="ADAL" clId="{10F9F129-592B-40F1-997D-F487E669D3CB}" dt="2022-11-16T15:49:15.191" v="449" actId="1076"/>
-          <ac:spMkLst>
-            <pc:docMk/>
-            <pc:sldMk cId="4051494561" sldId="434"/>
-            <ac:spMk id="2" creationId="{A5F21C7B-97E9-4489-89B4-BC301D086D2D}"/>
-          </ac:spMkLst>
-        </pc:spChg>
       </pc:sldChg>
       <pc:sldChg chg="modSp add mod">
         <pc:chgData name="Sana Belguith" userId="edaa0afb-4621-4165-af1d-05ed505f7999" providerId="ADAL" clId="{10F9F129-592B-40F1-997D-F487E669D3CB}" dt="2022-11-16T15:49:23.550" v="453" actId="1076"/>
@@ -4525,14 +1236,6 @@
           <pc:docMk/>
           <pc:sldMk cId="3537089380" sldId="435"/>
         </pc:sldMkLst>
-        <pc:spChg chg="mod">
-          <ac:chgData name="Sana Belguith" userId="edaa0afb-4621-4165-af1d-05ed505f7999" providerId="ADAL" clId="{10F9F129-592B-40F1-997D-F487E669D3CB}" dt="2022-11-16T15:49:23.550" v="453" actId="1076"/>
-          <ac:spMkLst>
-            <pc:docMk/>
-            <pc:sldMk cId="3537089380" sldId="435"/>
-            <ac:spMk id="2" creationId="{A5F21C7B-97E9-4489-89B4-BC301D086D2D}"/>
-          </ac:spMkLst>
-        </pc:spChg>
       </pc:sldChg>
       <pc:sldChg chg="modSp add mod">
         <pc:chgData name="Sana Belguith" userId="edaa0afb-4621-4165-af1d-05ed505f7999" providerId="ADAL" clId="{10F9F129-592B-40F1-997D-F487E669D3CB}" dt="2022-11-16T15:49:32.630" v="456" actId="1076"/>
@@ -4540,22 +1243,6 @@
           <pc:docMk/>
           <pc:sldMk cId="1658730728" sldId="436"/>
         </pc:sldMkLst>
-        <pc:spChg chg="mod">
-          <ac:chgData name="Sana Belguith" userId="edaa0afb-4621-4165-af1d-05ed505f7999" providerId="ADAL" clId="{10F9F129-592B-40F1-997D-F487E669D3CB}" dt="2022-11-16T15:49:32.630" v="456" actId="1076"/>
-          <ac:spMkLst>
-            <pc:docMk/>
-            <pc:sldMk cId="1658730728" sldId="436"/>
-            <ac:spMk id="2" creationId="{48EFBA15-AFE8-41D2-B6B0-DEBF82A04EC4}"/>
-          </ac:spMkLst>
-        </pc:spChg>
-        <pc:spChg chg="mod">
-          <ac:chgData name="Sana Belguith" userId="edaa0afb-4621-4165-af1d-05ed505f7999" providerId="ADAL" clId="{10F9F129-592B-40F1-997D-F487E669D3CB}" dt="2022-11-16T13:45:44.207" v="14" actId="27636"/>
-          <ac:spMkLst>
-            <pc:docMk/>
-            <pc:sldMk cId="1658730728" sldId="436"/>
-            <ac:spMk id="3" creationId="{78E28A47-EC44-40EC-A295-4F41F515194C}"/>
-          </ac:spMkLst>
-        </pc:spChg>
       </pc:sldChg>
       <pc:sldChg chg="del">
         <pc:chgData name="Sana Belguith" userId="edaa0afb-4621-4165-af1d-05ed505f7999" providerId="ADAL" clId="{10F9F129-592B-40F1-997D-F487E669D3CB}" dt="2022-11-16T13:45:43.548" v="0" actId="47"/>
@@ -4570,22 +1257,6 @@
           <pc:docMk/>
           <pc:sldMk cId="1318855865" sldId="437"/>
         </pc:sldMkLst>
-        <pc:spChg chg="mod">
-          <ac:chgData name="Sana Belguith" userId="edaa0afb-4621-4165-af1d-05ed505f7999" providerId="ADAL" clId="{10F9F129-592B-40F1-997D-F487E669D3CB}" dt="2022-11-16T15:49:41.711" v="459" actId="1076"/>
-          <ac:spMkLst>
-            <pc:docMk/>
-            <pc:sldMk cId="1318855865" sldId="437"/>
-            <ac:spMk id="2" creationId="{A5F21C7B-97E9-4489-89B4-BC301D086D2D}"/>
-          </ac:spMkLst>
-        </pc:spChg>
-        <pc:spChg chg="mod">
-          <ac:chgData name="Sana Belguith" userId="edaa0afb-4621-4165-af1d-05ed505f7999" providerId="ADAL" clId="{10F9F129-592B-40F1-997D-F487E669D3CB}" dt="2022-11-17T10:48:37.445" v="620" actId="6549"/>
-          <ac:spMkLst>
-            <pc:docMk/>
-            <pc:sldMk cId="1318855865" sldId="437"/>
-            <ac:spMk id="25" creationId="{9153B7B2-5512-49C2-BFF2-569EF84C9A24}"/>
-          </ac:spMkLst>
-        </pc:spChg>
       </pc:sldChg>
       <pc:sldChg chg="add del">
         <pc:chgData name="Sana Belguith" userId="edaa0afb-4621-4165-af1d-05ed505f7999" providerId="ADAL" clId="{10F9F129-592B-40F1-997D-F487E669D3CB}" dt="2022-11-16T13:59:38.199" v="146"/>
@@ -4983,7 +1654,7 @@
           <a:p>
             <a:fld id="{0D08E07E-6A0C-45D2-82C4-0096ACCC8306}" type="datetimeFigureOut">
               <a:rPr lang="en-GB" smtClean="0"/>
-              <a:t>03/11/2024</a:t>
+              <a:t>10/11/2025</a:t>
             </a:fld>
             <a:endParaRPr lang="en-GB"/>
           </a:p>
@@ -5400,7 +2071,7 @@
           <a:p>
             <a:fld id="{098BDEFC-EEE3-42B8-A278-D7D69FECCD1F}" type="datetimeFigureOut">
               <a:rPr lang="en-GB" smtClean="0"/>
-              <a:t>03/11/2024</a:t>
+              <a:t>10/11/2025</a:t>
             </a:fld>
             <a:endParaRPr lang="en-GB"/>
           </a:p>
@@ -5600,7 +2271,7 @@
           <a:p>
             <a:fld id="{098BDEFC-EEE3-42B8-A278-D7D69FECCD1F}" type="datetimeFigureOut">
               <a:rPr lang="en-GB" smtClean="0"/>
-              <a:t>03/11/2024</a:t>
+              <a:t>10/11/2025</a:t>
             </a:fld>
             <a:endParaRPr lang="en-GB"/>
           </a:p>
@@ -5810,7 +2481,7 @@
           <a:p>
             <a:fld id="{098BDEFC-EEE3-42B8-A278-D7D69FECCD1F}" type="datetimeFigureOut">
               <a:rPr lang="en-GB" smtClean="0"/>
-              <a:t>03/11/2024</a:t>
+              <a:t>10/11/2025</a:t>
             </a:fld>
             <a:endParaRPr lang="en-GB"/>
           </a:p>
@@ -6053,7 +2724,7 @@
           <a:p>
             <a:fld id="{D1666282-696E-4BC8-B8B0-F336AA0FA017}" type="datetime1">
               <a:rPr lang="en-GB" smtClean="0"/>
-              <a:t>03/11/2024</a:t>
+              <a:t>10/11/2025</a:t>
             </a:fld>
             <a:endParaRPr lang="en-GB"/>
           </a:p>
@@ -6493,7 +3164,7 @@
             <a:fld id="{3E2C485A-CFD1-4426-A587-FCC12D6AD237}" type="datetime1">
               <a:rPr lang="en-GB" smtClean="0"/>
               <a:pPr/>
-              <a:t>03/11/2024</a:t>
+              <a:t>10/11/2025</a:t>
             </a:fld>
             <a:endParaRPr lang="en-GB"/>
           </a:p>
@@ -6917,7 +3588,7 @@
           <a:p>
             <a:fld id="{D99D62B8-D7ED-4B07-9A04-1E3FEAB2A48C}" type="datetime1">
               <a:rPr lang="en-GB" smtClean="0"/>
-              <a:t>03/11/2024</a:t>
+              <a:t>10/11/2025</a:t>
             </a:fld>
             <a:endParaRPr lang="en-GB"/>
           </a:p>
@@ -7117,7 +3788,7 @@
           <a:p>
             <a:fld id="{098BDEFC-EEE3-42B8-A278-D7D69FECCD1F}" type="datetimeFigureOut">
               <a:rPr lang="en-GB" smtClean="0"/>
-              <a:t>03/11/2024</a:t>
+              <a:t>10/11/2025</a:t>
             </a:fld>
             <a:endParaRPr lang="en-GB"/>
           </a:p>
@@ -7393,7 +4064,7 @@
           <a:p>
             <a:fld id="{098BDEFC-EEE3-42B8-A278-D7D69FECCD1F}" type="datetimeFigureOut">
               <a:rPr lang="en-GB" smtClean="0"/>
-              <a:t>03/11/2024</a:t>
+              <a:t>10/11/2025</a:t>
             </a:fld>
             <a:endParaRPr lang="en-GB"/>
           </a:p>
@@ -7661,7 +4332,7 @@
           <a:p>
             <a:fld id="{098BDEFC-EEE3-42B8-A278-D7D69FECCD1F}" type="datetimeFigureOut">
               <a:rPr lang="en-GB" smtClean="0"/>
-              <a:t>03/11/2024</a:t>
+              <a:t>10/11/2025</a:t>
             </a:fld>
             <a:endParaRPr lang="en-GB"/>
           </a:p>
@@ -8076,7 +4747,7 @@
           <a:p>
             <a:fld id="{098BDEFC-EEE3-42B8-A278-D7D69FECCD1F}" type="datetimeFigureOut">
               <a:rPr lang="en-GB" smtClean="0"/>
-              <a:t>03/11/2024</a:t>
+              <a:t>10/11/2025</a:t>
             </a:fld>
             <a:endParaRPr lang="en-GB"/>
           </a:p>
@@ -8218,7 +4889,7 @@
           <a:p>
             <a:fld id="{098BDEFC-EEE3-42B8-A278-D7D69FECCD1F}" type="datetimeFigureOut">
               <a:rPr lang="en-GB" smtClean="0"/>
-              <a:t>03/11/2024</a:t>
+              <a:t>10/11/2025</a:t>
             </a:fld>
             <a:endParaRPr lang="en-GB"/>
           </a:p>
@@ -8331,7 +5002,7 @@
           <a:p>
             <a:fld id="{098BDEFC-EEE3-42B8-A278-D7D69FECCD1F}" type="datetimeFigureOut">
               <a:rPr lang="en-GB" smtClean="0"/>
-              <a:t>03/11/2024</a:t>
+              <a:t>10/11/2025</a:t>
             </a:fld>
             <a:endParaRPr lang="en-GB"/>
           </a:p>
@@ -8644,7 +5315,7 @@
           <a:p>
             <a:fld id="{098BDEFC-EEE3-42B8-A278-D7D69FECCD1F}" type="datetimeFigureOut">
               <a:rPr lang="en-GB" smtClean="0"/>
-              <a:t>03/11/2024</a:t>
+              <a:t>10/11/2025</a:t>
             </a:fld>
             <a:endParaRPr lang="en-GB"/>
           </a:p>
@@ -8933,7 +5604,7 @@
           <a:p>
             <a:fld id="{098BDEFC-EEE3-42B8-A278-D7D69FECCD1F}" type="datetimeFigureOut">
               <a:rPr lang="en-GB" smtClean="0"/>
-              <a:t>03/11/2024</a:t>
+              <a:t>10/11/2025</a:t>
             </a:fld>
             <a:endParaRPr lang="en-GB"/>
           </a:p>
@@ -9176,7 +5847,7 @@
           <a:p>
             <a:fld id="{098BDEFC-EEE3-42B8-A278-D7D69FECCD1F}" type="datetimeFigureOut">
               <a:rPr lang="en-GB" smtClean="0"/>
-              <a:t>03/11/2024</a:t>
+              <a:t>10/11/2025</a:t>
             </a:fld>
             <a:endParaRPr lang="en-GB"/>
           </a:p>
@@ -16647,7 +13318,7 @@
                 <a:latin typeface="Times New Roman" panose="02020603050405020304" pitchFamily="18" charset="0"/>
                 <a:cs typeface="Times New Roman" panose="02020603050405020304" pitchFamily="18" charset="0"/>
               </a:rPr>
-              <a:t>BIOS do its job, load the next stage, hash it store in TPM </a:t>
+              <a:t>BIOS does its job, load the next stage, hash it store in TPM </a:t>
             </a:r>
             <a:r>
               <a:rPr lang="en-US" dirty="0" err="1">
@@ -20093,7 +16764,21 @@
                 <a:latin typeface="Times New Roman" panose="02020603050405020304" pitchFamily="18" charset="0"/>
                 <a:cs typeface="Times New Roman" panose="02020603050405020304" pitchFamily="18" charset="0"/>
               </a:rPr>
-              <a:t>A PCR hold a summary of a series of value</a:t>
+              <a:t>A </a:t>
+            </a:r>
+            <a:r>
+              <a:rPr lang="en-US" sz="2400">
+                <a:latin typeface="Times New Roman" panose="02020603050405020304" pitchFamily="18" charset="0"/>
+                <a:cs typeface="Times New Roman" panose="02020603050405020304" pitchFamily="18" charset="0"/>
+              </a:rPr>
+              <a:t>PCR holds </a:t>
+            </a:r>
+            <a:r>
+              <a:rPr lang="en-US" sz="2400" dirty="0">
+                <a:latin typeface="Times New Roman" panose="02020603050405020304" pitchFamily="18" charset="0"/>
+                <a:cs typeface="Times New Roman" panose="02020603050405020304" pitchFamily="18" charset="0"/>
+              </a:rPr>
+              <a:t>a summary of a series of value</a:t>
             </a:r>
           </a:p>
           <a:p>

--- a/docs/lectures/7/Hardware Security.pptx
+++ b/docs/lectures/7/Hardware Security.pptx
@@ -655,10 +655,40 @@
   <pc:docChgLst>
     <pc:chgData name="Sana Belguith" userId="edaa0afb-4621-4165-af1d-05ed505f7999" providerId="ADAL" clId="{FAC4329E-AD2F-4436-8EA1-93788499A5D0}"/>
     <pc:docChg chg="modSld">
-      <pc:chgData name="Sana Belguith" userId="edaa0afb-4621-4165-af1d-05ed505f7999" providerId="ADAL" clId="{FAC4329E-AD2F-4436-8EA1-93788499A5D0}" dt="2025-11-10T08:49:29.474" v="2" actId="20577"/>
+      <pc:chgData name="Sana Belguith" userId="edaa0afb-4621-4165-af1d-05ed505f7999" providerId="ADAL" clId="{FAC4329E-AD2F-4436-8EA1-93788499A5D0}" dt="2025-11-10T13:25:06.746" v="9" actId="20577"/>
       <pc:docMkLst>
         <pc:docMk/>
       </pc:docMkLst>
+      <pc:sldChg chg="modSp mod">
+        <pc:chgData name="Sana Belguith" userId="edaa0afb-4621-4165-af1d-05ed505f7999" providerId="ADAL" clId="{FAC4329E-AD2F-4436-8EA1-93788499A5D0}" dt="2025-11-10T13:23:16.729" v="8" actId="20577"/>
+        <pc:sldMkLst>
+          <pc:docMk/>
+          <pc:sldMk cId="898831132" sldId="362"/>
+        </pc:sldMkLst>
+        <pc:spChg chg="mod">
+          <ac:chgData name="Sana Belguith" userId="edaa0afb-4621-4165-af1d-05ed505f7999" providerId="ADAL" clId="{FAC4329E-AD2F-4436-8EA1-93788499A5D0}" dt="2025-11-10T13:23:16.729" v="8" actId="20577"/>
+          <ac:spMkLst>
+            <pc:docMk/>
+            <pc:sldMk cId="898831132" sldId="362"/>
+            <ac:spMk id="5" creationId="{1445283B-F11B-4FFE-892C-4D11C2ED8E82}"/>
+          </ac:spMkLst>
+        </pc:spChg>
+      </pc:sldChg>
+      <pc:sldChg chg="modSp mod">
+        <pc:chgData name="Sana Belguith" userId="edaa0afb-4621-4165-af1d-05ed505f7999" providerId="ADAL" clId="{FAC4329E-AD2F-4436-8EA1-93788499A5D0}" dt="2025-11-10T13:25:06.746" v="9" actId="20577"/>
+        <pc:sldMkLst>
+          <pc:docMk/>
+          <pc:sldMk cId="941356834" sldId="368"/>
+        </pc:sldMkLst>
+        <pc:spChg chg="mod">
+          <ac:chgData name="Sana Belguith" userId="edaa0afb-4621-4165-af1d-05ed505f7999" providerId="ADAL" clId="{FAC4329E-AD2F-4436-8EA1-93788499A5D0}" dt="2025-11-10T13:25:06.746" v="9" actId="20577"/>
+          <ac:spMkLst>
+            <pc:docMk/>
+            <pc:sldMk cId="941356834" sldId="368"/>
+            <ac:spMk id="10" creationId="{E706CB39-8D33-4986-BA8D-9241B8E8ECB5}"/>
+          </ac:spMkLst>
+        </pc:spChg>
+      </pc:sldChg>
       <pc:sldChg chg="modSp mod">
         <pc:chgData name="Sana Belguith" userId="edaa0afb-4621-4165-af1d-05ed505f7999" providerId="ADAL" clId="{FAC4329E-AD2F-4436-8EA1-93788499A5D0}" dt="2025-11-10T08:49:29.474" v="2" actId="20577"/>
         <pc:sldMkLst>
@@ -13472,7 +13502,7 @@
                 <a:latin typeface="Times New Roman" panose="02020603050405020304" pitchFamily="18" charset="0"/>
                 <a:cs typeface="Times New Roman" panose="02020603050405020304" pitchFamily="18" charset="0"/>
               </a:rPr>
-              <a:t>Give attacker a permanent root access to a system</a:t>
+              <a:t>Gives attacker a permanent root access to a system</a:t>
             </a:r>
           </a:p>
           <a:p>
@@ -13481,7 +13511,7 @@
                 <a:latin typeface="Times New Roman" panose="02020603050405020304" pitchFamily="18" charset="0"/>
                 <a:cs typeface="Times New Roman" panose="02020603050405020304" pitchFamily="18" charset="0"/>
               </a:rPr>
-              <a:t>Hide its presence</a:t>
+              <a:t>Hides its presence</a:t>
             </a:r>
           </a:p>
           <a:p>
@@ -13491,7 +13521,7 @@
                 <a:latin typeface="Times New Roman" panose="02020603050405020304" pitchFamily="18" charset="0"/>
                 <a:cs typeface="Times New Roman" panose="02020603050405020304" pitchFamily="18" charset="0"/>
               </a:rPr>
-              <a:t>Hide from filesystem</a:t>
+              <a:t>Hides from filesystem</a:t>
             </a:r>
           </a:p>
           <a:p>
@@ -13501,7 +13531,7 @@
                 <a:latin typeface="Times New Roman" panose="02020603050405020304" pitchFamily="18" charset="0"/>
                 <a:cs typeface="Times New Roman" panose="02020603050405020304" pitchFamily="18" charset="0"/>
               </a:rPr>
-              <a:t>Hide its activity</a:t>
+              <a:t>Hides its activity</a:t>
             </a:r>
           </a:p>
           <a:p>
@@ -13527,7 +13557,7 @@
                 <a:latin typeface="Times New Roman" panose="02020603050405020304" pitchFamily="18" charset="0"/>
                 <a:cs typeface="Times New Roman" panose="02020603050405020304" pitchFamily="18" charset="0"/>
               </a:rPr>
-              <a:t>Steal information</a:t>
+              <a:t>Steals information</a:t>
             </a:r>
           </a:p>
           <a:p>
@@ -13536,7 +13566,7 @@
                 <a:latin typeface="Times New Roman" panose="02020603050405020304" pitchFamily="18" charset="0"/>
                 <a:cs typeface="Times New Roman" panose="02020603050405020304" pitchFamily="18" charset="0"/>
               </a:rPr>
-              <a:t>Allow remote code execution</a:t>
+              <a:t>Allows remote code execution</a:t>
             </a:r>
             <a:endParaRPr lang="en-GB" dirty="0">
               <a:latin typeface="Times New Roman" panose="02020603050405020304" pitchFamily="18" charset="0"/>
@@ -27354,7 +27384,7 @@
         <p:spPr>
           <a:xfrm>
             <a:off x="8095016" y="3266041"/>
-            <a:ext cx="3939925" cy="400110"/>
+            <a:ext cx="3985386" cy="400110"/>
           </a:xfrm>
           <a:prstGeom prst="rect">
             <a:avLst/>
@@ -27372,7 +27402,7 @@
                 <a:latin typeface="Times New Roman" panose="02020603050405020304" pitchFamily="18" charset="0"/>
                 <a:cs typeface="Times New Roman" panose="02020603050405020304" pitchFamily="18" charset="0"/>
               </a:rPr>
-              <a:t>Goal hide malicious file/process etc.</a:t>
+              <a:t>Goal: hide malicious file/process etc.</a:t>
             </a:r>
             <a:endParaRPr lang="en-GB" sz="2000" dirty="0">
               <a:latin typeface="Times New Roman" panose="02020603050405020304" pitchFamily="18" charset="0"/>
